--- a/발표자료/세일즈코파일럿_5분발표_웹툰없음(삼성폰트적용).pptx
+++ b/발표자료/세일즈코파일럿_5분발표_웹툰없음(삼성폰트적용).pptx
@@ -4951,7 +4951,7 @@
                 <a:cs typeface="Arial"/>
                 <a:sym typeface="Arial"/>
               </a:rPr>
-              <a:t>경원영업팀 · 2026.08   |   외부 개발비 0원 · 운영비 0원 · 앱 설치 불필요</a:t>
+              <a:t>경원영업팀 · 2026.08 | 외부 개발비 0원 · 운영비 0원 · 앱 설치 불필요</a:t>
             </a:r>
             <a:endParaRPr b="0" i="0" sz="1150" u="none" cap="none" strike="noStrike">
               <a:solidFill>
@@ -8577,7 +8577,7 @@
                 <a:cs typeface="Arial"/>
                 <a:sym typeface="Arial"/>
               </a:rPr>
-              <a:t>(무풍 · 공기청정  — 여러 가지 키워드로 한 번에)</a:t>
+              <a:t>(무풍 · 공기청정 — 여러 가지 키워드로 한 번에)</a:t>
             </a:r>
             <a:endParaRPr b="0" i="0" sz="1200" u="none" cap="none" strike="noStrike">
               <a:solidFill>

--- a/발표자료/세일즈코파일럿_5분발표_웹툰없음(삼성폰트적용).pptx
+++ b/발표자료/세일즈코파일럿_5분발표_웹툰없음(삼성폰트적용).pptx
@@ -252,7 +252,7 @@
   </p:defaultTextStyle>
   <p:extLst>
     <p:ext uri="GoogleSlidesCustomDataVersion2">
-      <go:slidesCustomData xmlns:go="http://customooxmlschemas.google.com/" r:id="rId15" roundtripDataSignature="AMtx7mg9Wy/2gJXanPUMRIxy3ZSMhTbRhQ=="/>
+      <go:slidesCustomData xmlns:go="http://customooxmlschemas.google.com/" r:id="rId15" roundtripDataSignature="AMtx7miz1KAqwfwE8HmeX57C8bVekDMXJQ=="/>
     </p:ext>
   </p:extLst>
 </p:presentation>
@@ -1856,7 +1856,7 @@
   <p:cSld>
     <p:spTree>
       <p:nvGrpSpPr>
-        <p:cNvPr id="294" name="Shape 294"/>
+        <p:cNvPr id="297" name="Shape 297"/>
         <p:cNvGrpSpPr/>
         <p:nvPr/>
       </p:nvGrpSpPr>
@@ -1870,7 +1870,7 @@
       </p:grpSpPr>
       <p:sp>
         <p:nvSpPr>
-          <p:cNvPr id="295" name="Google Shape;295;p6:notes"/>
+          <p:cNvPr id="298" name="Google Shape;298;p6:notes"/>
           <p:cNvSpPr txBox="1"/>
           <p:nvPr>
             <p:ph idx="1" type="body"/>
@@ -1917,7 +1917,7 @@
       </p:sp>
       <p:sp>
         <p:nvSpPr>
-          <p:cNvPr id="296" name="Google Shape;296;p6:notes"/>
+          <p:cNvPr id="299" name="Google Shape;299;p6:notes"/>
           <p:cNvSpPr/>
           <p:nvPr>
             <p:ph idx="2" type="sldImg"/>
@@ -2269,7 +2269,54 @@
       </p:grpSpPr>
       <p:sp>
         <p:nvSpPr>
-          <p:cNvPr id="81" name="Google Shape;81;g3f6c50b3b74_0_0:notes"/>
+          <p:cNvPr id="81" name="Google Shape;81;g3f6c50b3b74_0_56:notes"/>
+          <p:cNvSpPr txBox="1"/>
+          <p:nvPr>
+            <p:ph idx="1" type="body"/>
+          </p:nvPr>
+        </p:nvSpPr>
+        <p:spPr>
+          <a:xfrm>
+            <a:off x="685800" y="4400550"/>
+            <a:ext cx="5486400" cy="3600450"/>
+          </a:xfrm>
+          <a:prstGeom prst="rect">
+            <a:avLst/>
+          </a:prstGeom>
+          <a:noFill/>
+          <a:ln>
+            <a:noFill/>
+          </a:ln>
+        </p:spPr>
+        <p:txBody>
+          <a:bodyPr anchorCtr="0" anchor="t" bIns="45700" lIns="91425" spcFirstLastPara="1" rIns="91425" wrap="square" tIns="45700">
+            <a:noAutofit/>
+          </a:bodyPr>
+          <a:lstStyle/>
+          <a:p>
+            <a:pPr indent="0" lvl="0" marL="0" rtl="0" algn="l">
+              <a:lnSpc>
+                <a:spcPct val="100000"/>
+              </a:lnSpc>
+              <a:spcBef>
+                <a:spcPts val="0"/>
+              </a:spcBef>
+              <a:spcAft>
+                <a:spcPts val="0"/>
+              </a:spcAft>
+              <a:buSzPts val="1400"/>
+              <a:buNone/>
+            </a:pPr>
+            <a:r>
+              <a:t/>
+            </a:r>
+            <a:endParaRPr/>
+          </a:p>
+        </p:txBody>
+      </p:sp>
+      <p:sp>
+        <p:nvSpPr>
+          <p:cNvPr id="82" name="Google Shape;82;g3f6c50b3b74_0_56:notes"/>
           <p:cNvSpPr/>
           <p:nvPr>
             <p:ph idx="2" type="sldImg"/>
@@ -2312,102 +2359,6 @@
           </a:ln>
         </p:spPr>
       </p:sp>
-      <p:sp>
-        <p:nvSpPr>
-          <p:cNvPr id="82" name="Google Shape;82;g3f6c50b3b74_0_0:notes"/>
-          <p:cNvSpPr txBox="1"/>
-          <p:nvPr>
-            <p:ph idx="1" type="body"/>
-          </p:nvPr>
-        </p:nvSpPr>
-        <p:spPr>
-          <a:xfrm>
-            <a:off x="685800" y="4400550"/>
-            <a:ext cx="5486400" cy="3600600"/>
-          </a:xfrm>
-          <a:prstGeom prst="rect">
-            <a:avLst/>
-          </a:prstGeom>
-          <a:noFill/>
-          <a:ln>
-            <a:noFill/>
-          </a:ln>
-        </p:spPr>
-        <p:txBody>
-          <a:bodyPr anchorCtr="0" anchor="t" bIns="45700" lIns="91425" spcFirstLastPara="1" rIns="91425" wrap="square" tIns="45700">
-            <a:noAutofit/>
-          </a:bodyPr>
-          <a:lstStyle/>
-          <a:p>
-            <a:pPr indent="0" lvl="0" marL="0" rtl="0" algn="l">
-              <a:lnSpc>
-                <a:spcPct val="100000"/>
-              </a:lnSpc>
-              <a:spcBef>
-                <a:spcPts val="0"/>
-              </a:spcBef>
-              <a:spcAft>
-                <a:spcPts val="0"/>
-              </a:spcAft>
-              <a:buSzPts val="1400"/>
-              <a:buNone/>
-            </a:pPr>
-            <a:r>
-              <a:rPr lang="en-US"/>
-              <a:t>실제 화면에서 조건을 직접 쳐 보세요. 즉시 뜨는 것이 요점입니다.</a:t>
-            </a:r>
-            <a:endParaRPr/>
-          </a:p>
-        </p:txBody>
-      </p:sp>
-      <p:sp>
-        <p:nvSpPr>
-          <p:cNvPr id="83" name="Google Shape;83;g3f6c50b3b74_0_0:notes"/>
-          <p:cNvSpPr txBox="1"/>
-          <p:nvPr>
-            <p:ph idx="12" type="sldNum"/>
-          </p:nvPr>
-        </p:nvSpPr>
-        <p:spPr>
-          <a:xfrm>
-            <a:off x="3884613" y="8685213"/>
-            <a:ext cx="2971800" cy="458700"/>
-          </a:xfrm>
-          <a:prstGeom prst="rect">
-            <a:avLst/>
-          </a:prstGeom>
-          <a:noFill/>
-          <a:ln>
-            <a:noFill/>
-          </a:ln>
-        </p:spPr>
-        <p:txBody>
-          <a:bodyPr anchorCtr="0" anchor="b" bIns="45700" lIns="91425" spcFirstLastPara="1" rIns="91425" wrap="square" tIns="45700">
-            <a:noAutofit/>
-          </a:bodyPr>
-          <a:lstStyle/>
-          <a:p>
-            <a:pPr indent="0" lvl="0" marL="0" rtl="0" algn="r">
-              <a:lnSpc>
-                <a:spcPct val="100000"/>
-              </a:lnSpc>
-              <a:spcBef>
-                <a:spcPts val="0"/>
-              </a:spcBef>
-              <a:spcAft>
-                <a:spcPts val="0"/>
-              </a:spcAft>
-              <a:buSzPts val="1400"/>
-              <a:buNone/>
-            </a:pPr>
-            <a:fld id="{00000000-1234-1234-1234-123412341234}" type="slidenum">
-              <a:rPr lang="en-US"/>
-              <a:t>‹#›</a:t>
-            </a:fld>
-            <a:endParaRPr/>
-          </a:p>
-        </p:txBody>
-      </p:sp>
     </p:spTree>
   </p:cSld>
   <p:clrMapOvr>
@@ -2435,54 +2386,7 @@
       </p:grpSpPr>
       <p:sp>
         <p:nvSpPr>
-          <p:cNvPr id="104" name="Google Shape;104;g3f6c50b3b74_0_56:notes"/>
-          <p:cNvSpPr txBox="1"/>
-          <p:nvPr>
-            <p:ph idx="1" type="body"/>
-          </p:nvPr>
-        </p:nvSpPr>
-        <p:spPr>
-          <a:xfrm>
-            <a:off x="685800" y="4400550"/>
-            <a:ext cx="5486400" cy="3600450"/>
-          </a:xfrm>
-          <a:prstGeom prst="rect">
-            <a:avLst/>
-          </a:prstGeom>
-          <a:noFill/>
-          <a:ln>
-            <a:noFill/>
-          </a:ln>
-        </p:spPr>
-        <p:txBody>
-          <a:bodyPr anchorCtr="0" anchor="t" bIns="45700" lIns="91425" spcFirstLastPara="1" rIns="91425" wrap="square" tIns="45700">
-            <a:noAutofit/>
-          </a:bodyPr>
-          <a:lstStyle/>
-          <a:p>
-            <a:pPr indent="0" lvl="0" marL="0" rtl="0" algn="l">
-              <a:lnSpc>
-                <a:spcPct val="100000"/>
-              </a:lnSpc>
-              <a:spcBef>
-                <a:spcPts val="0"/>
-              </a:spcBef>
-              <a:spcAft>
-                <a:spcPts val="0"/>
-              </a:spcAft>
-              <a:buSzPts val="1400"/>
-              <a:buNone/>
-            </a:pPr>
-            <a:r>
-              <a:t/>
-            </a:r>
-            <a:endParaRPr/>
-          </a:p>
-        </p:txBody>
-      </p:sp>
-      <p:sp>
-        <p:nvSpPr>
-          <p:cNvPr id="105" name="Google Shape;105;g3f6c50b3b74_0_56:notes"/>
+          <p:cNvPr id="104" name="Google Shape;104;g3f6c50b3b74_0_0:notes"/>
           <p:cNvSpPr/>
           <p:nvPr>
             <p:ph idx="2" type="sldImg"/>
@@ -2524,6 +2428,102 @@
             <a:tailEnd len="sm" w="sm" type="none"/>
           </a:ln>
         </p:spPr>
+      </p:sp>
+      <p:sp>
+        <p:nvSpPr>
+          <p:cNvPr id="105" name="Google Shape;105;g3f6c50b3b74_0_0:notes"/>
+          <p:cNvSpPr txBox="1"/>
+          <p:nvPr>
+            <p:ph idx="1" type="body"/>
+          </p:nvPr>
+        </p:nvSpPr>
+        <p:spPr>
+          <a:xfrm>
+            <a:off x="685800" y="4400550"/>
+            <a:ext cx="5486400" cy="3600600"/>
+          </a:xfrm>
+          <a:prstGeom prst="rect">
+            <a:avLst/>
+          </a:prstGeom>
+          <a:noFill/>
+          <a:ln>
+            <a:noFill/>
+          </a:ln>
+        </p:spPr>
+        <p:txBody>
+          <a:bodyPr anchorCtr="0" anchor="t" bIns="45700" lIns="91425" spcFirstLastPara="1" rIns="91425" wrap="square" tIns="45700">
+            <a:noAutofit/>
+          </a:bodyPr>
+          <a:lstStyle/>
+          <a:p>
+            <a:pPr indent="0" lvl="0" marL="0" rtl="0" algn="l">
+              <a:lnSpc>
+                <a:spcPct val="100000"/>
+              </a:lnSpc>
+              <a:spcBef>
+                <a:spcPts val="0"/>
+              </a:spcBef>
+              <a:spcAft>
+                <a:spcPts val="0"/>
+              </a:spcAft>
+              <a:buSzPts val="1400"/>
+              <a:buNone/>
+            </a:pPr>
+            <a:r>
+              <a:rPr lang="en-US"/>
+              <a:t>실제 화면에서 조건을 직접 쳐 보세요. 즉시 뜨는 것이 요점입니다.</a:t>
+            </a:r>
+            <a:endParaRPr/>
+          </a:p>
+        </p:txBody>
+      </p:sp>
+      <p:sp>
+        <p:nvSpPr>
+          <p:cNvPr id="106" name="Google Shape;106;g3f6c50b3b74_0_0:notes"/>
+          <p:cNvSpPr txBox="1"/>
+          <p:nvPr>
+            <p:ph idx="12" type="sldNum"/>
+          </p:nvPr>
+        </p:nvSpPr>
+        <p:spPr>
+          <a:xfrm>
+            <a:off x="3884613" y="8685213"/>
+            <a:ext cx="2971800" cy="458700"/>
+          </a:xfrm>
+          <a:prstGeom prst="rect">
+            <a:avLst/>
+          </a:prstGeom>
+          <a:noFill/>
+          <a:ln>
+            <a:noFill/>
+          </a:ln>
+        </p:spPr>
+        <p:txBody>
+          <a:bodyPr anchorCtr="0" anchor="b" bIns="45700" lIns="91425" spcFirstLastPara="1" rIns="91425" wrap="square" tIns="45700">
+            <a:noAutofit/>
+          </a:bodyPr>
+          <a:lstStyle/>
+          <a:p>
+            <a:pPr indent="0" lvl="0" marL="0" rtl="0" algn="r">
+              <a:lnSpc>
+                <a:spcPct val="100000"/>
+              </a:lnSpc>
+              <a:spcBef>
+                <a:spcPts val="0"/>
+              </a:spcBef>
+              <a:spcAft>
+                <a:spcPts val="0"/>
+              </a:spcAft>
+              <a:buSzPts val="1400"/>
+              <a:buNone/>
+            </a:pPr>
+            <a:fld id="{00000000-1234-1234-1234-123412341234}" type="slidenum">
+              <a:rPr lang="en-US"/>
+              <a:t>‹#›</a:t>
+            </a:fld>
+            <a:endParaRPr/>
+          </a:p>
+        </p:txBody>
       </p:sp>
     </p:spTree>
   </p:cSld>
@@ -3174,6 +3174,9 @@
   <p:sldLayoutIdLst>
     <p:sldLayoutId id="2147483649" r:id="rId1"/>
   </p:sldLayoutIdLst>
+  <p:transition spd="med">
+    <p:fade/>
+  </p:transition>
   <p:hf dt="0" ftr="0" hdr="0" sldNum="0"/>
   <p:txStyles>
     <p:titleStyle>
@@ -4978,7 +4981,7 @@
   <p:cSld>
     <p:spTree>
       <p:nvGrpSpPr>
-        <p:cNvPr id="297" name="Shape 297"/>
+        <p:cNvPr id="300" name="Shape 300"/>
         <p:cNvGrpSpPr/>
         <p:nvPr/>
       </p:nvGrpSpPr>
@@ -4992,7 +4995,7 @@
       </p:grpSpPr>
       <p:sp>
         <p:nvSpPr>
-          <p:cNvPr id="298" name="Google Shape;298;p6"/>
+          <p:cNvPr id="301" name="Google Shape;301;p6"/>
           <p:cNvSpPr/>
           <p:nvPr/>
         </p:nvSpPr>
@@ -5057,7 +5060,7 @@
       </p:sp>
       <p:sp>
         <p:nvSpPr>
-          <p:cNvPr id="299" name="Google Shape;299;p6"/>
+          <p:cNvPr id="302" name="Google Shape;302;p6"/>
           <p:cNvSpPr/>
           <p:nvPr/>
         </p:nvSpPr>
@@ -5123,7 +5126,7 @@
       </p:sp>
       <p:sp>
         <p:nvSpPr>
-          <p:cNvPr id="300" name="Google Shape;300;p6"/>
+          <p:cNvPr id="303" name="Google Shape;303;p6"/>
           <p:cNvSpPr/>
           <p:nvPr/>
         </p:nvSpPr>
@@ -5188,7 +5191,7 @@
       </p:sp>
       <p:sp>
         <p:nvSpPr>
-          <p:cNvPr id="301" name="Google Shape;301;p6"/>
+          <p:cNvPr id="304" name="Google Shape;304;p6"/>
           <p:cNvSpPr txBox="1"/>
           <p:nvPr/>
         </p:nvSpPr>
@@ -5254,7 +5257,7 @@
       </p:sp>
       <p:sp>
         <p:nvSpPr>
-          <p:cNvPr id="302" name="Google Shape;302;p6"/>
+          <p:cNvPr id="305" name="Google Shape;305;p6"/>
           <p:cNvSpPr txBox="1"/>
           <p:nvPr/>
         </p:nvSpPr>
@@ -5320,7 +5323,7 @@
       </p:sp>
       <p:pic>
         <p:nvPicPr>
-          <p:cNvPr descr="salescopilot-store.vercel.app QR 코드" id="303" name="Google Shape;303;p6"/>
+          <p:cNvPr descr="salescopilot-store.vercel.app QR 코드" id="306" name="Google Shape;306;p6"/>
           <p:cNvPicPr preferRelativeResize="0"/>
           <p:nvPr/>
         </p:nvPicPr>
@@ -5347,7 +5350,7 @@
       </p:pic>
       <p:sp>
         <p:nvSpPr>
-          <p:cNvPr id="304" name="Google Shape;304;p6"/>
+          <p:cNvPr id="307" name="Google Shape;307;p6"/>
           <p:cNvSpPr txBox="1"/>
           <p:nvPr/>
         </p:nvSpPr>
@@ -5413,7 +5416,7 @@
       </p:sp>
       <p:sp>
         <p:nvSpPr>
-          <p:cNvPr id="305" name="Google Shape;305;p6"/>
+          <p:cNvPr id="308" name="Google Shape;308;p6"/>
           <p:cNvSpPr txBox="1"/>
           <p:nvPr/>
         </p:nvSpPr>
@@ -5884,7 +5887,15 @@
               </a:rPr>
               <a:t>그래서 외부 개발 없이, 팀 내부에서 만들었습니다 </a:t>
             </a:r>
-            <a:endParaRPr/>
+            <a:endParaRPr b="0" i="0" sz="1400" u="none" cap="none" strike="noStrike">
+              <a:solidFill>
+                <a:srgbClr val="000000"/>
+              </a:solidFill>
+              <a:latin typeface="Arial"/>
+              <a:ea typeface="Arial"/>
+              <a:cs typeface="Arial"/>
+              <a:sym typeface="Arial"/>
+            </a:endParaRPr>
           </a:p>
           <a:p>
             <a:pPr indent="0" lvl="0" marL="0" marR="0" rtl="0" algn="l">
@@ -5904,6 +5915,14 @@
               <a:buFont typeface="Malgun Gothic"/>
               <a:buNone/>
             </a:pPr>
+            <a:r>
+              <a:rPr lang="en-US" sz="1100">
+                <a:solidFill>
+                  <a:srgbClr val="5B6478"/>
+                </a:solidFill>
+              </a:rPr>
+              <a:t>-</a:t>
+            </a:r>
             <a:r>
               <a:rPr b="0" i="0" lang="en-US" sz="1100" u="none" cap="none" strike="noStrike">
                 <a:solidFill>
@@ -5914,7 +5933,7 @@
                 <a:cs typeface="Arial"/>
                 <a:sym typeface="Arial"/>
               </a:rPr>
-              <a:t>— 개발비 0원 · 운영비 0원, 공식 자료를 그대로 가져와 화면 하나로 모았습니다.</a:t>
+              <a:t> 개발비 0원 · 운영비 0원, 공식 자료를 그대로 가져와 화면 하나로 모았습니다.</a:t>
             </a:r>
             <a:endParaRPr b="0" i="0" sz="1100" u="none" cap="none" strike="noStrike">
               <a:solidFill>
@@ -6244,7 +6263,15 @@
               </a:rPr>
               <a:t>경원영업팀 65개 매장 </a:t>
             </a:r>
-            <a:endParaRPr/>
+            <a:endParaRPr b="0" i="0" sz="1400" u="none" cap="none" strike="noStrike">
+              <a:solidFill>
+                <a:srgbClr val="000000"/>
+              </a:solidFill>
+              <a:latin typeface="Arial"/>
+              <a:ea typeface="Arial"/>
+              <a:cs typeface="Arial"/>
+              <a:sym typeface="Arial"/>
+            </a:endParaRPr>
           </a:p>
           <a:p>
             <a:pPr indent="0" lvl="0" marL="0" marR="0" rtl="0" algn="l">
@@ -6264,6 +6291,14 @@
               <a:buFont typeface="Malgun Gothic"/>
               <a:buNone/>
             </a:pPr>
+            <a:r>
+              <a:rPr lang="en-US" sz="1100">
+                <a:solidFill>
+                  <a:srgbClr val="5B6478"/>
+                </a:solidFill>
+              </a:rPr>
+              <a:t>-</a:t>
+            </a:r>
             <a:r>
               <a:rPr b="0" i="0" lang="en-US" sz="1100" u="none" cap="none" strike="noStrike">
                 <a:solidFill>
@@ -6274,7 +6309,7 @@
                 <a:cs typeface="Arial"/>
                 <a:sym typeface="Arial"/>
               </a:rPr>
-              <a:t>— 로그인, 설치, 계정 발급 없이 매장 모바일 · 태블릿 · PC에서 바로 사용 가능합니다.</a:t>
+              <a:t> 로그인, 설치, 계정 발급 없이 매장 모바일 · 태블릿 · PC에서 바로 사용 가능합니다.</a:t>
             </a:r>
             <a:endParaRPr b="0" i="0" sz="1100" u="none" cap="none" strike="noStrike">
               <a:solidFill>
@@ -6716,7 +6751,7 @@
         <p:spPr>
           <a:xfrm>
             <a:off x="457200" y="1330000"/>
-            <a:ext cx="3931920" cy="3250000"/>
+            <a:ext cx="3931800" cy="3249900"/>
           </a:xfrm>
           <a:prstGeom prst="rect">
             <a:avLst/>
@@ -6781,7 +6816,7 @@
         <p:spPr>
           <a:xfrm>
             <a:off x="4754880" y="1330000"/>
-            <a:ext cx="3931920" cy="3250000"/>
+            <a:ext cx="3931800" cy="3249900"/>
           </a:xfrm>
           <a:prstGeom prst="rect">
             <a:avLst/>
@@ -6846,7 +6881,7 @@
         <p:spPr>
           <a:xfrm>
             <a:off x="457200" y="1330000"/>
-            <a:ext cx="73152" cy="3250000"/>
+            <a:ext cx="73200" cy="3249900"/>
           </a:xfrm>
           <a:prstGeom prst="rect">
             <a:avLst/>
@@ -6911,7 +6946,7 @@
         <p:spPr>
           <a:xfrm>
             <a:off x="4754880" y="1330000"/>
-            <a:ext cx="73152" cy="3250000"/>
+            <a:ext cx="73200" cy="3249900"/>
           </a:xfrm>
           <a:prstGeom prst="rect">
             <a:avLst/>
@@ -7107,8 +7142,8 @@
         </p:nvSpPr>
         <p:spPr>
           <a:xfrm>
-            <a:off x="713232" y="1950000"/>
-            <a:ext cx="1200000" cy="260000"/>
+            <a:off x="685832" y="2759875"/>
+            <a:ext cx="1200000" cy="260100"/>
           </a:xfrm>
           <a:prstGeom prst="rect">
             <a:avLst/>
@@ -7173,8 +7208,8 @@
         </p:nvSpPr>
         <p:spPr>
           <a:xfrm>
-            <a:off x="713232" y="2230000"/>
-            <a:ext cx="3400000" cy="520000"/>
+            <a:off x="685832" y="3091625"/>
+            <a:ext cx="3399900" cy="519900"/>
           </a:xfrm>
           <a:prstGeom prst="rect">
             <a:avLst/>
@@ -7239,8 +7274,8 @@
         </p:nvSpPr>
         <p:spPr>
           <a:xfrm>
-            <a:off x="5010912" y="1950000"/>
-            <a:ext cx="1200000" cy="260000"/>
+            <a:off x="5010912" y="2750000"/>
+            <a:ext cx="1200000" cy="260100"/>
           </a:xfrm>
           <a:prstGeom prst="rect">
             <a:avLst/>
@@ -7305,8 +7340,8 @@
         </p:nvSpPr>
         <p:spPr>
           <a:xfrm>
-            <a:off x="5010912" y="2230000"/>
-            <a:ext cx="3400000" cy="520000"/>
+            <a:off x="5010912" y="3058725"/>
+            <a:ext cx="3399900" cy="519900"/>
           </a:xfrm>
           <a:prstGeom prst="rect">
             <a:avLst/>
@@ -7371,8 +7406,8 @@
         </p:nvSpPr>
         <p:spPr>
           <a:xfrm>
-            <a:off x="713232" y="2750000"/>
-            <a:ext cx="1200000" cy="260000"/>
+            <a:off x="713232" y="2000750"/>
+            <a:ext cx="1200000" cy="260100"/>
           </a:xfrm>
           <a:prstGeom prst="rect">
             <a:avLst/>
@@ -7437,8 +7472,8 @@
         </p:nvSpPr>
         <p:spPr>
           <a:xfrm>
-            <a:off x="713232" y="3030000"/>
-            <a:ext cx="3400000" cy="520000"/>
+            <a:off x="685832" y="2311800"/>
+            <a:ext cx="3399900" cy="519900"/>
           </a:xfrm>
           <a:prstGeom prst="rect">
             <a:avLst/>
@@ -7503,8 +7538,8 @@
         </p:nvSpPr>
         <p:spPr>
           <a:xfrm>
-            <a:off x="5010912" y="2750000"/>
-            <a:ext cx="1200000" cy="260000"/>
+            <a:off x="5010900" y="1969750"/>
+            <a:ext cx="1200000" cy="260100"/>
           </a:xfrm>
           <a:prstGeom prst="rect">
             <a:avLst/>
@@ -7569,8 +7604,8 @@
         </p:nvSpPr>
         <p:spPr>
           <a:xfrm>
-            <a:off x="5010912" y="3030000"/>
-            <a:ext cx="3400000" cy="520000"/>
+            <a:off x="5020837" y="2229850"/>
+            <a:ext cx="3399900" cy="519900"/>
           </a:xfrm>
           <a:prstGeom prst="rect">
             <a:avLst/>
@@ -7596,6 +7631,11 @@
               <a:spcAft>
                 <a:spcPts val="0"/>
               </a:spcAft>
+              <a:buClr>
+                <a:srgbClr val="000000"/>
+              </a:buClr>
+              <a:buSzPts val="1100"/>
+              <a:buFont typeface="Arial"/>
               <a:buNone/>
             </a:pPr>
             <a:r>
@@ -7713,7 +7753,7 @@
           </a:bodyPr>
           <a:lstStyle/>
           <a:p>
-            <a:pPr indent="0" lvl="0" marL="0" rtl="0" algn="l">
+            <a:pPr indent="0" lvl="0" marL="0" marR="0" rtl="0" algn="l">
               <a:lnSpc>
                 <a:spcPct val="120000"/>
               </a:lnSpc>
@@ -7731,129 +7771,79 @@
               <a:buNone/>
             </a:pPr>
             <a:r>
-              <a:rPr lang="en-US" sz="1100">
+              <a:rPr b="0" i="0" lang="en-US" sz="1100" u="none" cap="none" strike="noStrike">
                 <a:solidFill>
                   <a:srgbClr val="0B1020"/>
-                </a:solidFill>
-              </a:rPr>
-              <a:t>사람마다 답이 달라 경력 편차가 </a:t>
-            </a:r>
-            <a:endParaRPr sz="1100">
-              <a:solidFill>
-                <a:srgbClr val="0B1020"/>
-              </a:solidFill>
-            </a:endParaRPr>
-          </a:p>
-          <a:p>
-            <a:pPr indent="0" lvl="0" marL="0" rtl="0" algn="l">
-              <a:lnSpc>
-                <a:spcPct val="120000"/>
-              </a:lnSpc>
-              <a:spcBef>
-                <a:spcPts val="0"/>
-              </a:spcBef>
-              <a:spcAft>
-                <a:spcPts val="0"/>
-              </a:spcAft>
-              <a:buClr>
-                <a:srgbClr val="0B1020"/>
-              </a:buClr>
-              <a:buSzPts val="2500"/>
-              <a:buFont typeface="Malgun Gothic"/>
-              <a:buNone/>
-            </a:pPr>
-            <a:r>
-              <a:rPr lang="en-US" sz="1100">
-                <a:solidFill>
-                  <a:srgbClr val="0B1020"/>
-                </a:solidFill>
-              </a:rPr>
-              <a:t>그대로 응대 품질 편차가 된다</a:t>
-            </a:r>
-            <a:endParaRPr i="0" sz="1100" u="none" cap="none" strike="noStrike">
-              <a:solidFill>
-                <a:srgbClr val="0B1020"/>
-              </a:solidFill>
-            </a:endParaRPr>
-          </a:p>
-        </p:txBody>
-      </p:sp>
-      <p:sp>
-        <p:nvSpPr>
-          <p:cNvPr id="74" name="Google Shape;74;p3"/>
-          <p:cNvSpPr/>
-          <p:nvPr/>
-        </p:nvSpPr>
-        <p:spPr>
-          <a:xfrm>
-            <a:off x="5010912" y="3550000"/>
-            <a:ext cx="1200000" cy="260000"/>
-          </a:xfrm>
-          <a:prstGeom prst="rect">
-            <a:avLst/>
-          </a:prstGeom>
-          <a:noFill/>
-          <a:ln>
-            <a:noFill/>
-          </a:ln>
-        </p:spPr>
-        <p:txBody>
-          <a:bodyPr anchorCtr="0" anchor="ctr" bIns="45700" lIns="91425" spcFirstLastPara="1" rIns="91425" wrap="square" tIns="45700">
-            <a:noAutofit/>
-          </a:bodyPr>
-          <a:lstStyle/>
-          <a:p>
-            <a:pPr indent="0" lvl="0" marL="0" marR="0" rtl="0" algn="l">
-              <a:lnSpc>
-                <a:spcPct val="120000"/>
-              </a:lnSpc>
-              <a:spcBef>
-                <a:spcPts val="0"/>
-              </a:spcBef>
-              <a:spcAft>
-                <a:spcPts val="0"/>
-              </a:spcAft>
-              <a:buClr>
-                <a:srgbClr val="7C2D8F"/>
-              </a:buClr>
-              <a:buSzPts val="1000"/>
-              <a:buFont typeface="Malgun Gothic"/>
-              <a:buNone/>
-            </a:pPr>
-            <a:r>
-              <a:rPr b="1" i="0" lang="en-US" sz="1000" u="none" cap="none" strike="noStrike">
-                <a:solidFill>
-                  <a:srgbClr val="7C2D8F"/>
                 </a:solidFill>
                 <a:latin typeface="Arial"/>
                 <a:ea typeface="Arial"/>
                 <a:cs typeface="Arial"/>
                 <a:sym typeface="Arial"/>
               </a:rPr>
-              <a:t>일관성</a:t>
-            </a:r>
-            <a:endParaRPr b="1" i="0" sz="1000" u="none" cap="none" strike="noStrike">
-              <a:solidFill>
-                <a:srgbClr val="7C2D8F"/>
-              </a:solidFill>
-              <a:latin typeface="Arial"/>
-              <a:ea typeface="Arial"/>
-              <a:cs typeface="Arial"/>
-              <a:sym typeface="Arial"/>
-            </a:endParaRPr>
-          </a:p>
-        </p:txBody>
-      </p:sp>
-      <p:sp>
-        <p:nvSpPr>
-          <p:cNvPr id="75" name="Google Shape;75;p3"/>
-          <p:cNvSpPr/>
-          <p:nvPr/>
-        </p:nvSpPr>
-        <p:spPr>
-          <a:xfrm>
-            <a:off x="5010912" y="3830000"/>
-            <a:ext cx="3675888" cy="520000"/>
+              <a:t>사람마다 답이 달라 경력 편차가 </a:t>
+            </a:r>
+            <a:endParaRPr b="0" i="0" sz="1100" u="none" cap="none" strike="noStrike">
+              <a:solidFill>
+                <a:srgbClr val="0B1020"/>
+              </a:solidFill>
+              <a:latin typeface="Arial"/>
+              <a:ea typeface="Arial"/>
+              <a:cs typeface="Arial"/>
+              <a:sym typeface="Arial"/>
+            </a:endParaRPr>
+          </a:p>
+          <a:p>
+            <a:pPr indent="0" lvl="0" marL="0" marR="0" rtl="0" algn="l">
+              <a:lnSpc>
+                <a:spcPct val="120000"/>
+              </a:lnSpc>
+              <a:spcBef>
+                <a:spcPts val="0"/>
+              </a:spcBef>
+              <a:spcAft>
+                <a:spcPts val="0"/>
+              </a:spcAft>
+              <a:buClr>
+                <a:srgbClr val="0B1020"/>
+              </a:buClr>
+              <a:buSzPts val="2500"/>
+              <a:buFont typeface="Malgun Gothic"/>
+              <a:buNone/>
+            </a:pPr>
+            <a:r>
+              <a:rPr b="0" i="0" lang="en-US" sz="1100" u="none" cap="none" strike="noStrike">
+                <a:solidFill>
+                  <a:srgbClr val="0B1020"/>
+                </a:solidFill>
+                <a:latin typeface="Arial"/>
+                <a:ea typeface="Arial"/>
+                <a:cs typeface="Arial"/>
+                <a:sym typeface="Arial"/>
+              </a:rPr>
+              <a:t>그대로 응대 품질 편차가 된다</a:t>
+            </a:r>
+            <a:endParaRPr b="0" i="0" sz="1100" u="none" cap="none" strike="noStrike">
+              <a:solidFill>
+                <a:srgbClr val="0B1020"/>
+              </a:solidFill>
+              <a:latin typeface="Arial"/>
+              <a:ea typeface="Arial"/>
+              <a:cs typeface="Arial"/>
+              <a:sym typeface="Arial"/>
+            </a:endParaRPr>
+          </a:p>
+        </p:txBody>
+      </p:sp>
+      <p:sp>
+        <p:nvSpPr>
+          <p:cNvPr id="74" name="Google Shape;74;p3"/>
+          <p:cNvSpPr/>
+          <p:nvPr/>
+        </p:nvSpPr>
+        <p:spPr>
+          <a:xfrm>
+            <a:off x="5010912" y="3550000"/>
+            <a:ext cx="1200000" cy="260000"/>
           </a:xfrm>
           <a:prstGeom prst="rect">
             <a:avLst/>
@@ -7864,6 +7854,72 @@
           </a:ln>
         </p:spPr>
         <p:txBody>
+          <a:bodyPr anchorCtr="0" anchor="ctr" bIns="45700" lIns="91425" spcFirstLastPara="1" rIns="91425" wrap="square" tIns="45700">
+            <a:noAutofit/>
+          </a:bodyPr>
+          <a:lstStyle/>
+          <a:p>
+            <a:pPr indent="0" lvl="0" marL="0" marR="0" rtl="0" algn="l">
+              <a:lnSpc>
+                <a:spcPct val="120000"/>
+              </a:lnSpc>
+              <a:spcBef>
+                <a:spcPts val="0"/>
+              </a:spcBef>
+              <a:spcAft>
+                <a:spcPts val="0"/>
+              </a:spcAft>
+              <a:buClr>
+                <a:srgbClr val="7C2D8F"/>
+              </a:buClr>
+              <a:buSzPts val="1000"/>
+              <a:buFont typeface="Malgun Gothic"/>
+              <a:buNone/>
+            </a:pPr>
+            <a:r>
+              <a:rPr b="1" i="0" lang="en-US" sz="1000" u="none" cap="none" strike="noStrike">
+                <a:solidFill>
+                  <a:srgbClr val="7C2D8F"/>
+                </a:solidFill>
+                <a:latin typeface="Arial"/>
+                <a:ea typeface="Arial"/>
+                <a:cs typeface="Arial"/>
+                <a:sym typeface="Arial"/>
+              </a:rPr>
+              <a:t>일관성</a:t>
+            </a:r>
+            <a:endParaRPr b="1" i="0" sz="1000" u="none" cap="none" strike="noStrike">
+              <a:solidFill>
+                <a:srgbClr val="7C2D8F"/>
+              </a:solidFill>
+              <a:latin typeface="Arial"/>
+              <a:ea typeface="Arial"/>
+              <a:cs typeface="Arial"/>
+              <a:sym typeface="Arial"/>
+            </a:endParaRPr>
+          </a:p>
+        </p:txBody>
+      </p:sp>
+      <p:sp>
+        <p:nvSpPr>
+          <p:cNvPr id="75" name="Google Shape;75;p3"/>
+          <p:cNvSpPr/>
+          <p:nvPr/>
+        </p:nvSpPr>
+        <p:spPr>
+          <a:xfrm>
+            <a:off x="5010912" y="3830000"/>
+            <a:ext cx="3675888" cy="520000"/>
+          </a:xfrm>
+          <a:prstGeom prst="rect">
+            <a:avLst/>
+          </a:prstGeom>
+          <a:noFill/>
+          <a:ln>
+            <a:noFill/>
+          </a:ln>
+        </p:spPr>
+        <p:txBody>
           <a:bodyPr anchorCtr="0" anchor="t" bIns="45700" lIns="91425" spcFirstLastPara="1" rIns="91425" wrap="square" tIns="45700">
             <a:noAutofit/>
           </a:bodyPr>
@@ -7887,10 +7943,14 @@
               <a:buNone/>
             </a:pPr>
             <a:r>
-              <a:rPr lang="en-US" sz="1100">
+              <a:rPr b="0" i="0" lang="en-US" sz="1100" u="none" cap="none" strike="noStrike">
                 <a:solidFill>
                   <a:srgbClr val="0B1020"/>
                 </a:solidFill>
+                <a:latin typeface="Arial"/>
+                <a:ea typeface="Arial"/>
+                <a:cs typeface="Arial"/>
+                <a:sym typeface="Arial"/>
               </a:rPr>
               <a:t>신입사원도 첫날부터 동일한 수준으로 응대한다</a:t>
             </a:r>
@@ -8188,7 +8248,7 @@
     </p:bg>
     <p:spTree>
       <p:nvGrpSpPr>
-        <p:cNvPr id="84" name="Shape 84"/>
+        <p:cNvPr id="83" name="Shape 83"/>
         <p:cNvGrpSpPr/>
         <p:nvPr/>
       </p:nvGrpSpPr>
@@ -8202,7 +8262,7 @@
       </p:grpSpPr>
       <p:sp>
         <p:nvSpPr>
-          <p:cNvPr id="85" name="Google Shape;85;g3f6c50b3b74_0_0"/>
+          <p:cNvPr id="84" name="Google Shape;84;g3f6c50b3b74_0_56"/>
           <p:cNvSpPr/>
           <p:nvPr/>
         </p:nvSpPr>
@@ -8217,11 +8277,11 @@
             </a:avLst>
           </a:prstGeom>
           <a:solidFill>
-            <a:srgbClr val="0F766E"/>
+            <a:srgbClr val="1428A0"/>
           </a:solidFill>
           <a:ln cap="flat" cmpd="sng" w="12700">
             <a:solidFill>
-              <a:srgbClr val="0F766E"/>
+              <a:srgbClr val="1428A0"/>
             </a:solidFill>
             <a:prstDash val="solid"/>
             <a:round/>
@@ -8269,7 +8329,7 @@
       </p:sp>
       <p:sp>
         <p:nvSpPr>
-          <p:cNvPr id="86" name="Google Shape;86;g3f6c50b3b74_0_0"/>
+          <p:cNvPr id="85" name="Google Shape;85;g3f6c50b3b74_0_56"/>
           <p:cNvSpPr/>
           <p:nvPr/>
         </p:nvSpPr>
@@ -8319,7 +8379,7 @@
                 <a:cs typeface="Arial"/>
                 <a:sym typeface="Arial"/>
               </a:rPr>
-              <a:t>속도</a:t>
+              <a:t>정확도</a:t>
             </a:r>
             <a:endParaRPr b="0" i="0" sz="1100" u="none" cap="none" strike="noStrike">
               <a:solidFill>
@@ -8335,7 +8395,7 @@
       </p:sp>
       <p:sp>
         <p:nvSpPr>
-          <p:cNvPr id="87" name="Google Shape;87;g3f6c50b3b74_0_0"/>
+          <p:cNvPr id="86" name="Google Shape;86;g3f6c50b3b74_0_56"/>
           <p:cNvSpPr/>
           <p:nvPr/>
         </p:nvSpPr>
@@ -8385,82 +8445,82 @@
                 <a:cs typeface="Arial"/>
                 <a:sym typeface="Arial"/>
               </a:rPr>
-              <a:t>상담의</a:t>
-            </a:r>
-            <a:r>
-              <a:rPr b="1" lang="en-US" sz="2500">
-                <a:solidFill>
-                  <a:srgbClr val="0B1020"/>
-                </a:solidFill>
-              </a:rPr>
-              <a:t> 질을 높이고 시간 낭비를 막아주는</a:t>
-            </a:r>
-            <a:r>
-              <a:rPr b="1" i="0" lang="en-US" sz="2500" u="none" cap="none" strike="noStrike">
-                <a:solidFill>
-                  <a:srgbClr val="0B1020"/>
+              <a:t>설치 조건을 계약 전에 확인</a:t>
+            </a:r>
+            <a:endParaRPr b="1" i="0" sz="2500" u="none" cap="none" strike="noStrike">
+              <a:solidFill>
+                <a:srgbClr val="0B1020"/>
+              </a:solidFill>
+              <a:latin typeface="Arial"/>
+              <a:ea typeface="Arial"/>
+              <a:cs typeface="Arial"/>
+              <a:sym typeface="Arial"/>
+            </a:endParaRPr>
+          </a:p>
+        </p:txBody>
+      </p:sp>
+      <p:sp>
+        <p:nvSpPr>
+          <p:cNvPr id="87" name="Google Shape;87;g3f6c50b3b74_0_56"/>
+          <p:cNvSpPr/>
+          <p:nvPr/>
+        </p:nvSpPr>
+        <p:spPr>
+          <a:xfrm>
+            <a:off x="457200" y="1078992"/>
+            <a:ext cx="8229600" cy="292608"/>
+          </a:xfrm>
+          <a:prstGeom prst="rect">
+            <a:avLst/>
+          </a:prstGeom>
+          <a:noFill/>
+          <a:ln>
+            <a:noFill/>
+          </a:ln>
+        </p:spPr>
+        <p:txBody>
+          <a:bodyPr anchorCtr="0" anchor="ctr" bIns="45700" lIns="91425" spcFirstLastPara="1" rIns="91425" wrap="square" tIns="45700">
+            <a:noAutofit/>
+          </a:bodyPr>
+          <a:lstStyle/>
+          <a:p>
+            <a:pPr indent="0" lvl="0" marL="0" marR="0" rtl="0" algn="l">
+              <a:lnSpc>
+                <a:spcPct val="120000"/>
+              </a:lnSpc>
+              <a:spcBef>
+                <a:spcPts val="0"/>
+              </a:spcBef>
+              <a:spcAft>
+                <a:spcPts val="0"/>
+              </a:spcAft>
+              <a:buClr>
+                <a:srgbClr val="5B6478"/>
+              </a:buClr>
+              <a:buSzPts val="1250"/>
+              <a:buFont typeface="Malgun Gothic"/>
+              <a:buNone/>
+            </a:pPr>
+            <a:r>
+              <a:rPr b="0" i="0" lang="en-US" sz="1250" u="none" cap="none" strike="noStrike">
+                <a:solidFill>
+                  <a:srgbClr val="5B6478"/>
                 </a:solidFill>
                 <a:latin typeface="Arial"/>
                 <a:ea typeface="Arial"/>
                 <a:cs typeface="Arial"/>
                 <a:sym typeface="Arial"/>
               </a:rPr>
-              <a:t> 모델파인더</a:t>
-            </a:r>
-            <a:endParaRPr b="1" i="0" sz="2500" u="none" cap="none" strike="noStrike">
-              <a:solidFill>
-                <a:srgbClr val="0B1020"/>
-              </a:solidFill>
-              <a:latin typeface="Arial"/>
-              <a:ea typeface="Arial"/>
-              <a:cs typeface="Arial"/>
-              <a:sym typeface="Arial"/>
-            </a:endParaRPr>
-          </a:p>
-        </p:txBody>
-      </p:sp>
-      <p:sp>
-        <p:nvSpPr>
-          <p:cNvPr id="88" name="Google Shape;88;g3f6c50b3b74_0_0"/>
-          <p:cNvSpPr/>
-          <p:nvPr/>
-        </p:nvSpPr>
-        <p:spPr>
-          <a:xfrm>
-            <a:off x="457200" y="1078992"/>
-            <a:ext cx="8229600" cy="292608"/>
-          </a:xfrm>
-          <a:prstGeom prst="rect">
-            <a:avLst/>
-          </a:prstGeom>
-          <a:noFill/>
-          <a:ln>
-            <a:noFill/>
-          </a:ln>
-        </p:spPr>
-        <p:txBody>
-          <a:bodyPr anchorCtr="0" anchor="ctr" bIns="45700" lIns="91425" spcFirstLastPara="1" rIns="91425" wrap="square" tIns="45700">
-            <a:noAutofit/>
-          </a:bodyPr>
-          <a:lstStyle/>
-          <a:p>
-            <a:pPr indent="0" lvl="0" marL="0" marR="0" rtl="0" algn="l">
-              <a:lnSpc>
-                <a:spcPct val="120000"/>
-              </a:lnSpc>
-              <a:spcBef>
-                <a:spcPts val="0"/>
-              </a:spcBef>
-              <a:spcAft>
-                <a:spcPts val="0"/>
-              </a:spcAft>
-              <a:buClr>
-                <a:srgbClr val="5B6478"/>
-              </a:buClr>
-              <a:buSzPts val="1250"/>
-              <a:buFont typeface="Malgun Gothic"/>
-              <a:buNone/>
-            </a:pPr>
+              <a:t>시범 기간 가장 많이 열린 화면 </a:t>
+            </a:r>
+            <a:r>
+              <a:rPr lang="en-US" sz="1250">
+                <a:solidFill>
+                  <a:srgbClr val="5B6478"/>
+                </a:solidFill>
+              </a:rPr>
+              <a:t>:</a:t>
+            </a:r>
             <a:r>
               <a:rPr b="0" i="0" lang="en-US" sz="1250" u="none" cap="none" strike="noStrike">
                 <a:solidFill>
@@ -8471,7 +8531,7 @@
                 <a:cs typeface="Arial"/>
                 <a:sym typeface="Arial"/>
               </a:rPr>
-              <a:t>시범 기간 두 번째로 많이 열린 화면 — 120건 · 2위</a:t>
+              <a:t> 128건 · 1위</a:t>
             </a:r>
             <a:endParaRPr b="0" i="0" sz="1250" u="none" cap="none" strike="noStrike">
               <a:solidFill>
@@ -8487,13 +8547,13 @@
       </p:sp>
       <p:sp>
         <p:nvSpPr>
-          <p:cNvPr id="89" name="Google Shape;89;g3f6c50b3b74_0_0"/>
-          <p:cNvSpPr/>
-          <p:nvPr/>
-        </p:nvSpPr>
-        <p:spPr>
-          <a:xfrm>
-            <a:off x="4530475" y="1476725"/>
+          <p:cNvPr id="88" name="Google Shape;88;g3f6c50b3b74_0_56"/>
+          <p:cNvSpPr/>
+          <p:nvPr/>
+        </p:nvSpPr>
+        <p:spPr>
+          <a:xfrm>
+            <a:off x="4530475" y="1588540"/>
             <a:ext cx="4365000" cy="457200"/>
           </a:xfrm>
           <a:prstGeom prst="rect">
@@ -8537,7 +8597,7 @@
                 <a:cs typeface="Arial"/>
                 <a:sym typeface="Arial"/>
               </a:rPr>
-              <a:t>키워드 한 줄이면 조건이 겹쳐 좁혀집니다</a:t>
+              <a:t>한눈에 확인하는 제품별 설치 가이드</a:t>
             </a:r>
             <a:endParaRPr b="1" i="0" sz="1200" u="none" cap="none" strike="noStrike">
               <a:solidFill>
@@ -8577,7 +8637,47 @@
                 <a:cs typeface="Arial"/>
                 <a:sym typeface="Arial"/>
               </a:rPr>
-              <a:t>(무풍 · 공기청정 — 여러 가지 키워드로 한 번에)</a:t>
+              <a:t>(21개 카테고리 </a:t>
+            </a:r>
+            <a:r>
+              <a:rPr lang="en-US" sz="1200">
+                <a:solidFill>
+                  <a:srgbClr val="0B1020"/>
+                </a:solidFill>
+              </a:rPr>
+              <a:t>:</a:t>
+            </a:r>
+            <a:r>
+              <a:rPr b="0" i="0" lang="en-US" sz="1200" u="none" cap="none" strike="noStrike">
+                <a:solidFill>
+                  <a:srgbClr val="0B1020"/>
+                </a:solidFill>
+                <a:latin typeface="Arial"/>
+                <a:ea typeface="Arial"/>
+                <a:cs typeface="Arial"/>
+                <a:sym typeface="Arial"/>
+              </a:rPr>
+              <a:t> 전기 · 배수 · 이격 · 문 폭 사이즈 </a:t>
+            </a:r>
+            <a:r>
+              <a:rPr lang="en-US" sz="1200">
+                <a:solidFill>
+                  <a:srgbClr val="0B1020"/>
+                </a:solidFill>
+              </a:rPr>
+              <a:t>외</a:t>
+            </a:r>
+            <a:r>
+              <a:rPr b="0" i="0" lang="en-US" sz="1200" u="none" cap="none" strike="noStrike">
+                <a:solidFill>
+                  <a:srgbClr val="0B1020"/>
+                </a:solidFill>
+                <a:latin typeface="Arial"/>
+                <a:ea typeface="Arial"/>
+                <a:cs typeface="Arial"/>
+                <a:sym typeface="Arial"/>
+              </a:rPr>
+              <a:t>)</a:t>
             </a:r>
             <a:endParaRPr b="0" i="0" sz="1200" u="none" cap="none" strike="noStrike">
               <a:solidFill>
@@ -8593,13 +8693,13 @@
       </p:sp>
       <p:sp>
         <p:nvSpPr>
-          <p:cNvPr id="90" name="Google Shape;90;g3f6c50b3b74_0_0"/>
-          <p:cNvSpPr/>
-          <p:nvPr/>
-        </p:nvSpPr>
-        <p:spPr>
-          <a:xfrm>
-            <a:off x="4530475" y="2052800"/>
+          <p:cNvPr id="89" name="Google Shape;89;g3f6c50b3b74_0_56"/>
+          <p:cNvSpPr/>
+          <p:nvPr/>
+        </p:nvSpPr>
+        <p:spPr>
+          <a:xfrm>
+            <a:off x="4530475" y="2164615"/>
             <a:ext cx="4365000" cy="1051500"/>
           </a:xfrm>
           <a:prstGeom prst="rect">
@@ -8658,13 +8758,13 @@
       </p:sp>
       <p:sp>
         <p:nvSpPr>
-          <p:cNvPr id="91" name="Google Shape;91;g3f6c50b3b74_0_0"/>
-          <p:cNvSpPr/>
-          <p:nvPr/>
-        </p:nvSpPr>
-        <p:spPr>
-          <a:xfrm>
-            <a:off x="4673328" y="2052800"/>
+          <p:cNvPr id="90" name="Google Shape;90;g3f6c50b3b74_0_56"/>
+          <p:cNvSpPr/>
+          <p:nvPr/>
+        </p:nvSpPr>
+        <p:spPr>
+          <a:xfrm>
+            <a:off x="4673328" y="2164615"/>
             <a:ext cx="4127100" cy="1051500"/>
           </a:xfrm>
           <a:prstGeom prst="rect">
@@ -8708,7 +8808,7 @@
                 <a:cs typeface="Arial"/>
                 <a:sym typeface="Arial"/>
               </a:rPr>
-              <a:t>카탈로그를 찾는 시간</a:t>
+              <a:t>설치 불가 시 손실</a:t>
             </a:r>
             <a:endParaRPr b="1" i="0" sz="1150" u="none" cap="none" strike="noStrike">
               <a:solidFill>
@@ -8738,6 +8838,14 @@
               <a:buFont typeface="Malgun Gothic"/>
               <a:buNone/>
             </a:pPr>
+            <a:r>
+              <a:rPr lang="en-US" sz="1150">
+                <a:solidFill>
+                  <a:srgbClr val="5B6478"/>
+                </a:solidFill>
+              </a:rPr>
+              <a:t>  </a:t>
+            </a:r>
             <a:r>
               <a:rPr b="0" i="0" lang="en-US" sz="1150" u="none" cap="none" strike="noStrike">
                 <a:solidFill>
@@ -8748,7 +8856,7 @@
                 <a:cs typeface="Arial"/>
                 <a:sym typeface="Arial"/>
               </a:rPr>
-              <a:t>: 모델명·치수·기능을 기억에서 꺼내야 합니다</a:t>
+              <a:t>: 기사 재방문 비용, 일정 재조정 시간, 반품 손해 비용 등</a:t>
             </a:r>
             <a:endParaRPr b="0" i="0" sz="1150" u="none" cap="none" strike="noStrike">
               <a:solidFill>
@@ -8758,6 +8866,33 @@
               <a:ea typeface="Arial"/>
               <a:cs typeface="Arial"/>
               <a:sym typeface="Arial"/>
+            </a:endParaRPr>
+          </a:p>
+          <a:p>
+            <a:pPr indent="0" lvl="0" marL="0" marR="0" rtl="0" algn="l">
+              <a:lnSpc>
+                <a:spcPct val="120000"/>
+              </a:lnSpc>
+              <a:spcBef>
+                <a:spcPts val="0"/>
+              </a:spcBef>
+              <a:spcAft>
+                <a:spcPts val="0"/>
+              </a:spcAft>
+              <a:buClr>
+                <a:srgbClr val="5B6478"/>
+              </a:buClr>
+              <a:buSzPts val="1150"/>
+              <a:buFont typeface="Malgun Gothic"/>
+              <a:buNone/>
+            </a:pPr>
+            <a:r>
+              <a:t/>
+            </a:r>
+            <a:endParaRPr sz="550">
+              <a:solidFill>
+                <a:srgbClr val="5B6478"/>
+              </a:solidFill>
             </a:endParaRPr>
           </a:p>
           <a:p>
@@ -8788,7 +8923,7 @@
                 <a:cs typeface="Arial"/>
                 <a:sym typeface="Arial"/>
               </a:rPr>
-              <a:t>한 줄 조건 검색 시 모델 리스트 즉시 확인 가능</a:t>
+              <a:t>판매 전 30초 확인이면 그 비용을 만회합니다</a:t>
             </a:r>
             <a:endParaRPr b="1" i="0" sz="1150" u="none" cap="none" strike="noStrike">
               <a:solidFill>
@@ -8804,13 +8939,13 @@
       </p:sp>
       <p:sp>
         <p:nvSpPr>
-          <p:cNvPr id="92" name="Google Shape;92;g3f6c50b3b74_0_0"/>
-          <p:cNvSpPr/>
-          <p:nvPr/>
-        </p:nvSpPr>
-        <p:spPr>
-          <a:xfrm>
-            <a:off x="4530475" y="3287245"/>
+          <p:cNvPr id="91" name="Google Shape;91;g3f6c50b3b74_0_56"/>
+          <p:cNvSpPr/>
+          <p:nvPr/>
+        </p:nvSpPr>
+        <p:spPr>
+          <a:xfrm>
+            <a:off x="4530475" y="3376697"/>
             <a:ext cx="4365000" cy="402300"/>
           </a:xfrm>
           <a:prstGeom prst="rect">
@@ -8869,14 +9004,14 @@
       </p:sp>
       <p:sp>
         <p:nvSpPr>
-          <p:cNvPr id="93" name="Google Shape;93;g3f6c50b3b74_0_0"/>
-          <p:cNvSpPr/>
-          <p:nvPr/>
-        </p:nvSpPr>
-        <p:spPr>
-          <a:xfrm>
-            <a:off x="4641575" y="3287250"/>
-            <a:ext cx="563400" cy="402300"/>
+          <p:cNvPr id="92" name="Google Shape;92;g3f6c50b3b74_0_56"/>
+          <p:cNvSpPr/>
+          <p:nvPr/>
+        </p:nvSpPr>
+        <p:spPr>
+          <a:xfrm>
+            <a:off x="4530475" y="3376702"/>
+            <a:ext cx="674400" cy="402300"/>
           </a:xfrm>
           <a:prstGeom prst="rect">
             <a:avLst/>
@@ -8892,7 +9027,7 @@
           </a:bodyPr>
           <a:lstStyle/>
           <a:p>
-            <a:pPr indent="0" lvl="0" marL="0" marR="0" rtl="0" algn="l">
+            <a:pPr indent="0" lvl="0" marL="0" marR="0" rtl="0" algn="ctr">
               <a:lnSpc>
                 <a:spcPct val="120000"/>
               </a:lnSpc>
@@ -8910,7 +9045,7 @@
               <a:buNone/>
             </a:pPr>
             <a:r>
-              <a:rPr b="1" i="0" lang="en-US" sz="950" u="none" cap="none" strike="noStrike">
+              <a:rPr b="1" i="0" lang="en-US" sz="1150" u="none" cap="none" strike="noStrike">
                 <a:solidFill>
                   <a:srgbClr val="5B6478"/>
                 </a:solidFill>
@@ -8921,7 +9056,7 @@
               </a:rPr>
               <a:t>매니저</a:t>
             </a:r>
-            <a:endParaRPr b="1" i="0" sz="950" u="none" cap="none" strike="noStrike">
+            <a:endParaRPr b="1" i="0" sz="1150" u="none" cap="none" strike="noStrike">
               <a:solidFill>
                 <a:srgbClr val="5B6478"/>
               </a:solidFill>
@@ -8935,14 +9070,14 @@
       </p:sp>
       <p:sp>
         <p:nvSpPr>
-          <p:cNvPr id="94" name="Google Shape;94;g3f6c50b3b74_0_0"/>
-          <p:cNvSpPr/>
-          <p:nvPr/>
-        </p:nvSpPr>
-        <p:spPr>
-          <a:xfrm>
-            <a:off x="5205058" y="3287245"/>
-            <a:ext cx="3571200" cy="402300"/>
+          <p:cNvPr id="93" name="Google Shape;93;g3f6c50b3b74_0_56"/>
+          <p:cNvSpPr/>
+          <p:nvPr/>
+        </p:nvSpPr>
+        <p:spPr>
+          <a:xfrm>
+            <a:off x="5205050" y="3376702"/>
+            <a:ext cx="3690300" cy="402300"/>
           </a:xfrm>
           <a:prstGeom prst="rect">
             <a:avLst/>
@@ -8976,269 +9111,63 @@
               <a:buNone/>
             </a:pPr>
             <a:r>
-              <a:rPr b="0" i="0" lang="en-US" sz="900" u="none" cap="none" strike="noStrike">
+              <a:rPr b="1" i="0" lang="en-US" sz="1150" u="none" cap="none" strike="noStrike">
                 <a:solidFill>
                   <a:srgbClr val="0B1020"/>
                 </a:solidFill>
-                <a:latin typeface="Arial"/>
-                <a:ea typeface="Arial"/>
-                <a:cs typeface="Arial"/>
-                <a:sym typeface="Arial"/>
-              </a:rPr>
-              <a:t>고민하며 낭비하던 시간이 줄어 매끄러운 상담 가능</a:t>
-            </a:r>
-            <a:endParaRPr b="0" i="0" sz="900" u="none" cap="none" strike="noStrike">
+              </a:rPr>
+              <a:t>설치 조건 확인</a:t>
+            </a:r>
+            <a:r>
+              <a:rPr b="1" lang="en-US" sz="1150">
+                <a:solidFill>
+                  <a:srgbClr val="0B1020"/>
+                </a:solidFill>
+              </a:rPr>
+              <a:t>으로</a:t>
+            </a:r>
+            <a:r>
+              <a:rPr b="1" i="0" lang="en-US" sz="1150" u="none" cap="none" strike="noStrike">
+                <a:solidFill>
+                  <a:srgbClr val="0B1020"/>
+                </a:solidFill>
+              </a:rPr>
+              <a:t> 설치 불가로 인한</a:t>
+            </a:r>
+            <a:r>
+              <a:rPr b="1" lang="en-US" sz="1150">
+                <a:solidFill>
+                  <a:srgbClr val="0B1020"/>
+                </a:solidFill>
+              </a:rPr>
+              <a:t> </a:t>
+            </a:r>
+            <a:r>
+              <a:rPr b="1" i="0" lang="en-US" sz="1150" u="none" cap="none" strike="noStrike">
+                <a:solidFill>
+                  <a:srgbClr val="0B1020"/>
+                </a:solidFill>
+              </a:rPr>
+              <a:t>취소 확률을 낮춤</a:t>
+            </a:r>
+            <a:endParaRPr b="1" i="0" sz="1150" u="none" cap="none" strike="noStrike">
               <a:solidFill>
                 <a:srgbClr val="0B1020"/>
               </a:solidFill>
-              <a:latin typeface="Arial"/>
-              <a:ea typeface="Arial"/>
-              <a:cs typeface="Arial"/>
-              <a:sym typeface="Arial"/>
-            </a:endParaRPr>
-          </a:p>
-        </p:txBody>
-      </p:sp>
-      <p:sp>
-        <p:nvSpPr>
-          <p:cNvPr id="95" name="Google Shape;95;g3f6c50b3b74_0_0"/>
-          <p:cNvSpPr/>
-          <p:nvPr/>
-        </p:nvSpPr>
-        <p:spPr>
-          <a:xfrm>
-            <a:off x="4530475" y="3744448"/>
+            </a:endParaRPr>
+          </a:p>
+        </p:txBody>
+      </p:sp>
+      <p:sp>
+        <p:nvSpPr>
+          <p:cNvPr id="94" name="Google Shape;94;g3f6c50b3b74_0_56"/>
+          <p:cNvSpPr/>
+          <p:nvPr/>
+        </p:nvSpPr>
+        <p:spPr>
+          <a:xfrm>
+            <a:off x="4530475" y="3856263"/>
             <a:ext cx="4365000" cy="512100"/>
-          </a:xfrm>
-          <a:prstGeom prst="rect">
-            <a:avLst/>
-          </a:prstGeom>
-          <a:solidFill>
-            <a:srgbClr val="0F766E"/>
-          </a:solidFill>
-          <a:ln cap="flat" cmpd="sng" w="12700">
-            <a:solidFill>
-              <a:srgbClr val="0F766E"/>
-            </a:solidFill>
-            <a:prstDash val="solid"/>
-            <a:round/>
-            <a:headEnd len="sm" w="sm" type="none"/>
-            <a:tailEnd len="sm" w="sm" type="none"/>
-          </a:ln>
-        </p:spPr>
-        <p:txBody>
-          <a:bodyPr anchorCtr="0" anchor="ctr" bIns="91425" lIns="91425" spcFirstLastPara="1" rIns="91425" wrap="square" tIns="91425">
-            <a:noAutofit/>
-          </a:bodyPr>
-          <a:lstStyle/>
-          <a:p>
-            <a:pPr indent="0" lvl="0" marL="0" marR="0" rtl="0" algn="l">
-              <a:lnSpc>
-                <a:spcPct val="100000"/>
-              </a:lnSpc>
-              <a:spcBef>
-                <a:spcPts val="0"/>
-              </a:spcBef>
-              <a:spcAft>
-                <a:spcPts val="0"/>
-              </a:spcAft>
-              <a:buClr>
-                <a:srgbClr val="000000"/>
-              </a:buClr>
-              <a:buSzPts val="1400"/>
-              <a:buFont typeface="Arial"/>
-              <a:buNone/>
-            </a:pPr>
-            <a:r>
-              <a:t/>
-            </a:r>
-            <a:endParaRPr b="0" i="0" sz="1400" u="none" cap="none" strike="noStrike">
-              <a:solidFill>
-                <a:srgbClr val="000000"/>
-              </a:solidFill>
-              <a:latin typeface="Arial"/>
-              <a:ea typeface="Arial"/>
-              <a:cs typeface="Arial"/>
-              <a:sym typeface="Arial"/>
-            </a:endParaRPr>
-          </a:p>
-        </p:txBody>
-      </p:sp>
-      <p:sp>
-        <p:nvSpPr>
-          <p:cNvPr id="96" name="Google Shape;96;g3f6c50b3b74_0_0"/>
-          <p:cNvSpPr/>
-          <p:nvPr/>
-        </p:nvSpPr>
-        <p:spPr>
-          <a:xfrm>
-            <a:off x="4641583" y="3744448"/>
-            <a:ext cx="515700" cy="512100"/>
-          </a:xfrm>
-          <a:prstGeom prst="rect">
-            <a:avLst/>
-          </a:prstGeom>
-          <a:noFill/>
-          <a:ln>
-            <a:noFill/>
-          </a:ln>
-        </p:spPr>
-        <p:txBody>
-          <a:bodyPr anchorCtr="0" anchor="ctr" bIns="45700" lIns="91425" spcFirstLastPara="1" rIns="91425" wrap="square" tIns="45700">
-            <a:noAutofit/>
-          </a:bodyPr>
-          <a:lstStyle/>
-          <a:p>
-            <a:pPr indent="0" lvl="0" marL="0" marR="0" rtl="0" algn="l">
-              <a:lnSpc>
-                <a:spcPct val="120000"/>
-              </a:lnSpc>
-              <a:spcBef>
-                <a:spcPts val="0"/>
-              </a:spcBef>
-              <a:spcAft>
-                <a:spcPts val="0"/>
-              </a:spcAft>
-              <a:buClr>
-                <a:srgbClr val="FFFFFF"/>
-              </a:buClr>
-              <a:buSzPts val="950"/>
-              <a:buFont typeface="Malgun Gothic"/>
-              <a:buNone/>
-            </a:pPr>
-            <a:r>
-              <a:rPr b="1" i="0" lang="en-US" sz="950" u="none" cap="none" strike="noStrike">
-                <a:solidFill>
-                  <a:srgbClr val="FFFFFF"/>
-                </a:solidFill>
-                <a:latin typeface="Arial"/>
-                <a:ea typeface="Arial"/>
-                <a:cs typeface="Arial"/>
-                <a:sym typeface="Arial"/>
-              </a:rPr>
-              <a:t>지점</a:t>
-            </a:r>
-            <a:endParaRPr b="1" i="0" sz="950" u="none" cap="none" strike="noStrike">
-              <a:solidFill>
-                <a:srgbClr val="FFFFFF"/>
-              </a:solidFill>
-              <a:latin typeface="Arial"/>
-              <a:ea typeface="Arial"/>
-              <a:cs typeface="Arial"/>
-              <a:sym typeface="Arial"/>
-            </a:endParaRPr>
-          </a:p>
-        </p:txBody>
-      </p:sp>
-      <p:sp>
-        <p:nvSpPr>
-          <p:cNvPr id="97" name="Google Shape;97;g3f6c50b3b74_0_0"/>
-          <p:cNvSpPr/>
-          <p:nvPr/>
-        </p:nvSpPr>
-        <p:spPr>
-          <a:xfrm>
-            <a:off x="5205058" y="3744448"/>
-            <a:ext cx="3571200" cy="512100"/>
-          </a:xfrm>
-          <a:prstGeom prst="rect">
-            <a:avLst/>
-          </a:prstGeom>
-          <a:noFill/>
-          <a:ln>
-            <a:noFill/>
-          </a:ln>
-        </p:spPr>
-        <p:txBody>
-          <a:bodyPr anchorCtr="0" anchor="ctr" bIns="45700" lIns="91425" spcFirstLastPara="1" rIns="91425" wrap="square" tIns="45700">
-            <a:noAutofit/>
-          </a:bodyPr>
-          <a:lstStyle/>
-          <a:p>
-            <a:pPr indent="0" lvl="0" marL="0" marR="0" rtl="0" algn="l">
-              <a:lnSpc>
-                <a:spcPct val="120000"/>
-              </a:lnSpc>
-              <a:spcBef>
-                <a:spcPts val="0"/>
-              </a:spcBef>
-              <a:spcAft>
-                <a:spcPts val="0"/>
-              </a:spcAft>
-              <a:buClr>
-                <a:srgbClr val="FFFFFF"/>
-              </a:buClr>
-              <a:buSzPts val="1200"/>
-              <a:buFont typeface="Malgun Gothic"/>
-              <a:buNone/>
-            </a:pPr>
-            <a:r>
-              <a:rPr b="1" i="0" lang="en-US" sz="1200" u="none" cap="none" strike="noStrike">
-                <a:solidFill>
-                  <a:srgbClr val="FFFFFF"/>
-                </a:solidFill>
-                <a:latin typeface="Arial"/>
-                <a:ea typeface="Arial"/>
-                <a:cs typeface="Arial"/>
-                <a:sym typeface="Arial"/>
-              </a:rPr>
-              <a:t>응대 회전율 — 응대 가능 고객 수 증가</a:t>
-            </a:r>
-            <a:endParaRPr b="1" i="0" sz="1200" u="none" cap="none" strike="noStrike">
-              <a:solidFill>
-                <a:srgbClr val="FFFFFF"/>
-              </a:solidFill>
-              <a:latin typeface="Arial"/>
-              <a:ea typeface="Arial"/>
-              <a:cs typeface="Arial"/>
-              <a:sym typeface="Arial"/>
-            </a:endParaRPr>
-          </a:p>
-        </p:txBody>
-      </p:sp>
-      <p:pic>
-        <p:nvPicPr>
-          <p:cNvPr id="98" name="Google Shape;98;g3f6c50b3b74_0_0"/>
-          <p:cNvPicPr preferRelativeResize="0"/>
-          <p:nvPr/>
-        </p:nvPicPr>
-        <p:blipFill rotWithShape="1">
-          <a:blip r:embed="rId3">
-            <a:alphaModFix/>
-          </a:blip>
-          <a:srcRect b="0" l="0" r="0" t="0"/>
-          <a:stretch/>
-        </p:blipFill>
-        <p:spPr>
-          <a:xfrm>
-            <a:off x="483739" y="1788749"/>
-            <a:ext cx="3876000" cy="2422500"/>
-          </a:xfrm>
-          <a:prstGeom prst="rect">
-            <a:avLst/>
-          </a:prstGeom>
-          <a:noFill/>
-          <a:ln cap="flat" cmpd="sng" w="9525">
-            <a:solidFill>
-              <a:srgbClr val="DDE1EC"/>
-            </a:solidFill>
-            <a:prstDash val="solid"/>
-            <a:round/>
-            <a:headEnd len="sm" w="sm" type="none"/>
-            <a:tailEnd len="sm" w="sm" type="none"/>
-          </a:ln>
-        </p:spPr>
-      </p:pic>
-      <p:sp>
-        <p:nvSpPr>
-          <p:cNvPr id="99" name="Google Shape;99;g3f6c50b3b74_0_0"/>
-          <p:cNvSpPr/>
-          <p:nvPr/>
-        </p:nvSpPr>
-        <p:spPr>
-          <a:xfrm>
-            <a:off x="7132150" y="310891"/>
-            <a:ext cx="2011800" cy="255900"/>
           </a:xfrm>
           <a:prstGeom prst="rect">
             <a:avLst/>
@@ -9296,14 +9225,14 @@
       </p:sp>
       <p:sp>
         <p:nvSpPr>
-          <p:cNvPr id="100" name="Google Shape;100;g3f6c50b3b74_0_0"/>
-          <p:cNvSpPr/>
-          <p:nvPr/>
-        </p:nvSpPr>
-        <p:spPr>
-          <a:xfrm>
-            <a:off x="7172700" y="317335"/>
-            <a:ext cx="1971300" cy="255900"/>
+          <p:cNvPr id="95" name="Google Shape;95;g3f6c50b3b74_0_56"/>
+          <p:cNvSpPr/>
+          <p:nvPr/>
+        </p:nvSpPr>
+        <p:spPr>
+          <a:xfrm>
+            <a:off x="4530475" y="3856265"/>
+            <a:ext cx="674400" cy="512100"/>
           </a:xfrm>
           <a:prstGeom prst="rect">
             <a:avLst/>
@@ -9319,9 +9248,9 @@
           </a:bodyPr>
           <a:lstStyle/>
           <a:p>
-            <a:pPr indent="0" lvl="0" marL="0" marR="0" rtl="0" algn="l">
-              <a:lnSpc>
-                <a:spcPct val="100000"/>
+            <a:pPr indent="0" lvl="0" marL="0" marR="0" rtl="0" algn="ctr">
+              <a:lnSpc>
+                <a:spcPct val="120000"/>
               </a:lnSpc>
               <a:spcBef>
                 <a:spcPts val="0"/>
@@ -9332,12 +9261,12 @@
               <a:buClr>
                 <a:srgbClr val="FFFFFF"/>
               </a:buClr>
-              <a:buSzPts val="900"/>
+              <a:buSzPts val="950"/>
               <a:buFont typeface="Malgun Gothic"/>
               <a:buNone/>
             </a:pPr>
             <a:r>
-              <a:rPr b="0" i="0" lang="en-US" sz="900" u="none" cap="none" strike="noStrike">
+              <a:rPr b="1" i="0" lang="en-US" sz="1150" u="none" cap="none" strike="noStrike">
                 <a:solidFill>
                   <a:srgbClr val="FFFFFF"/>
                 </a:solidFill>
@@ -9346,30 +9275,162 @@
                 <a:cs typeface="Arial"/>
                 <a:sym typeface="Arial"/>
               </a:rPr>
-              <a:t>세일즈 코파일럿</a:t>
-            </a:r>
-            <a:endParaRPr b="0" i="0" sz="900" u="none" cap="none" strike="noStrike">
-              <a:solidFill>
-                <a:schemeClr val="dk1"/>
-              </a:solidFill>
-              <a:latin typeface="Arial"/>
-              <a:ea typeface="Arial"/>
-              <a:cs typeface="Arial"/>
-              <a:sym typeface="Arial"/>
-            </a:endParaRPr>
-          </a:p>
-        </p:txBody>
-      </p:sp>
-      <p:sp>
-        <p:nvSpPr>
-          <p:cNvPr id="101" name="Google Shape;101;g3f6c50b3b74_0_0"/>
-          <p:cNvSpPr/>
-          <p:nvPr/>
-        </p:nvSpPr>
-        <p:spPr>
-          <a:xfrm>
-            <a:off x="0" y="5065775"/>
-            <a:ext cx="9144000" cy="77700"/>
+              <a:t>지점</a:t>
+            </a:r>
+            <a:endParaRPr b="1" i="0" sz="1150" u="none" cap="none" strike="noStrike">
+              <a:solidFill>
+                <a:srgbClr val="FFFFFF"/>
+              </a:solidFill>
+              <a:latin typeface="Arial"/>
+              <a:ea typeface="Arial"/>
+              <a:cs typeface="Arial"/>
+              <a:sym typeface="Arial"/>
+            </a:endParaRPr>
+          </a:p>
+        </p:txBody>
+      </p:sp>
+      <p:sp>
+        <p:nvSpPr>
+          <p:cNvPr id="96" name="Google Shape;96;g3f6c50b3b74_0_56"/>
+          <p:cNvSpPr/>
+          <p:nvPr/>
+        </p:nvSpPr>
+        <p:spPr>
+          <a:xfrm>
+            <a:off x="5205058" y="3856263"/>
+            <a:ext cx="3571200" cy="512100"/>
+          </a:xfrm>
+          <a:prstGeom prst="rect">
+            <a:avLst/>
+          </a:prstGeom>
+          <a:noFill/>
+          <a:ln>
+            <a:noFill/>
+          </a:ln>
+        </p:spPr>
+        <p:txBody>
+          <a:bodyPr anchorCtr="0" anchor="ctr" bIns="45700" lIns="91425" spcFirstLastPara="1" rIns="91425" wrap="square" tIns="45700">
+            <a:noAutofit/>
+          </a:bodyPr>
+          <a:lstStyle/>
+          <a:p>
+            <a:pPr indent="0" lvl="0" marL="0" marR="0" rtl="0" algn="l">
+              <a:lnSpc>
+                <a:spcPct val="120000"/>
+              </a:lnSpc>
+              <a:spcBef>
+                <a:spcPts val="0"/>
+              </a:spcBef>
+              <a:spcAft>
+                <a:spcPts val="0"/>
+              </a:spcAft>
+              <a:buClr>
+                <a:srgbClr val="FFFFFF"/>
+              </a:buClr>
+              <a:buSzPts val="1200"/>
+              <a:buFont typeface="Malgun Gothic"/>
+              <a:buNone/>
+            </a:pPr>
+            <a:r>
+              <a:rPr b="1" i="0" lang="en-US" sz="1150" u="none" cap="none" strike="noStrike">
+                <a:solidFill>
+                  <a:srgbClr val="FFFFFF"/>
+                </a:solidFill>
+                <a:latin typeface="Arial"/>
+                <a:ea typeface="Arial"/>
+                <a:cs typeface="Arial"/>
+                <a:sym typeface="Arial"/>
+              </a:rPr>
+              <a:t>설치 재방문 · 일정 재조정 · 설치 불가 취소 감소</a:t>
+            </a:r>
+            <a:endParaRPr b="1" i="0" sz="1150" u="none" cap="none" strike="noStrike">
+              <a:solidFill>
+                <a:srgbClr val="FFFFFF"/>
+              </a:solidFill>
+              <a:latin typeface="Arial"/>
+              <a:ea typeface="Arial"/>
+              <a:cs typeface="Arial"/>
+              <a:sym typeface="Arial"/>
+            </a:endParaRPr>
+          </a:p>
+        </p:txBody>
+      </p:sp>
+      <p:pic>
+        <p:nvPicPr>
+          <p:cNvPr id="97" name="Google Shape;97;g3f6c50b3b74_0_56"/>
+          <p:cNvPicPr preferRelativeResize="0"/>
+          <p:nvPr/>
+        </p:nvPicPr>
+        <p:blipFill rotWithShape="1">
+          <a:blip r:embed="rId3">
+            <a:alphaModFix/>
+          </a:blip>
+          <a:srcRect b="0" l="0" r="0" t="0"/>
+          <a:stretch/>
+        </p:blipFill>
+        <p:spPr>
+          <a:xfrm>
+            <a:off x="457200" y="1614675"/>
+            <a:ext cx="1899862" cy="2753700"/>
+          </a:xfrm>
+          <a:prstGeom prst="rect">
+            <a:avLst/>
+          </a:prstGeom>
+          <a:noFill/>
+          <a:ln cap="flat" cmpd="sng" w="9525">
+            <a:solidFill>
+              <a:srgbClr val="DDE1EC"/>
+            </a:solidFill>
+            <a:prstDash val="solid"/>
+            <a:round/>
+            <a:headEnd len="sm" w="sm" type="none"/>
+            <a:tailEnd len="sm" w="sm" type="none"/>
+          </a:ln>
+        </p:spPr>
+      </p:pic>
+      <p:pic>
+        <p:nvPicPr>
+          <p:cNvPr id="98" name="Google Shape;98;g3f6c50b3b74_0_56"/>
+          <p:cNvPicPr preferRelativeResize="0"/>
+          <p:nvPr/>
+        </p:nvPicPr>
+        <p:blipFill rotWithShape="1">
+          <a:blip r:embed="rId4">
+            <a:alphaModFix/>
+          </a:blip>
+          <a:srcRect b="0" l="0" r="0" t="0"/>
+          <a:stretch/>
+        </p:blipFill>
+        <p:spPr>
+          <a:xfrm>
+            <a:off x="2462538" y="1614675"/>
+            <a:ext cx="1899862" cy="2753700"/>
+          </a:xfrm>
+          <a:prstGeom prst="rect">
+            <a:avLst/>
+          </a:prstGeom>
+          <a:noFill/>
+          <a:ln cap="flat" cmpd="sng" w="9525">
+            <a:solidFill>
+              <a:srgbClr val="DDE1EC"/>
+            </a:solidFill>
+            <a:prstDash val="solid"/>
+            <a:round/>
+            <a:headEnd len="sm" w="sm" type="none"/>
+            <a:tailEnd len="sm" w="sm" type="none"/>
+          </a:ln>
+        </p:spPr>
+      </p:pic>
+      <p:sp>
+        <p:nvSpPr>
+          <p:cNvPr id="99" name="Google Shape;99;g3f6c50b3b74_0_56"/>
+          <p:cNvSpPr/>
+          <p:nvPr/>
+        </p:nvSpPr>
+        <p:spPr>
+          <a:xfrm>
+            <a:off x="7132150" y="310891"/>
+            <a:ext cx="2011800" cy="255900"/>
           </a:xfrm>
           <a:prstGeom prst="rect">
             <a:avLst/>
@@ -9427,14 +9488,14 @@
       </p:sp>
       <p:sp>
         <p:nvSpPr>
-          <p:cNvPr id="102" name="Google Shape;102;g3f6c50b3b74_0_0"/>
-          <p:cNvSpPr/>
-          <p:nvPr/>
-        </p:nvSpPr>
-        <p:spPr>
-          <a:xfrm>
-            <a:off x="8549648" y="4841350"/>
-            <a:ext cx="475800" cy="255900"/>
+          <p:cNvPr id="100" name="Google Shape;100;g3f6c50b3b74_0_56"/>
+          <p:cNvSpPr/>
+          <p:nvPr/>
+        </p:nvSpPr>
+        <p:spPr>
+          <a:xfrm>
+            <a:off x="7172700" y="317335"/>
+            <a:ext cx="1971300" cy="255900"/>
           </a:xfrm>
           <a:prstGeom prst="rect">
             <a:avLst/>
@@ -9450,18 +9511,18 @@
           </a:bodyPr>
           <a:lstStyle/>
           <a:p>
-            <a:pPr indent="0" lvl="0" marL="0" marR="0" rtl="0" algn="r">
-              <a:lnSpc>
-                <a:spcPct val="100000"/>
-              </a:lnSpc>
-              <a:spcBef>
-                <a:spcPts val="0"/>
-              </a:spcBef>
-              <a:spcAft>
-                <a:spcPts val="0"/>
-              </a:spcAft>
-              <a:buClr>
-                <a:srgbClr val="5B6478"/>
+            <a:pPr indent="0" lvl="0" marL="0" marR="0" rtl="0" algn="l">
+              <a:lnSpc>
+                <a:spcPct val="100000"/>
+              </a:lnSpc>
+              <a:spcBef>
+                <a:spcPts val="0"/>
+              </a:spcBef>
+              <a:spcAft>
+                <a:spcPts val="0"/>
+              </a:spcAft>
+              <a:buClr>
+                <a:srgbClr val="FFFFFF"/>
               </a:buClr>
               <a:buSzPts val="900"/>
               <a:buFont typeface="Malgun Gothic"/>
@@ -9470,14 +9531,153 @@
             <a:r>
               <a:rPr b="0" i="0" lang="en-US" sz="900" u="none" cap="none" strike="noStrike">
                 <a:solidFill>
-                  <a:srgbClr val="5B6478"/>
+                  <a:srgbClr val="FFFFFF"/>
                 </a:solidFill>
                 <a:latin typeface="Arial"/>
                 <a:ea typeface="Arial"/>
                 <a:cs typeface="Arial"/>
                 <a:sym typeface="Arial"/>
               </a:rPr>
-              <a:t>4/10</a:t>
+              <a:t>세일즈 코파일럿</a:t>
+            </a:r>
+            <a:endParaRPr b="0" i="0" sz="900" u="none" cap="none" strike="noStrike">
+              <a:solidFill>
+                <a:schemeClr val="dk1"/>
+              </a:solidFill>
+              <a:latin typeface="Arial"/>
+              <a:ea typeface="Arial"/>
+              <a:cs typeface="Arial"/>
+              <a:sym typeface="Arial"/>
+            </a:endParaRPr>
+          </a:p>
+        </p:txBody>
+      </p:sp>
+      <p:sp>
+        <p:nvSpPr>
+          <p:cNvPr id="101" name="Google Shape;101;g3f6c50b3b74_0_56"/>
+          <p:cNvSpPr/>
+          <p:nvPr/>
+        </p:nvSpPr>
+        <p:spPr>
+          <a:xfrm>
+            <a:off x="0" y="5065775"/>
+            <a:ext cx="9144000" cy="77700"/>
+          </a:xfrm>
+          <a:prstGeom prst="rect">
+            <a:avLst/>
+          </a:prstGeom>
+          <a:solidFill>
+            <a:srgbClr val="1428A0"/>
+          </a:solidFill>
+          <a:ln cap="flat" cmpd="sng" w="12700">
+            <a:solidFill>
+              <a:srgbClr val="1428A0"/>
+            </a:solidFill>
+            <a:prstDash val="solid"/>
+            <a:round/>
+            <a:headEnd len="sm" w="sm" type="none"/>
+            <a:tailEnd len="sm" w="sm" type="none"/>
+          </a:ln>
+        </p:spPr>
+        <p:txBody>
+          <a:bodyPr anchorCtr="0" anchor="ctr" bIns="91425" lIns="91425" spcFirstLastPara="1" rIns="91425" wrap="square" tIns="91425">
+            <a:noAutofit/>
+          </a:bodyPr>
+          <a:lstStyle/>
+          <a:p>
+            <a:pPr indent="0" lvl="0" marL="0" marR="0" rtl="0" algn="l">
+              <a:lnSpc>
+                <a:spcPct val="100000"/>
+              </a:lnSpc>
+              <a:spcBef>
+                <a:spcPts val="0"/>
+              </a:spcBef>
+              <a:spcAft>
+                <a:spcPts val="0"/>
+              </a:spcAft>
+              <a:buClr>
+                <a:srgbClr val="000000"/>
+              </a:buClr>
+              <a:buSzPts val="1400"/>
+              <a:buFont typeface="Arial"/>
+              <a:buNone/>
+            </a:pPr>
+            <a:r>
+              <a:t/>
+            </a:r>
+            <a:endParaRPr b="0" i="0" sz="1400" u="none" cap="none" strike="noStrike">
+              <a:solidFill>
+                <a:srgbClr val="000000"/>
+              </a:solidFill>
+              <a:latin typeface="Arial"/>
+              <a:ea typeface="Arial"/>
+              <a:cs typeface="Arial"/>
+              <a:sym typeface="Arial"/>
+            </a:endParaRPr>
+          </a:p>
+        </p:txBody>
+      </p:sp>
+      <p:sp>
+        <p:nvSpPr>
+          <p:cNvPr id="102" name="Google Shape;102;g3f6c50b3b74_0_56"/>
+          <p:cNvSpPr/>
+          <p:nvPr/>
+        </p:nvSpPr>
+        <p:spPr>
+          <a:xfrm>
+            <a:off x="8549648" y="4841350"/>
+            <a:ext cx="475800" cy="255900"/>
+          </a:xfrm>
+          <a:prstGeom prst="rect">
+            <a:avLst/>
+          </a:prstGeom>
+          <a:noFill/>
+          <a:ln>
+            <a:noFill/>
+          </a:ln>
+        </p:spPr>
+        <p:txBody>
+          <a:bodyPr anchorCtr="0" anchor="ctr" bIns="45700" lIns="91425" spcFirstLastPara="1" rIns="91425" wrap="square" tIns="45700">
+            <a:noAutofit/>
+          </a:bodyPr>
+          <a:lstStyle/>
+          <a:p>
+            <a:pPr indent="0" lvl="0" marL="0" marR="0" rtl="0" algn="r">
+              <a:lnSpc>
+                <a:spcPct val="100000"/>
+              </a:lnSpc>
+              <a:spcBef>
+                <a:spcPts val="0"/>
+              </a:spcBef>
+              <a:spcAft>
+                <a:spcPts val="0"/>
+              </a:spcAft>
+              <a:buClr>
+                <a:srgbClr val="5B6478"/>
+              </a:buClr>
+              <a:buSzPts val="900"/>
+              <a:buFont typeface="Malgun Gothic"/>
+              <a:buNone/>
+            </a:pPr>
+            <a:r>
+              <a:rPr lang="en-US" sz="900">
+                <a:solidFill>
+                  <a:srgbClr val="5B6478"/>
+                </a:solidFill>
+              </a:rPr>
+              <a:t>4</a:t>
+            </a:r>
+            <a:r>
+              <a:rPr b="0" i="0" lang="en-US" sz="900" u="none" cap="none" strike="noStrike">
+                <a:solidFill>
+                  <a:srgbClr val="5B6478"/>
+                </a:solidFill>
+                <a:latin typeface="Arial"/>
+                <a:ea typeface="Arial"/>
+                <a:cs typeface="Arial"/>
+                <a:sym typeface="Arial"/>
+              </a:rPr>
+              <a:t>/10</a:t>
             </a:r>
             <a:endParaRPr b="0" i="0" sz="900" u="none" cap="none" strike="noStrike">
               <a:solidFill>
@@ -9511,7 +9711,7 @@
     </p:bg>
     <p:spTree>
       <p:nvGrpSpPr>
-        <p:cNvPr id="106" name="Shape 106"/>
+        <p:cNvPr id="107" name="Shape 107"/>
         <p:cNvGrpSpPr/>
         <p:nvPr/>
       </p:nvGrpSpPr>
@@ -9525,7 +9725,7 @@
       </p:grpSpPr>
       <p:sp>
         <p:nvSpPr>
-          <p:cNvPr id="107" name="Google Shape;107;g3f6c50b3b74_0_56"/>
+          <p:cNvPr id="108" name="Google Shape;108;g3f6c50b3b74_0_0"/>
           <p:cNvSpPr/>
           <p:nvPr/>
         </p:nvSpPr>
@@ -9538,6 +9738,1104 @@
             <a:avLst>
               <a:gd fmla="val 50000" name="adj"/>
             </a:avLst>
+          </a:prstGeom>
+          <a:solidFill>
+            <a:srgbClr val="0F766E"/>
+          </a:solidFill>
+          <a:ln cap="flat" cmpd="sng" w="12700">
+            <a:solidFill>
+              <a:srgbClr val="0F766E"/>
+            </a:solidFill>
+            <a:prstDash val="solid"/>
+            <a:round/>
+            <a:headEnd len="sm" w="sm" type="none"/>
+            <a:tailEnd len="sm" w="sm" type="none"/>
+          </a:ln>
+        </p:spPr>
+        <p:txBody>
+          <a:bodyPr anchorCtr="0" anchor="ctr" bIns="91425" lIns="91425" spcFirstLastPara="1" rIns="91425" wrap="square" tIns="91425">
+            <a:noAutofit/>
+          </a:bodyPr>
+          <a:lstStyle/>
+          <a:p>
+            <a:pPr indent="0" lvl="0" marL="0" marR="0" rtl="0" algn="l">
+              <a:lnSpc>
+                <a:spcPct val="100000"/>
+              </a:lnSpc>
+              <a:spcBef>
+                <a:spcPts val="0"/>
+              </a:spcBef>
+              <a:spcAft>
+                <a:spcPts val="0"/>
+              </a:spcAft>
+              <a:buClr>
+                <a:srgbClr val="000000"/>
+              </a:buClr>
+              <a:buSzPts val="1400"/>
+              <a:buFont typeface="Arial"/>
+              <a:buNone/>
+            </a:pPr>
+            <a:r>
+              <a:t/>
+            </a:r>
+            <a:endParaRPr b="0" i="0" sz="1400" u="none" cap="none" strike="noStrike">
+              <a:solidFill>
+                <a:srgbClr val="000000"/>
+              </a:solidFill>
+              <a:latin typeface="Arial"/>
+              <a:ea typeface="Arial"/>
+              <a:cs typeface="Arial"/>
+              <a:sym typeface="Arial"/>
+            </a:endParaRPr>
+          </a:p>
+        </p:txBody>
+      </p:sp>
+      <p:sp>
+        <p:nvSpPr>
+          <p:cNvPr id="109" name="Google Shape;109;g3f6c50b3b74_0_0"/>
+          <p:cNvSpPr/>
+          <p:nvPr/>
+        </p:nvSpPr>
+        <p:spPr>
+          <a:xfrm>
+            <a:off x="457200" y="274320"/>
+            <a:ext cx="868800" cy="274200"/>
+          </a:xfrm>
+          <a:prstGeom prst="rect">
+            <a:avLst/>
+          </a:prstGeom>
+          <a:noFill/>
+          <a:ln>
+            <a:noFill/>
+          </a:ln>
+        </p:spPr>
+        <p:txBody>
+          <a:bodyPr anchorCtr="0" anchor="ctr" bIns="45700" lIns="91425" spcFirstLastPara="1" rIns="91425" wrap="square" tIns="45700">
+            <a:noAutofit/>
+          </a:bodyPr>
+          <a:lstStyle/>
+          <a:p>
+            <a:pPr indent="0" lvl="0" marL="0" marR="0" rtl="0" algn="ctr">
+              <a:lnSpc>
+                <a:spcPct val="100000"/>
+              </a:lnSpc>
+              <a:spcBef>
+                <a:spcPts val="0"/>
+              </a:spcBef>
+              <a:spcAft>
+                <a:spcPts val="0"/>
+              </a:spcAft>
+              <a:buClr>
+                <a:srgbClr val="FFFFFF"/>
+              </a:buClr>
+              <a:buSzPts val="1100"/>
+              <a:buFont typeface="Malgun Gothic"/>
+              <a:buNone/>
+            </a:pPr>
+            <a:r>
+              <a:rPr b="1" i="0" lang="en-US" sz="1100" u="none" cap="none" strike="noStrike">
+                <a:solidFill>
+                  <a:srgbClr val="FFFFFF"/>
+                </a:solidFill>
+                <a:latin typeface="Arial"/>
+                <a:ea typeface="Arial"/>
+                <a:cs typeface="Arial"/>
+                <a:sym typeface="Arial"/>
+              </a:rPr>
+              <a:t>속도</a:t>
+            </a:r>
+            <a:endParaRPr b="0" i="0" sz="1100" u="none" cap="none" strike="noStrike">
+              <a:solidFill>
+                <a:schemeClr val="dk1"/>
+              </a:solidFill>
+              <a:latin typeface="Arial"/>
+              <a:ea typeface="Arial"/>
+              <a:cs typeface="Arial"/>
+              <a:sym typeface="Arial"/>
+            </a:endParaRPr>
+          </a:p>
+        </p:txBody>
+      </p:sp>
+      <p:sp>
+        <p:nvSpPr>
+          <p:cNvPr id="110" name="Google Shape;110;g3f6c50b3b74_0_0"/>
+          <p:cNvSpPr/>
+          <p:nvPr/>
+        </p:nvSpPr>
+        <p:spPr>
+          <a:xfrm>
+            <a:off x="457200" y="621792"/>
+            <a:ext cx="8229600" cy="457200"/>
+          </a:xfrm>
+          <a:prstGeom prst="rect">
+            <a:avLst/>
+          </a:prstGeom>
+          <a:noFill/>
+          <a:ln>
+            <a:noFill/>
+          </a:ln>
+        </p:spPr>
+        <p:txBody>
+          <a:bodyPr anchorCtr="0" anchor="ctr" bIns="45700" lIns="91425" spcFirstLastPara="1" rIns="91425" wrap="square" tIns="45700">
+            <a:noAutofit/>
+          </a:bodyPr>
+          <a:lstStyle/>
+          <a:p>
+            <a:pPr indent="0" lvl="0" marL="0" marR="0" rtl="0" algn="l">
+              <a:lnSpc>
+                <a:spcPct val="120000"/>
+              </a:lnSpc>
+              <a:spcBef>
+                <a:spcPts val="0"/>
+              </a:spcBef>
+              <a:spcAft>
+                <a:spcPts val="0"/>
+              </a:spcAft>
+              <a:buClr>
+                <a:srgbClr val="0B1020"/>
+              </a:buClr>
+              <a:buSzPts val="2500"/>
+              <a:buFont typeface="Malgun Gothic"/>
+              <a:buNone/>
+            </a:pPr>
+            <a:r>
+              <a:rPr b="1" i="0" lang="en-US" sz="2500" u="none" cap="none" strike="noStrike">
+                <a:solidFill>
+                  <a:srgbClr val="0B1020"/>
+                </a:solidFill>
+                <a:latin typeface="Arial"/>
+                <a:ea typeface="Arial"/>
+                <a:cs typeface="Arial"/>
+                <a:sym typeface="Arial"/>
+              </a:rPr>
+              <a:t>상담의 질을 높이고 시간 낭비를 막아주는 모델파인더</a:t>
+            </a:r>
+            <a:endParaRPr b="1" i="0" sz="2500" u="none" cap="none" strike="noStrike">
+              <a:solidFill>
+                <a:srgbClr val="0B1020"/>
+              </a:solidFill>
+              <a:latin typeface="Arial"/>
+              <a:ea typeface="Arial"/>
+              <a:cs typeface="Arial"/>
+              <a:sym typeface="Arial"/>
+            </a:endParaRPr>
+          </a:p>
+        </p:txBody>
+      </p:sp>
+      <p:sp>
+        <p:nvSpPr>
+          <p:cNvPr id="111" name="Google Shape;111;g3f6c50b3b74_0_0"/>
+          <p:cNvSpPr/>
+          <p:nvPr/>
+        </p:nvSpPr>
+        <p:spPr>
+          <a:xfrm>
+            <a:off x="457200" y="1078992"/>
+            <a:ext cx="8229600" cy="292608"/>
+          </a:xfrm>
+          <a:prstGeom prst="rect">
+            <a:avLst/>
+          </a:prstGeom>
+          <a:noFill/>
+          <a:ln>
+            <a:noFill/>
+          </a:ln>
+        </p:spPr>
+        <p:txBody>
+          <a:bodyPr anchorCtr="0" anchor="ctr" bIns="45700" lIns="91425" spcFirstLastPara="1" rIns="91425" wrap="square" tIns="45700">
+            <a:noAutofit/>
+          </a:bodyPr>
+          <a:lstStyle/>
+          <a:p>
+            <a:pPr indent="0" lvl="0" marL="0" marR="0" rtl="0" algn="l">
+              <a:lnSpc>
+                <a:spcPct val="120000"/>
+              </a:lnSpc>
+              <a:spcBef>
+                <a:spcPts val="0"/>
+              </a:spcBef>
+              <a:spcAft>
+                <a:spcPts val="0"/>
+              </a:spcAft>
+              <a:buClr>
+                <a:srgbClr val="5B6478"/>
+              </a:buClr>
+              <a:buSzPts val="1250"/>
+              <a:buFont typeface="Malgun Gothic"/>
+              <a:buNone/>
+            </a:pPr>
+            <a:r>
+              <a:rPr b="0" i="0" lang="en-US" sz="1250" u="none" cap="none" strike="noStrike">
+                <a:solidFill>
+                  <a:srgbClr val="5B6478"/>
+                </a:solidFill>
+                <a:latin typeface="Arial"/>
+                <a:ea typeface="Arial"/>
+                <a:cs typeface="Arial"/>
+                <a:sym typeface="Arial"/>
+              </a:rPr>
+              <a:t>시범 기간 두 번째로 많이 열린 화면 </a:t>
+            </a:r>
+            <a:r>
+              <a:rPr lang="en-US" sz="1250">
+                <a:solidFill>
+                  <a:srgbClr val="5B6478"/>
+                </a:solidFill>
+              </a:rPr>
+              <a:t>:</a:t>
+            </a:r>
+            <a:r>
+              <a:rPr b="0" i="0" lang="en-US" sz="1250" u="none" cap="none" strike="noStrike">
+                <a:solidFill>
+                  <a:srgbClr val="5B6478"/>
+                </a:solidFill>
+                <a:latin typeface="Arial"/>
+                <a:ea typeface="Arial"/>
+                <a:cs typeface="Arial"/>
+                <a:sym typeface="Arial"/>
+              </a:rPr>
+              <a:t> 120건 · 2위</a:t>
+            </a:r>
+            <a:endParaRPr b="0" i="0" sz="1250" u="none" cap="none" strike="noStrike">
+              <a:solidFill>
+                <a:srgbClr val="5B6478"/>
+              </a:solidFill>
+              <a:latin typeface="Arial"/>
+              <a:ea typeface="Arial"/>
+              <a:cs typeface="Arial"/>
+              <a:sym typeface="Arial"/>
+            </a:endParaRPr>
+          </a:p>
+        </p:txBody>
+      </p:sp>
+      <p:sp>
+        <p:nvSpPr>
+          <p:cNvPr id="112" name="Google Shape;112;g3f6c50b3b74_0_0"/>
+          <p:cNvSpPr/>
+          <p:nvPr/>
+        </p:nvSpPr>
+        <p:spPr>
+          <a:xfrm>
+            <a:off x="4530475" y="1588540"/>
+            <a:ext cx="4365000" cy="457200"/>
+          </a:xfrm>
+          <a:prstGeom prst="rect">
+            <a:avLst/>
+          </a:prstGeom>
+          <a:noFill/>
+          <a:ln>
+            <a:noFill/>
+          </a:ln>
+        </p:spPr>
+        <p:txBody>
+          <a:bodyPr anchorCtr="0" anchor="ctr" bIns="45700" lIns="91425" spcFirstLastPara="1" rIns="91425" wrap="square" tIns="45700">
+            <a:noAutofit/>
+          </a:bodyPr>
+          <a:lstStyle/>
+          <a:p>
+            <a:pPr indent="0" lvl="0" marL="0" marR="0" rtl="0" algn="l">
+              <a:lnSpc>
+                <a:spcPct val="120000"/>
+              </a:lnSpc>
+              <a:spcBef>
+                <a:spcPts val="0"/>
+              </a:spcBef>
+              <a:spcAft>
+                <a:spcPts val="0"/>
+              </a:spcAft>
+              <a:buClr>
+                <a:srgbClr val="0B1020"/>
+              </a:buClr>
+              <a:buSzPts val="1200"/>
+              <a:buFont typeface="Malgun Gothic"/>
+              <a:buNone/>
+            </a:pPr>
+            <a:r>
+              <a:rPr b="1" i="0" lang="en-US" sz="1200" u="none" cap="none" strike="noStrike">
+                <a:solidFill>
+                  <a:srgbClr val="0B1020"/>
+                </a:solidFill>
+                <a:latin typeface="Arial"/>
+                <a:ea typeface="Arial"/>
+                <a:cs typeface="Arial"/>
+                <a:sym typeface="Arial"/>
+              </a:rPr>
+              <a:t>키워드 한 줄이면 조건이 겹쳐 좁혀집니다</a:t>
+            </a:r>
+            <a:endParaRPr b="1" i="0" sz="1200" u="none" cap="none" strike="noStrike">
+              <a:solidFill>
+                <a:srgbClr val="0B1020"/>
+              </a:solidFill>
+              <a:latin typeface="Arial"/>
+              <a:ea typeface="Arial"/>
+              <a:cs typeface="Arial"/>
+              <a:sym typeface="Arial"/>
+            </a:endParaRPr>
+          </a:p>
+          <a:p>
+            <a:pPr indent="0" lvl="0" marL="0" marR="0" rtl="0" algn="l">
+              <a:lnSpc>
+                <a:spcPct val="120000"/>
+              </a:lnSpc>
+              <a:spcBef>
+                <a:spcPts val="0"/>
+              </a:spcBef>
+              <a:spcAft>
+                <a:spcPts val="0"/>
+              </a:spcAft>
+              <a:buClr>
+                <a:srgbClr val="0B1020"/>
+              </a:buClr>
+              <a:buSzPts val="1200"/>
+              <a:buFont typeface="Malgun Gothic"/>
+              <a:buNone/>
+            </a:pPr>
+            <a:r>
+              <a:rPr b="0" i="0" lang="en-US" sz="1200" u="none" cap="none" strike="noStrike">
+                <a:solidFill>
+                  <a:srgbClr val="0B1020"/>
+                </a:solidFill>
+                <a:latin typeface="Arial"/>
+                <a:ea typeface="Arial"/>
+                <a:cs typeface="Arial"/>
+                <a:sym typeface="Arial"/>
+              </a:rPr>
+              <a:t>(무풍 · 공기청정 </a:t>
+            </a:r>
+            <a:r>
+              <a:rPr lang="en-US" sz="1200">
+                <a:solidFill>
+                  <a:srgbClr val="0B1020"/>
+                </a:solidFill>
+              </a:rPr>
+              <a:t>등</a:t>
+            </a:r>
+            <a:r>
+              <a:rPr b="0" i="0" lang="en-US" sz="1200" u="none" cap="none" strike="noStrike">
+                <a:solidFill>
+                  <a:srgbClr val="0B1020"/>
+                </a:solidFill>
+                <a:latin typeface="Arial"/>
+                <a:ea typeface="Arial"/>
+                <a:cs typeface="Arial"/>
+                <a:sym typeface="Arial"/>
+              </a:rPr>
+              <a:t> 여러 가지 키워드로 한 번에 </a:t>
+            </a:r>
+            <a:r>
+              <a:rPr lang="en-US" sz="1200">
+                <a:solidFill>
+                  <a:srgbClr val="0B1020"/>
+                </a:solidFill>
+              </a:rPr>
+              <a:t>검색</a:t>
+            </a:r>
+            <a:r>
+              <a:rPr b="0" i="0" lang="en-US" sz="1200" u="none" cap="none" strike="noStrike">
+                <a:solidFill>
+                  <a:srgbClr val="0B1020"/>
+                </a:solidFill>
+                <a:latin typeface="Arial"/>
+                <a:ea typeface="Arial"/>
+                <a:cs typeface="Arial"/>
+                <a:sym typeface="Arial"/>
+              </a:rPr>
+              <a:t>)</a:t>
+            </a:r>
+            <a:endParaRPr b="0" i="0" sz="1200" u="none" cap="none" strike="noStrike">
+              <a:solidFill>
+                <a:srgbClr val="0B1020"/>
+              </a:solidFill>
+              <a:latin typeface="Arial"/>
+              <a:ea typeface="Arial"/>
+              <a:cs typeface="Arial"/>
+              <a:sym typeface="Arial"/>
+            </a:endParaRPr>
+          </a:p>
+        </p:txBody>
+      </p:sp>
+      <p:sp>
+        <p:nvSpPr>
+          <p:cNvPr id="113" name="Google Shape;113;g3f6c50b3b74_0_0"/>
+          <p:cNvSpPr/>
+          <p:nvPr/>
+        </p:nvSpPr>
+        <p:spPr>
+          <a:xfrm>
+            <a:off x="4530475" y="2164615"/>
+            <a:ext cx="4365000" cy="1051500"/>
+          </a:xfrm>
+          <a:prstGeom prst="rect">
+            <a:avLst/>
+          </a:prstGeom>
+          <a:solidFill>
+            <a:srgbClr val="F7F8FB"/>
+          </a:solidFill>
+          <a:ln cap="flat" cmpd="sng" w="12700">
+            <a:solidFill>
+              <a:srgbClr val="DDE1EC"/>
+            </a:solidFill>
+            <a:prstDash val="solid"/>
+            <a:round/>
+            <a:headEnd len="sm" w="sm" type="none"/>
+            <a:tailEnd len="sm" w="sm" type="none"/>
+          </a:ln>
+        </p:spPr>
+        <p:txBody>
+          <a:bodyPr anchorCtr="0" anchor="ctr" bIns="91425" lIns="91425" spcFirstLastPara="1" rIns="91425" wrap="square" tIns="91425">
+            <a:noAutofit/>
+          </a:bodyPr>
+          <a:lstStyle/>
+          <a:p>
+            <a:pPr indent="0" lvl="0" marL="0" marR="0" rtl="0" algn="l">
+              <a:lnSpc>
+                <a:spcPct val="100000"/>
+              </a:lnSpc>
+              <a:spcBef>
+                <a:spcPts val="0"/>
+              </a:spcBef>
+              <a:spcAft>
+                <a:spcPts val="0"/>
+              </a:spcAft>
+              <a:buClr>
+                <a:srgbClr val="000000"/>
+              </a:buClr>
+              <a:buSzPts val="1400"/>
+              <a:buFont typeface="Arial"/>
+              <a:buNone/>
+            </a:pPr>
+            <a:r>
+              <a:t/>
+            </a:r>
+            <a:endParaRPr b="0" i="0" sz="1400" u="none" cap="none" strike="noStrike">
+              <a:solidFill>
+                <a:srgbClr val="000000"/>
+              </a:solidFill>
+              <a:latin typeface="Arial"/>
+              <a:ea typeface="Arial"/>
+              <a:cs typeface="Arial"/>
+              <a:sym typeface="Arial"/>
+            </a:endParaRPr>
+          </a:p>
+        </p:txBody>
+      </p:sp>
+      <p:sp>
+        <p:nvSpPr>
+          <p:cNvPr id="114" name="Google Shape;114;g3f6c50b3b74_0_0"/>
+          <p:cNvSpPr/>
+          <p:nvPr/>
+        </p:nvSpPr>
+        <p:spPr>
+          <a:xfrm>
+            <a:off x="4673328" y="2164615"/>
+            <a:ext cx="4127100" cy="1051500"/>
+          </a:xfrm>
+          <a:prstGeom prst="rect">
+            <a:avLst/>
+          </a:prstGeom>
+          <a:noFill/>
+          <a:ln>
+            <a:noFill/>
+          </a:ln>
+        </p:spPr>
+        <p:txBody>
+          <a:bodyPr anchorCtr="0" anchor="ctr" bIns="45700" lIns="91425" spcFirstLastPara="1" rIns="91425" wrap="square" tIns="45700">
+            <a:noAutofit/>
+          </a:bodyPr>
+          <a:lstStyle/>
+          <a:p>
+            <a:pPr indent="0" lvl="0" marL="0" marR="0" rtl="0" algn="l">
+              <a:lnSpc>
+                <a:spcPct val="120000"/>
+              </a:lnSpc>
+              <a:spcBef>
+                <a:spcPts val="0"/>
+              </a:spcBef>
+              <a:spcAft>
+                <a:spcPts val="0"/>
+              </a:spcAft>
+              <a:buClr>
+                <a:srgbClr val="5B6478"/>
+              </a:buClr>
+              <a:buSzPts val="1150"/>
+              <a:buFont typeface="Malgun Gothic"/>
+              <a:buNone/>
+            </a:pPr>
+            <a:r>
+              <a:rPr b="1" i="0" lang="en-US" sz="1150" u="none" cap="none" strike="noStrike">
+                <a:solidFill>
+                  <a:srgbClr val="5B6478"/>
+                </a:solidFill>
+                <a:latin typeface="Arial"/>
+                <a:ea typeface="Arial"/>
+                <a:cs typeface="Arial"/>
+                <a:sym typeface="Arial"/>
+              </a:rPr>
+              <a:t>카탈로그를 찾는 시간</a:t>
+            </a:r>
+            <a:endParaRPr b="1" i="0" sz="1150" u="none" cap="none" strike="noStrike">
+              <a:solidFill>
+                <a:srgbClr val="5B6478"/>
+              </a:solidFill>
+              <a:latin typeface="Arial"/>
+              <a:ea typeface="Arial"/>
+              <a:cs typeface="Arial"/>
+              <a:sym typeface="Arial"/>
+            </a:endParaRPr>
+          </a:p>
+          <a:p>
+            <a:pPr indent="0" lvl="0" marL="0" marR="0" rtl="0" algn="l">
+              <a:lnSpc>
+                <a:spcPct val="120000"/>
+              </a:lnSpc>
+              <a:spcBef>
+                <a:spcPts val="0"/>
+              </a:spcBef>
+              <a:spcAft>
+                <a:spcPts val="0"/>
+              </a:spcAft>
+              <a:buClr>
+                <a:srgbClr val="5B6478"/>
+              </a:buClr>
+              <a:buSzPts val="1150"/>
+              <a:buFont typeface="Malgun Gothic"/>
+              <a:buNone/>
+            </a:pPr>
+            <a:r>
+              <a:rPr lang="en-US" sz="1150">
+                <a:solidFill>
+                  <a:srgbClr val="5B6478"/>
+                </a:solidFill>
+              </a:rPr>
+              <a:t>  </a:t>
+            </a:r>
+            <a:r>
+              <a:rPr b="0" i="0" lang="en-US" sz="1150" u="none" cap="none" strike="noStrike">
+                <a:solidFill>
+                  <a:srgbClr val="5B6478"/>
+                </a:solidFill>
+                <a:latin typeface="Arial"/>
+                <a:ea typeface="Arial"/>
+                <a:cs typeface="Arial"/>
+                <a:sym typeface="Arial"/>
+              </a:rPr>
+              <a:t>: 모델명·치수·기능을 기억에서 꺼내야 합니다</a:t>
+            </a:r>
+            <a:endParaRPr b="0" i="0" sz="1150" u="none" cap="none" strike="noStrike">
+              <a:solidFill>
+                <a:srgbClr val="5B6478"/>
+              </a:solidFill>
+              <a:latin typeface="Arial"/>
+              <a:ea typeface="Arial"/>
+              <a:cs typeface="Arial"/>
+              <a:sym typeface="Arial"/>
+            </a:endParaRPr>
+          </a:p>
+          <a:p>
+            <a:pPr indent="0" lvl="0" marL="0" marR="0" rtl="0" algn="l">
+              <a:lnSpc>
+                <a:spcPct val="120000"/>
+              </a:lnSpc>
+              <a:spcBef>
+                <a:spcPts val="0"/>
+              </a:spcBef>
+              <a:spcAft>
+                <a:spcPts val="0"/>
+              </a:spcAft>
+              <a:buClr>
+                <a:srgbClr val="5B6478"/>
+              </a:buClr>
+              <a:buSzPts val="1150"/>
+              <a:buFont typeface="Malgun Gothic"/>
+              <a:buNone/>
+            </a:pPr>
+            <a:r>
+              <a:t/>
+            </a:r>
+            <a:endParaRPr sz="550">
+              <a:solidFill>
+                <a:srgbClr val="5B6478"/>
+              </a:solidFill>
+            </a:endParaRPr>
+          </a:p>
+          <a:p>
+            <a:pPr indent="0" lvl="0" marL="0" marR="0" rtl="0" algn="l">
+              <a:lnSpc>
+                <a:spcPct val="120000"/>
+              </a:lnSpc>
+              <a:spcBef>
+                <a:spcPts val="0"/>
+              </a:spcBef>
+              <a:spcAft>
+                <a:spcPts val="0"/>
+              </a:spcAft>
+              <a:buClr>
+                <a:srgbClr val="5B6478"/>
+              </a:buClr>
+              <a:buSzPts val="1150"/>
+              <a:buFont typeface="Malgun Gothic"/>
+              <a:buNone/>
+            </a:pPr>
+            <a:r>
+              <a:rPr b="1" i="0" lang="en-US" sz="1150" u="none" cap="none" strike="noStrike">
+                <a:solidFill>
+                  <a:srgbClr val="5B6478"/>
+                </a:solidFill>
+                <a:latin typeface="Arial"/>
+                <a:ea typeface="Arial"/>
+                <a:cs typeface="Arial"/>
+                <a:sym typeface="Arial"/>
+              </a:rPr>
+              <a:t>한 줄 조건 검색 시 모델 리스트 즉시 확인 가능</a:t>
+            </a:r>
+            <a:endParaRPr b="1" i="0" sz="1150" u="none" cap="none" strike="noStrike">
+              <a:solidFill>
+                <a:srgbClr val="5B6478"/>
+              </a:solidFill>
+              <a:latin typeface="Arial"/>
+              <a:ea typeface="Arial"/>
+              <a:cs typeface="Arial"/>
+              <a:sym typeface="Arial"/>
+            </a:endParaRPr>
+          </a:p>
+        </p:txBody>
+      </p:sp>
+      <p:sp>
+        <p:nvSpPr>
+          <p:cNvPr id="115" name="Google Shape;115;g3f6c50b3b74_0_0"/>
+          <p:cNvSpPr/>
+          <p:nvPr/>
+        </p:nvSpPr>
+        <p:spPr>
+          <a:xfrm>
+            <a:off x="4530475" y="3382288"/>
+            <a:ext cx="4365000" cy="402300"/>
+          </a:xfrm>
+          <a:prstGeom prst="rect">
+            <a:avLst/>
+          </a:prstGeom>
+          <a:solidFill>
+            <a:srgbClr val="F7F8FB"/>
+          </a:solidFill>
+          <a:ln cap="flat" cmpd="sng" w="12700">
+            <a:solidFill>
+              <a:srgbClr val="DDE1EC"/>
+            </a:solidFill>
+            <a:prstDash val="solid"/>
+            <a:round/>
+            <a:headEnd len="sm" w="sm" type="none"/>
+            <a:tailEnd len="sm" w="sm" type="none"/>
+          </a:ln>
+        </p:spPr>
+        <p:txBody>
+          <a:bodyPr anchorCtr="0" anchor="ctr" bIns="91425" lIns="91425" spcFirstLastPara="1" rIns="91425" wrap="square" tIns="91425">
+            <a:noAutofit/>
+          </a:bodyPr>
+          <a:lstStyle/>
+          <a:p>
+            <a:pPr indent="0" lvl="0" marL="0" marR="0" rtl="0" algn="l">
+              <a:lnSpc>
+                <a:spcPct val="100000"/>
+              </a:lnSpc>
+              <a:spcBef>
+                <a:spcPts val="0"/>
+              </a:spcBef>
+              <a:spcAft>
+                <a:spcPts val="0"/>
+              </a:spcAft>
+              <a:buClr>
+                <a:srgbClr val="000000"/>
+              </a:buClr>
+              <a:buSzPts val="1400"/>
+              <a:buFont typeface="Arial"/>
+              <a:buNone/>
+            </a:pPr>
+            <a:r>
+              <a:t/>
+            </a:r>
+            <a:endParaRPr b="0" i="0" sz="1400" u="none" cap="none" strike="noStrike">
+              <a:solidFill>
+                <a:srgbClr val="000000"/>
+              </a:solidFill>
+              <a:latin typeface="Arial"/>
+              <a:ea typeface="Arial"/>
+              <a:cs typeface="Arial"/>
+              <a:sym typeface="Arial"/>
+            </a:endParaRPr>
+          </a:p>
+        </p:txBody>
+      </p:sp>
+      <p:sp>
+        <p:nvSpPr>
+          <p:cNvPr id="116" name="Google Shape;116;g3f6c50b3b74_0_0"/>
+          <p:cNvSpPr/>
+          <p:nvPr/>
+        </p:nvSpPr>
+        <p:spPr>
+          <a:xfrm>
+            <a:off x="4530475" y="3382293"/>
+            <a:ext cx="674700" cy="402300"/>
+          </a:xfrm>
+          <a:prstGeom prst="rect">
+            <a:avLst/>
+          </a:prstGeom>
+          <a:noFill/>
+          <a:ln>
+            <a:noFill/>
+          </a:ln>
+        </p:spPr>
+        <p:txBody>
+          <a:bodyPr anchorCtr="0" anchor="ctr" bIns="45700" lIns="91425" spcFirstLastPara="1" rIns="91425" wrap="square" tIns="45700">
+            <a:noAutofit/>
+          </a:bodyPr>
+          <a:lstStyle/>
+          <a:p>
+            <a:pPr indent="0" lvl="0" marL="0" marR="0" rtl="0" algn="ctr">
+              <a:lnSpc>
+                <a:spcPct val="120000"/>
+              </a:lnSpc>
+              <a:spcBef>
+                <a:spcPts val="0"/>
+              </a:spcBef>
+              <a:spcAft>
+                <a:spcPts val="0"/>
+              </a:spcAft>
+              <a:buClr>
+                <a:srgbClr val="5B6478"/>
+              </a:buClr>
+              <a:buSzPts val="950"/>
+              <a:buFont typeface="Malgun Gothic"/>
+              <a:buNone/>
+            </a:pPr>
+            <a:r>
+              <a:rPr b="1" i="0" lang="en-US" sz="1150" u="none" cap="none" strike="noStrike">
+                <a:solidFill>
+                  <a:srgbClr val="5B6478"/>
+                </a:solidFill>
+              </a:rPr>
+              <a:t>매니저</a:t>
+            </a:r>
+            <a:endParaRPr b="1" i="0" sz="1150" u="none" cap="none" strike="noStrike">
+              <a:solidFill>
+                <a:srgbClr val="5B6478"/>
+              </a:solidFill>
+            </a:endParaRPr>
+          </a:p>
+        </p:txBody>
+      </p:sp>
+      <p:sp>
+        <p:nvSpPr>
+          <p:cNvPr id="117" name="Google Shape;117;g3f6c50b3b74_0_0"/>
+          <p:cNvSpPr/>
+          <p:nvPr/>
+        </p:nvSpPr>
+        <p:spPr>
+          <a:xfrm>
+            <a:off x="5205058" y="3382288"/>
+            <a:ext cx="3571200" cy="402300"/>
+          </a:xfrm>
+          <a:prstGeom prst="rect">
+            <a:avLst/>
+          </a:prstGeom>
+          <a:noFill/>
+          <a:ln>
+            <a:noFill/>
+          </a:ln>
+        </p:spPr>
+        <p:txBody>
+          <a:bodyPr anchorCtr="0" anchor="ctr" bIns="45700" lIns="91425" spcFirstLastPara="1" rIns="91425" wrap="square" tIns="45700">
+            <a:noAutofit/>
+          </a:bodyPr>
+          <a:lstStyle/>
+          <a:p>
+            <a:pPr indent="0" lvl="0" marL="0" marR="0" rtl="0" algn="l">
+              <a:lnSpc>
+                <a:spcPct val="120000"/>
+              </a:lnSpc>
+              <a:spcBef>
+                <a:spcPts val="0"/>
+              </a:spcBef>
+              <a:spcAft>
+                <a:spcPts val="0"/>
+              </a:spcAft>
+              <a:buClr>
+                <a:srgbClr val="0B1020"/>
+              </a:buClr>
+              <a:buSzPts val="900"/>
+              <a:buFont typeface="Malgun Gothic"/>
+              <a:buNone/>
+            </a:pPr>
+            <a:r>
+              <a:rPr b="1" i="0" lang="en-US" sz="1150" u="none" cap="none" strike="noStrike">
+                <a:solidFill>
+                  <a:srgbClr val="0B1020"/>
+                </a:solidFill>
+              </a:rPr>
+              <a:t>고민하며 낭비하던 시간이 줄어 매끄러운 상담 가능</a:t>
+            </a:r>
+            <a:endParaRPr b="1" i="0" sz="1150" u="none" cap="none" strike="noStrike">
+              <a:solidFill>
+                <a:srgbClr val="0B1020"/>
+              </a:solidFill>
+            </a:endParaRPr>
+          </a:p>
+        </p:txBody>
+      </p:sp>
+      <p:sp>
+        <p:nvSpPr>
+          <p:cNvPr id="118" name="Google Shape;118;g3f6c50b3b74_0_0"/>
+          <p:cNvSpPr/>
+          <p:nvPr/>
+        </p:nvSpPr>
+        <p:spPr>
+          <a:xfrm>
+            <a:off x="4530475" y="3856263"/>
+            <a:ext cx="4365000" cy="512100"/>
+          </a:xfrm>
+          <a:prstGeom prst="rect">
+            <a:avLst/>
+          </a:prstGeom>
+          <a:solidFill>
+            <a:srgbClr val="0F766E"/>
+          </a:solidFill>
+          <a:ln cap="flat" cmpd="sng" w="12700">
+            <a:solidFill>
+              <a:srgbClr val="0F766E"/>
+            </a:solidFill>
+            <a:prstDash val="solid"/>
+            <a:round/>
+            <a:headEnd len="sm" w="sm" type="none"/>
+            <a:tailEnd len="sm" w="sm" type="none"/>
+          </a:ln>
+        </p:spPr>
+        <p:txBody>
+          <a:bodyPr anchorCtr="0" anchor="ctr" bIns="91425" lIns="91425" spcFirstLastPara="1" rIns="91425" wrap="square" tIns="91425">
+            <a:noAutofit/>
+          </a:bodyPr>
+          <a:lstStyle/>
+          <a:p>
+            <a:pPr indent="0" lvl="0" marL="0" marR="0" rtl="0" algn="l">
+              <a:lnSpc>
+                <a:spcPct val="100000"/>
+              </a:lnSpc>
+              <a:spcBef>
+                <a:spcPts val="0"/>
+              </a:spcBef>
+              <a:spcAft>
+                <a:spcPts val="0"/>
+              </a:spcAft>
+              <a:buClr>
+                <a:srgbClr val="000000"/>
+              </a:buClr>
+              <a:buSzPts val="1400"/>
+              <a:buFont typeface="Arial"/>
+              <a:buNone/>
+            </a:pPr>
+            <a:r>
+              <a:t/>
+            </a:r>
+            <a:endParaRPr b="0" i="0" sz="1400" u="none" cap="none" strike="noStrike">
+              <a:solidFill>
+                <a:srgbClr val="000000"/>
+              </a:solidFill>
+              <a:latin typeface="Arial"/>
+              <a:ea typeface="Arial"/>
+              <a:cs typeface="Arial"/>
+              <a:sym typeface="Arial"/>
+            </a:endParaRPr>
+          </a:p>
+        </p:txBody>
+      </p:sp>
+      <p:sp>
+        <p:nvSpPr>
+          <p:cNvPr id="119" name="Google Shape;119;g3f6c50b3b74_0_0"/>
+          <p:cNvSpPr/>
+          <p:nvPr/>
+        </p:nvSpPr>
+        <p:spPr>
+          <a:xfrm>
+            <a:off x="4536400" y="3856265"/>
+            <a:ext cx="674700" cy="512100"/>
+          </a:xfrm>
+          <a:prstGeom prst="rect">
+            <a:avLst/>
+          </a:prstGeom>
+          <a:noFill/>
+          <a:ln>
+            <a:noFill/>
+          </a:ln>
+        </p:spPr>
+        <p:txBody>
+          <a:bodyPr anchorCtr="0" anchor="ctr" bIns="45700" lIns="91425" spcFirstLastPara="1" rIns="91425" wrap="square" tIns="45700">
+            <a:noAutofit/>
+          </a:bodyPr>
+          <a:lstStyle/>
+          <a:p>
+            <a:pPr indent="0" lvl="0" marL="0" marR="0" rtl="0" algn="ctr">
+              <a:lnSpc>
+                <a:spcPct val="120000"/>
+              </a:lnSpc>
+              <a:spcBef>
+                <a:spcPts val="0"/>
+              </a:spcBef>
+              <a:spcAft>
+                <a:spcPts val="0"/>
+              </a:spcAft>
+              <a:buClr>
+                <a:srgbClr val="FFFFFF"/>
+              </a:buClr>
+              <a:buSzPts val="950"/>
+              <a:buFont typeface="Malgun Gothic"/>
+              <a:buNone/>
+            </a:pPr>
+            <a:r>
+              <a:rPr b="1" i="0" lang="en-US" sz="1150" u="none" cap="none" strike="noStrike">
+                <a:solidFill>
+                  <a:srgbClr val="FFFFFF"/>
+                </a:solidFill>
+              </a:rPr>
+              <a:t>지점</a:t>
+            </a:r>
+            <a:endParaRPr b="1" i="0" sz="1150" u="none" cap="none" strike="noStrike">
+              <a:solidFill>
+                <a:srgbClr val="FFFFFF"/>
+              </a:solidFill>
+            </a:endParaRPr>
+          </a:p>
+        </p:txBody>
+      </p:sp>
+      <p:sp>
+        <p:nvSpPr>
+          <p:cNvPr id="120" name="Google Shape;120;g3f6c50b3b74_0_0"/>
+          <p:cNvSpPr/>
+          <p:nvPr/>
+        </p:nvSpPr>
+        <p:spPr>
+          <a:xfrm>
+            <a:off x="5205058" y="3856263"/>
+            <a:ext cx="3571200" cy="512100"/>
+          </a:xfrm>
+          <a:prstGeom prst="rect">
+            <a:avLst/>
+          </a:prstGeom>
+          <a:noFill/>
+          <a:ln>
+            <a:noFill/>
+          </a:ln>
+        </p:spPr>
+        <p:txBody>
+          <a:bodyPr anchorCtr="0" anchor="ctr" bIns="45700" lIns="91425" spcFirstLastPara="1" rIns="91425" wrap="square" tIns="45700">
+            <a:noAutofit/>
+          </a:bodyPr>
+          <a:lstStyle/>
+          <a:p>
+            <a:pPr indent="0" lvl="0" marL="0" marR="0" rtl="0" algn="l">
+              <a:lnSpc>
+                <a:spcPct val="120000"/>
+              </a:lnSpc>
+              <a:spcBef>
+                <a:spcPts val="0"/>
+              </a:spcBef>
+              <a:spcAft>
+                <a:spcPts val="0"/>
+              </a:spcAft>
+              <a:buClr>
+                <a:srgbClr val="FFFFFF"/>
+              </a:buClr>
+              <a:buSzPts val="1200"/>
+              <a:buFont typeface="Malgun Gothic"/>
+              <a:buNone/>
+            </a:pPr>
+            <a:r>
+              <a:rPr b="1" i="0" lang="en-US" sz="1150" u="none" cap="none" strike="noStrike">
+                <a:solidFill>
+                  <a:srgbClr val="FFFFFF"/>
+                </a:solidFill>
+                <a:latin typeface="Arial"/>
+                <a:ea typeface="Arial"/>
+                <a:cs typeface="Arial"/>
+                <a:sym typeface="Arial"/>
+              </a:rPr>
+              <a:t>응대 회전율 </a:t>
+            </a:r>
+            <a:r>
+              <a:rPr b="1" lang="en-US" sz="1150">
+                <a:solidFill>
+                  <a:srgbClr val="FFFFFF"/>
+                </a:solidFill>
+              </a:rPr>
+              <a:t>:</a:t>
+            </a:r>
+            <a:r>
+              <a:rPr b="1" i="0" lang="en-US" sz="1150" u="none" cap="none" strike="noStrike">
+                <a:solidFill>
+                  <a:srgbClr val="FFFFFF"/>
+                </a:solidFill>
+                <a:latin typeface="Arial"/>
+                <a:ea typeface="Arial"/>
+                <a:cs typeface="Arial"/>
+                <a:sym typeface="Arial"/>
+              </a:rPr>
+              <a:t> 응대 가능 고객 수 증가</a:t>
+            </a:r>
+            <a:endParaRPr b="1" i="0" sz="1150" u="none" cap="none" strike="noStrike">
+              <a:solidFill>
+                <a:srgbClr val="FFFFFF"/>
+              </a:solidFill>
+              <a:latin typeface="Arial"/>
+              <a:ea typeface="Arial"/>
+              <a:cs typeface="Arial"/>
+              <a:sym typeface="Arial"/>
+            </a:endParaRPr>
+          </a:p>
+        </p:txBody>
+      </p:sp>
+      <p:pic>
+        <p:nvPicPr>
+          <p:cNvPr id="121" name="Google Shape;121;g3f6c50b3b74_0_0"/>
+          <p:cNvPicPr preferRelativeResize="0"/>
+          <p:nvPr/>
+        </p:nvPicPr>
+        <p:blipFill rotWithShape="1">
+          <a:blip r:embed="rId3">
+            <a:alphaModFix/>
+          </a:blip>
+          <a:srcRect b="0" l="0" r="0" t="0"/>
+          <a:stretch/>
+        </p:blipFill>
+        <p:spPr>
+          <a:xfrm>
+            <a:off x="483750" y="1617265"/>
+            <a:ext cx="3876000" cy="2751100"/>
+          </a:xfrm>
+          <a:prstGeom prst="rect">
+            <a:avLst/>
+          </a:prstGeom>
+          <a:noFill/>
+          <a:ln cap="flat" cmpd="sng" w="9525">
+            <a:solidFill>
+              <a:srgbClr val="DDE1EC"/>
+            </a:solidFill>
+            <a:prstDash val="solid"/>
+            <a:round/>
+            <a:headEnd len="sm" w="sm" type="none"/>
+            <a:tailEnd len="sm" w="sm" type="none"/>
+          </a:ln>
+        </p:spPr>
+      </p:pic>
+      <p:sp>
+        <p:nvSpPr>
+          <p:cNvPr id="122" name="Google Shape;122;g3f6c50b3b74_0_0"/>
+          <p:cNvSpPr/>
+          <p:nvPr/>
+        </p:nvSpPr>
+        <p:spPr>
+          <a:xfrm>
+            <a:off x="7132150" y="310891"/>
+            <a:ext cx="2011800" cy="255900"/>
+          </a:xfrm>
+          <a:prstGeom prst="rect">
+            <a:avLst/>
           </a:prstGeom>
           <a:solidFill>
             <a:srgbClr val="1428A0"/>
@@ -9592,14 +10890,14 @@
       </p:sp>
       <p:sp>
         <p:nvSpPr>
-          <p:cNvPr id="108" name="Google Shape;108;g3f6c50b3b74_0_56"/>
-          <p:cNvSpPr/>
-          <p:nvPr/>
-        </p:nvSpPr>
-        <p:spPr>
-          <a:xfrm>
-            <a:off x="457200" y="274320"/>
-            <a:ext cx="868800" cy="274200"/>
+          <p:cNvPr id="123" name="Google Shape;123;g3f6c50b3b74_0_0"/>
+          <p:cNvSpPr/>
+          <p:nvPr/>
+        </p:nvSpPr>
+        <p:spPr>
+          <a:xfrm>
+            <a:off x="7172700" y="317335"/>
+            <a:ext cx="1971300" cy="255900"/>
           </a:xfrm>
           <a:prstGeom prst="rect">
             <a:avLst/>
@@ -9615,7 +10913,7 @@
           </a:bodyPr>
           <a:lstStyle/>
           <a:p>
-            <a:pPr indent="0" lvl="0" marL="0" marR="0" rtl="0" algn="ctr">
+            <a:pPr indent="0" lvl="0" marL="0" marR="0" rtl="0" algn="l">
               <a:lnSpc>
                 <a:spcPct val="100000"/>
               </a:lnSpc>
@@ -9628,12 +10926,12 @@
               <a:buClr>
                 <a:srgbClr val="FFFFFF"/>
               </a:buClr>
-              <a:buSzPts val="1100"/>
+              <a:buSzPts val="900"/>
               <a:buFont typeface="Malgun Gothic"/>
               <a:buNone/>
             </a:pPr>
             <a:r>
-              <a:rPr b="1" i="0" lang="en-US" sz="1100" u="none" cap="none" strike="noStrike">
+              <a:rPr b="0" i="0" lang="en-US" sz="900" u="none" cap="none" strike="noStrike">
                 <a:solidFill>
                   <a:srgbClr val="FFFFFF"/>
                 </a:solidFill>
@@ -9642,9 +10940,9 @@
                 <a:cs typeface="Arial"/>
                 <a:sym typeface="Arial"/>
               </a:rPr>
-              <a:t>정확도</a:t>
-            </a:r>
-            <a:endParaRPr b="0" i="0" sz="1100" u="none" cap="none" strike="noStrike">
+              <a:t>세일즈 코파일럿</a:t>
+            </a:r>
+            <a:endParaRPr b="0" i="0" sz="900" u="none" cap="none" strike="noStrike">
               <a:solidFill>
                 <a:schemeClr val="dk1"/>
               </a:solidFill>
@@ -9658,688 +10956,14 @@
       </p:sp>
       <p:sp>
         <p:nvSpPr>
-          <p:cNvPr id="109" name="Google Shape;109;g3f6c50b3b74_0_56"/>
-          <p:cNvSpPr/>
-          <p:nvPr/>
-        </p:nvSpPr>
-        <p:spPr>
-          <a:xfrm>
-            <a:off x="457200" y="621792"/>
-            <a:ext cx="8229600" cy="457200"/>
-          </a:xfrm>
-          <a:prstGeom prst="rect">
-            <a:avLst/>
-          </a:prstGeom>
-          <a:noFill/>
-          <a:ln>
-            <a:noFill/>
-          </a:ln>
-        </p:spPr>
-        <p:txBody>
-          <a:bodyPr anchorCtr="0" anchor="ctr" bIns="45700" lIns="91425" spcFirstLastPara="1" rIns="91425" wrap="square" tIns="45700">
-            <a:noAutofit/>
-          </a:bodyPr>
-          <a:lstStyle/>
-          <a:p>
-            <a:pPr indent="0" lvl="0" marL="0" marR="0" rtl="0" algn="l">
-              <a:lnSpc>
-                <a:spcPct val="120000"/>
-              </a:lnSpc>
-              <a:spcBef>
-                <a:spcPts val="0"/>
-              </a:spcBef>
-              <a:spcAft>
-                <a:spcPts val="0"/>
-              </a:spcAft>
-              <a:buClr>
-                <a:srgbClr val="0B1020"/>
-              </a:buClr>
-              <a:buSzPts val="2500"/>
-              <a:buFont typeface="Malgun Gothic"/>
-              <a:buNone/>
-            </a:pPr>
-            <a:r>
-              <a:rPr b="1" i="0" lang="en-US" sz="2500" u="none" cap="none" strike="noStrike">
-                <a:solidFill>
-                  <a:srgbClr val="0B1020"/>
-                </a:solidFill>
-                <a:latin typeface="Arial"/>
-                <a:ea typeface="Arial"/>
-                <a:cs typeface="Arial"/>
-                <a:sym typeface="Arial"/>
-              </a:rPr>
-              <a:t>설치 조건을 계약 전에 확인</a:t>
-            </a:r>
-            <a:endParaRPr b="1" i="0" sz="2500" u="none" cap="none" strike="noStrike">
-              <a:solidFill>
-                <a:srgbClr val="0B1020"/>
-              </a:solidFill>
-              <a:latin typeface="Arial"/>
-              <a:ea typeface="Arial"/>
-              <a:cs typeface="Arial"/>
-              <a:sym typeface="Arial"/>
-            </a:endParaRPr>
-          </a:p>
-        </p:txBody>
-      </p:sp>
-      <p:sp>
-        <p:nvSpPr>
-          <p:cNvPr id="110" name="Google Shape;110;g3f6c50b3b74_0_56"/>
-          <p:cNvSpPr/>
-          <p:nvPr/>
-        </p:nvSpPr>
-        <p:spPr>
-          <a:xfrm>
-            <a:off x="457200" y="1078992"/>
-            <a:ext cx="8229600" cy="292608"/>
-          </a:xfrm>
-          <a:prstGeom prst="rect">
-            <a:avLst/>
-          </a:prstGeom>
-          <a:noFill/>
-          <a:ln>
-            <a:noFill/>
-          </a:ln>
-        </p:spPr>
-        <p:txBody>
-          <a:bodyPr anchorCtr="0" anchor="ctr" bIns="45700" lIns="91425" spcFirstLastPara="1" rIns="91425" wrap="square" tIns="45700">
-            <a:noAutofit/>
-          </a:bodyPr>
-          <a:lstStyle/>
-          <a:p>
-            <a:pPr indent="0" lvl="0" marL="0" marR="0" rtl="0" algn="l">
-              <a:lnSpc>
-                <a:spcPct val="120000"/>
-              </a:lnSpc>
-              <a:spcBef>
-                <a:spcPts val="0"/>
-              </a:spcBef>
-              <a:spcAft>
-                <a:spcPts val="0"/>
-              </a:spcAft>
-              <a:buClr>
-                <a:srgbClr val="5B6478"/>
-              </a:buClr>
-              <a:buSzPts val="1250"/>
-              <a:buFont typeface="Malgun Gothic"/>
-              <a:buNone/>
-            </a:pPr>
-            <a:r>
-              <a:rPr b="0" i="0" lang="en-US" sz="1250" u="none" cap="none" strike="noStrike">
-                <a:solidFill>
-                  <a:srgbClr val="5B6478"/>
-                </a:solidFill>
-                <a:latin typeface="Arial"/>
-                <a:ea typeface="Arial"/>
-                <a:cs typeface="Arial"/>
-                <a:sym typeface="Arial"/>
-              </a:rPr>
-              <a:t>시범 기간 가장 많이 열린 화면 — 128건 · 1위</a:t>
-            </a:r>
-            <a:endParaRPr b="0" i="0" sz="1250" u="none" cap="none" strike="noStrike">
-              <a:solidFill>
-                <a:srgbClr val="5B6478"/>
-              </a:solidFill>
-              <a:latin typeface="Arial"/>
-              <a:ea typeface="Arial"/>
-              <a:cs typeface="Arial"/>
-              <a:sym typeface="Arial"/>
-            </a:endParaRPr>
-          </a:p>
-        </p:txBody>
-      </p:sp>
-      <p:sp>
-        <p:nvSpPr>
-          <p:cNvPr id="111" name="Google Shape;111;g3f6c50b3b74_0_56"/>
-          <p:cNvSpPr/>
-          <p:nvPr/>
-        </p:nvSpPr>
-        <p:spPr>
-          <a:xfrm>
-            <a:off x="4530475" y="1476725"/>
-            <a:ext cx="4365000" cy="457200"/>
-          </a:xfrm>
-          <a:prstGeom prst="rect">
-            <a:avLst/>
-          </a:prstGeom>
-          <a:noFill/>
-          <a:ln>
-            <a:noFill/>
-          </a:ln>
-        </p:spPr>
-        <p:txBody>
-          <a:bodyPr anchorCtr="0" anchor="ctr" bIns="45700" lIns="91425" spcFirstLastPara="1" rIns="91425" wrap="square" tIns="45700">
-            <a:noAutofit/>
-          </a:bodyPr>
-          <a:lstStyle/>
-          <a:p>
-            <a:pPr indent="0" lvl="0" marL="0" marR="0" rtl="0" algn="l">
-              <a:lnSpc>
-                <a:spcPct val="120000"/>
-              </a:lnSpc>
-              <a:spcBef>
-                <a:spcPts val="0"/>
-              </a:spcBef>
-              <a:spcAft>
-                <a:spcPts val="0"/>
-              </a:spcAft>
-              <a:buClr>
-                <a:srgbClr val="0B1020"/>
-              </a:buClr>
-              <a:buSzPts val="1200"/>
-              <a:buFont typeface="Malgun Gothic"/>
-              <a:buNone/>
-            </a:pPr>
-            <a:r>
-              <a:rPr b="1" i="0" lang="en-US" sz="1200" u="none" cap="none" strike="noStrike">
-                <a:solidFill>
-                  <a:srgbClr val="0B1020"/>
-                </a:solidFill>
-                <a:latin typeface="Arial"/>
-                <a:ea typeface="Arial"/>
-                <a:cs typeface="Arial"/>
-                <a:sym typeface="Arial"/>
-              </a:rPr>
-              <a:t>한눈에 확인하는 제품별 설치 가이드</a:t>
-            </a:r>
-            <a:endParaRPr b="1" i="0" sz="1200" u="none" cap="none" strike="noStrike">
-              <a:solidFill>
-                <a:srgbClr val="0B1020"/>
-              </a:solidFill>
-              <a:latin typeface="Arial"/>
-              <a:ea typeface="Arial"/>
-              <a:cs typeface="Arial"/>
-              <a:sym typeface="Arial"/>
-            </a:endParaRPr>
-          </a:p>
-          <a:p>
-            <a:pPr indent="0" lvl="0" marL="0" marR="0" rtl="0" algn="l">
-              <a:lnSpc>
-                <a:spcPct val="120000"/>
-              </a:lnSpc>
-              <a:spcBef>
-                <a:spcPts val="0"/>
-              </a:spcBef>
-              <a:spcAft>
-                <a:spcPts val="0"/>
-              </a:spcAft>
-              <a:buClr>
-                <a:srgbClr val="0B1020"/>
-              </a:buClr>
-              <a:buSzPts val="1200"/>
-              <a:buFont typeface="Malgun Gothic"/>
-              <a:buNone/>
-            </a:pPr>
-            <a:r>
-              <a:rPr b="0" i="0" lang="en-US" sz="1200" u="none" cap="none" strike="noStrike">
-                <a:solidFill>
-                  <a:srgbClr val="0B1020"/>
-                </a:solidFill>
-                <a:latin typeface="Arial"/>
-                <a:ea typeface="Arial"/>
-                <a:cs typeface="Arial"/>
-                <a:sym typeface="Arial"/>
-              </a:rPr>
-              <a:t>(21개 카테고리 · 전기 · 배수 · 이격 · 문 폭 사이즈)</a:t>
-            </a:r>
-            <a:endParaRPr b="0" i="0" sz="1200" u="none" cap="none" strike="noStrike">
-              <a:solidFill>
-                <a:srgbClr val="0B1020"/>
-              </a:solidFill>
-              <a:latin typeface="Arial"/>
-              <a:ea typeface="Arial"/>
-              <a:cs typeface="Arial"/>
-              <a:sym typeface="Arial"/>
-            </a:endParaRPr>
-          </a:p>
-        </p:txBody>
-      </p:sp>
-      <p:sp>
-        <p:nvSpPr>
-          <p:cNvPr id="112" name="Google Shape;112;g3f6c50b3b74_0_56"/>
-          <p:cNvSpPr/>
-          <p:nvPr/>
-        </p:nvSpPr>
-        <p:spPr>
-          <a:xfrm>
-            <a:off x="4530475" y="2052800"/>
-            <a:ext cx="4365000" cy="1051500"/>
-          </a:xfrm>
-          <a:prstGeom prst="rect">
-            <a:avLst/>
-          </a:prstGeom>
-          <a:solidFill>
-            <a:srgbClr val="F7F8FB"/>
-          </a:solidFill>
-          <a:ln cap="flat" cmpd="sng" w="12700">
-            <a:solidFill>
-              <a:srgbClr val="DDE1EC"/>
-            </a:solidFill>
-            <a:prstDash val="solid"/>
-            <a:round/>
-            <a:headEnd len="sm" w="sm" type="none"/>
-            <a:tailEnd len="sm" w="sm" type="none"/>
-          </a:ln>
-        </p:spPr>
-        <p:txBody>
-          <a:bodyPr anchorCtr="0" anchor="ctr" bIns="91425" lIns="91425" spcFirstLastPara="1" rIns="91425" wrap="square" tIns="91425">
-            <a:noAutofit/>
-          </a:bodyPr>
-          <a:lstStyle/>
-          <a:p>
-            <a:pPr indent="0" lvl="0" marL="0" marR="0" rtl="0" algn="l">
-              <a:lnSpc>
-                <a:spcPct val="100000"/>
-              </a:lnSpc>
-              <a:spcBef>
-                <a:spcPts val="0"/>
-              </a:spcBef>
-              <a:spcAft>
-                <a:spcPts val="0"/>
-              </a:spcAft>
-              <a:buClr>
-                <a:srgbClr val="000000"/>
-              </a:buClr>
-              <a:buSzPts val="1400"/>
-              <a:buFont typeface="Arial"/>
-              <a:buNone/>
-            </a:pPr>
-            <a:r>
-              <a:t/>
-            </a:r>
-            <a:endParaRPr b="0" i="0" sz="1400" u="none" cap="none" strike="noStrike">
-              <a:solidFill>
-                <a:srgbClr val="000000"/>
-              </a:solidFill>
-              <a:latin typeface="Arial"/>
-              <a:ea typeface="Arial"/>
-              <a:cs typeface="Arial"/>
-              <a:sym typeface="Arial"/>
-            </a:endParaRPr>
-          </a:p>
-        </p:txBody>
-      </p:sp>
-      <p:sp>
-        <p:nvSpPr>
-          <p:cNvPr id="113" name="Google Shape;113;g3f6c50b3b74_0_56"/>
-          <p:cNvSpPr/>
-          <p:nvPr/>
-        </p:nvSpPr>
-        <p:spPr>
-          <a:xfrm>
-            <a:off x="4673328" y="2052800"/>
-            <a:ext cx="4127100" cy="1051500"/>
-          </a:xfrm>
-          <a:prstGeom prst="rect">
-            <a:avLst/>
-          </a:prstGeom>
-          <a:noFill/>
-          <a:ln>
-            <a:noFill/>
-          </a:ln>
-        </p:spPr>
-        <p:txBody>
-          <a:bodyPr anchorCtr="0" anchor="ctr" bIns="45700" lIns="91425" spcFirstLastPara="1" rIns="91425" wrap="square" tIns="45700">
-            <a:noAutofit/>
-          </a:bodyPr>
-          <a:lstStyle/>
-          <a:p>
-            <a:pPr indent="0" lvl="0" marL="0" marR="0" rtl="0" algn="l">
-              <a:lnSpc>
-                <a:spcPct val="120000"/>
-              </a:lnSpc>
-              <a:spcBef>
-                <a:spcPts val="0"/>
-              </a:spcBef>
-              <a:spcAft>
-                <a:spcPts val="0"/>
-              </a:spcAft>
-              <a:buClr>
-                <a:srgbClr val="5B6478"/>
-              </a:buClr>
-              <a:buSzPts val="1150"/>
-              <a:buFont typeface="Malgun Gothic"/>
-              <a:buNone/>
-            </a:pPr>
-            <a:r>
-              <a:rPr b="1" i="0" lang="en-US" sz="1150" u="none" cap="none" strike="noStrike">
-                <a:solidFill>
-                  <a:srgbClr val="5B6478"/>
-                </a:solidFill>
-                <a:latin typeface="Arial"/>
-                <a:ea typeface="Arial"/>
-                <a:cs typeface="Arial"/>
-                <a:sym typeface="Arial"/>
-              </a:rPr>
-              <a:t>설치 불가 시 손실</a:t>
-            </a:r>
-            <a:endParaRPr b="1" i="0" sz="1150" u="none" cap="none" strike="noStrike">
-              <a:solidFill>
-                <a:srgbClr val="5B6478"/>
-              </a:solidFill>
-              <a:latin typeface="Arial"/>
-              <a:ea typeface="Arial"/>
-              <a:cs typeface="Arial"/>
-              <a:sym typeface="Arial"/>
-            </a:endParaRPr>
-          </a:p>
-          <a:p>
-            <a:pPr indent="0" lvl="0" marL="0" marR="0" rtl="0" algn="l">
-              <a:lnSpc>
-                <a:spcPct val="120000"/>
-              </a:lnSpc>
-              <a:spcBef>
-                <a:spcPts val="0"/>
-              </a:spcBef>
-              <a:spcAft>
-                <a:spcPts val="0"/>
-              </a:spcAft>
-              <a:buClr>
-                <a:srgbClr val="5B6478"/>
-              </a:buClr>
-              <a:buSzPts val="1150"/>
-              <a:buFont typeface="Malgun Gothic"/>
-              <a:buNone/>
-            </a:pPr>
-            <a:r>
-              <a:rPr b="0" i="0" lang="en-US" sz="1150" u="none" cap="none" strike="noStrike">
-                <a:solidFill>
-                  <a:srgbClr val="5B6478"/>
-                </a:solidFill>
-                <a:latin typeface="Arial"/>
-                <a:ea typeface="Arial"/>
-                <a:cs typeface="Arial"/>
-                <a:sym typeface="Arial"/>
-              </a:rPr>
-              <a:t>: 기사 재방문 비용, 일정 재조정 시간, 반품 손해 비용 등</a:t>
-            </a:r>
-            <a:endParaRPr b="0" i="0" sz="1150" u="none" cap="none" strike="noStrike">
-              <a:solidFill>
-                <a:srgbClr val="5B6478"/>
-              </a:solidFill>
-              <a:latin typeface="Arial"/>
-              <a:ea typeface="Arial"/>
-              <a:cs typeface="Arial"/>
-              <a:sym typeface="Arial"/>
-            </a:endParaRPr>
-          </a:p>
-          <a:p>
-            <a:pPr indent="0" lvl="0" marL="0" marR="0" rtl="0" algn="l">
-              <a:lnSpc>
-                <a:spcPct val="120000"/>
-              </a:lnSpc>
-              <a:spcBef>
-                <a:spcPts val="0"/>
-              </a:spcBef>
-              <a:spcAft>
-                <a:spcPts val="0"/>
-              </a:spcAft>
-              <a:buClr>
-                <a:srgbClr val="5B6478"/>
-              </a:buClr>
-              <a:buSzPts val="1150"/>
-              <a:buFont typeface="Malgun Gothic"/>
-              <a:buNone/>
-            </a:pPr>
-            <a:r>
-              <a:rPr b="1" i="0" lang="en-US" sz="1150" u="none" cap="none" strike="noStrike">
-                <a:solidFill>
-                  <a:srgbClr val="5B6478"/>
-                </a:solidFill>
-                <a:latin typeface="Arial"/>
-                <a:ea typeface="Arial"/>
-                <a:cs typeface="Arial"/>
-                <a:sym typeface="Arial"/>
-              </a:rPr>
-              <a:t>판매 전 30초</a:t>
-            </a:r>
-            <a:r>
-              <a:rPr b="1" lang="en-US" sz="1150">
-                <a:solidFill>
-                  <a:srgbClr val="5B6478"/>
-                </a:solidFill>
-              </a:rPr>
-              <a:t> 확인이면 그 비용을 만회합니다</a:t>
-            </a:r>
-            <a:endParaRPr b="1" i="0" sz="1150" u="none" cap="none" strike="noStrike">
-              <a:solidFill>
-                <a:srgbClr val="5B6478"/>
-              </a:solidFill>
-              <a:latin typeface="Arial"/>
-              <a:ea typeface="Arial"/>
-              <a:cs typeface="Arial"/>
-              <a:sym typeface="Arial"/>
-            </a:endParaRPr>
-          </a:p>
-        </p:txBody>
-      </p:sp>
-      <p:sp>
-        <p:nvSpPr>
-          <p:cNvPr id="114" name="Google Shape;114;g3f6c50b3b74_0_56"/>
-          <p:cNvSpPr/>
-          <p:nvPr/>
-        </p:nvSpPr>
-        <p:spPr>
-          <a:xfrm>
-            <a:off x="4530475" y="3287245"/>
-            <a:ext cx="4365000" cy="402300"/>
-          </a:xfrm>
-          <a:prstGeom prst="rect">
-            <a:avLst/>
-          </a:prstGeom>
-          <a:solidFill>
-            <a:srgbClr val="F7F8FB"/>
-          </a:solidFill>
-          <a:ln cap="flat" cmpd="sng" w="12700">
-            <a:solidFill>
-              <a:srgbClr val="DDE1EC"/>
-            </a:solidFill>
-            <a:prstDash val="solid"/>
-            <a:round/>
-            <a:headEnd len="sm" w="sm" type="none"/>
-            <a:tailEnd len="sm" w="sm" type="none"/>
-          </a:ln>
-        </p:spPr>
-        <p:txBody>
-          <a:bodyPr anchorCtr="0" anchor="ctr" bIns="91425" lIns="91425" spcFirstLastPara="1" rIns="91425" wrap="square" tIns="91425">
-            <a:noAutofit/>
-          </a:bodyPr>
-          <a:lstStyle/>
-          <a:p>
-            <a:pPr indent="0" lvl="0" marL="0" marR="0" rtl="0" algn="l">
-              <a:lnSpc>
-                <a:spcPct val="100000"/>
-              </a:lnSpc>
-              <a:spcBef>
-                <a:spcPts val="0"/>
-              </a:spcBef>
-              <a:spcAft>
-                <a:spcPts val="0"/>
-              </a:spcAft>
-              <a:buClr>
-                <a:srgbClr val="000000"/>
-              </a:buClr>
-              <a:buSzPts val="1400"/>
-              <a:buFont typeface="Arial"/>
-              <a:buNone/>
-            </a:pPr>
-            <a:r>
-              <a:t/>
-            </a:r>
-            <a:endParaRPr b="0" i="0" sz="1400" u="none" cap="none" strike="noStrike">
-              <a:solidFill>
-                <a:srgbClr val="000000"/>
-              </a:solidFill>
-              <a:latin typeface="Arial"/>
-              <a:ea typeface="Arial"/>
-              <a:cs typeface="Arial"/>
-              <a:sym typeface="Arial"/>
-            </a:endParaRPr>
-          </a:p>
-        </p:txBody>
-      </p:sp>
-      <p:sp>
-        <p:nvSpPr>
-          <p:cNvPr id="115" name="Google Shape;115;g3f6c50b3b74_0_56"/>
-          <p:cNvSpPr/>
-          <p:nvPr/>
-        </p:nvSpPr>
-        <p:spPr>
-          <a:xfrm>
-            <a:off x="4641575" y="3287250"/>
-            <a:ext cx="563400" cy="402300"/>
-          </a:xfrm>
-          <a:prstGeom prst="rect">
-            <a:avLst/>
-          </a:prstGeom>
-          <a:noFill/>
-          <a:ln>
-            <a:noFill/>
-          </a:ln>
-        </p:spPr>
-        <p:txBody>
-          <a:bodyPr anchorCtr="0" anchor="ctr" bIns="45700" lIns="91425" spcFirstLastPara="1" rIns="91425" wrap="square" tIns="45700">
-            <a:noAutofit/>
-          </a:bodyPr>
-          <a:lstStyle/>
-          <a:p>
-            <a:pPr indent="0" lvl="0" marL="0" marR="0" rtl="0" algn="l">
-              <a:lnSpc>
-                <a:spcPct val="120000"/>
-              </a:lnSpc>
-              <a:spcBef>
-                <a:spcPts val="0"/>
-              </a:spcBef>
-              <a:spcAft>
-                <a:spcPts val="0"/>
-              </a:spcAft>
-              <a:buClr>
-                <a:srgbClr val="5B6478"/>
-              </a:buClr>
-              <a:buSzPts val="950"/>
-              <a:buFont typeface="Malgun Gothic"/>
-              <a:buNone/>
-            </a:pPr>
-            <a:r>
-              <a:rPr b="1" i="0" lang="en-US" sz="950" u="none" cap="none" strike="noStrike">
-                <a:solidFill>
-                  <a:srgbClr val="5B6478"/>
-                </a:solidFill>
-                <a:latin typeface="Arial"/>
-                <a:ea typeface="Arial"/>
-                <a:cs typeface="Arial"/>
-                <a:sym typeface="Arial"/>
-              </a:rPr>
-              <a:t>매니저</a:t>
-            </a:r>
-            <a:endParaRPr b="1" i="0" sz="950" u="none" cap="none" strike="noStrike">
-              <a:solidFill>
-                <a:srgbClr val="5B6478"/>
-              </a:solidFill>
-              <a:latin typeface="Arial"/>
-              <a:ea typeface="Arial"/>
-              <a:cs typeface="Arial"/>
-              <a:sym typeface="Arial"/>
-            </a:endParaRPr>
-          </a:p>
-        </p:txBody>
-      </p:sp>
-      <p:sp>
-        <p:nvSpPr>
-          <p:cNvPr id="116" name="Google Shape;116;g3f6c50b3b74_0_56"/>
-          <p:cNvSpPr/>
-          <p:nvPr/>
-        </p:nvSpPr>
-        <p:spPr>
-          <a:xfrm>
-            <a:off x="5205058" y="3287245"/>
-            <a:ext cx="3571200" cy="402300"/>
-          </a:xfrm>
-          <a:prstGeom prst="rect">
-            <a:avLst/>
-          </a:prstGeom>
-          <a:noFill/>
-          <a:ln>
-            <a:noFill/>
-          </a:ln>
-        </p:spPr>
-        <p:txBody>
-          <a:bodyPr anchorCtr="0" anchor="ctr" bIns="45700" lIns="91425" spcFirstLastPara="1" rIns="91425" wrap="square" tIns="45700">
-            <a:noAutofit/>
-          </a:bodyPr>
-          <a:lstStyle/>
-          <a:p>
-            <a:pPr indent="0" lvl="0" marL="0" marR="0" rtl="0" algn="l">
-              <a:lnSpc>
-                <a:spcPct val="120000"/>
-              </a:lnSpc>
-              <a:spcBef>
-                <a:spcPts val="0"/>
-              </a:spcBef>
-              <a:spcAft>
-                <a:spcPts val="0"/>
-              </a:spcAft>
-              <a:buClr>
-                <a:srgbClr val="0B1020"/>
-              </a:buClr>
-              <a:buSzPts val="900"/>
-              <a:buFont typeface="Malgun Gothic"/>
-              <a:buNone/>
-            </a:pPr>
-            <a:r>
-              <a:rPr b="0" i="0" lang="en-US" sz="900" u="none" cap="none" strike="noStrike">
-                <a:solidFill>
-                  <a:srgbClr val="0B1020"/>
-                </a:solidFill>
-                <a:latin typeface="Arial"/>
-                <a:ea typeface="Arial"/>
-                <a:cs typeface="Arial"/>
-                <a:sym typeface="Arial"/>
-              </a:rPr>
-              <a:t>설치 조건을 확인함으로</a:t>
-            </a:r>
-            <a:r>
-              <a:rPr lang="en-US" sz="900">
-                <a:solidFill>
-                  <a:srgbClr val="0B1020"/>
-                </a:solidFill>
-              </a:rPr>
-              <a:t>써</a:t>
-            </a:r>
-            <a:r>
-              <a:rPr b="0" i="0" lang="en-US" sz="900" u="none" cap="none" strike="noStrike">
-                <a:solidFill>
-                  <a:srgbClr val="0B1020"/>
-                </a:solidFill>
-                <a:latin typeface="Arial"/>
-                <a:ea typeface="Arial"/>
-                <a:cs typeface="Arial"/>
-                <a:sym typeface="Arial"/>
-              </a:rPr>
-              <a:t> 설치 불가로 인한 취소 확률을 낮춤</a:t>
-            </a:r>
-            <a:endParaRPr b="0" i="0" sz="900" u="none" cap="none" strike="noStrike">
-              <a:solidFill>
-                <a:srgbClr val="0B1020"/>
-              </a:solidFill>
-              <a:latin typeface="Arial"/>
-              <a:ea typeface="Arial"/>
-              <a:cs typeface="Arial"/>
-              <a:sym typeface="Arial"/>
-            </a:endParaRPr>
-          </a:p>
-        </p:txBody>
-      </p:sp>
-      <p:sp>
-        <p:nvSpPr>
-          <p:cNvPr id="117" name="Google Shape;117;g3f6c50b3b74_0_56"/>
-          <p:cNvSpPr/>
-          <p:nvPr/>
-        </p:nvSpPr>
-        <p:spPr>
-          <a:xfrm>
-            <a:off x="4530475" y="3744448"/>
-            <a:ext cx="4365000" cy="512100"/>
+          <p:cNvPr id="124" name="Google Shape;124;g3f6c50b3b74_0_0"/>
+          <p:cNvSpPr/>
+          <p:nvPr/>
+        </p:nvSpPr>
+        <p:spPr>
+          <a:xfrm>
+            <a:off x="0" y="5065775"/>
+            <a:ext cx="9144000" cy="77700"/>
           </a:xfrm>
           <a:prstGeom prst="rect">
             <a:avLst/>
@@ -10397,14 +11021,14 @@
       </p:sp>
       <p:sp>
         <p:nvSpPr>
-          <p:cNvPr id="118" name="Google Shape;118;g3f6c50b3b74_0_56"/>
-          <p:cNvSpPr/>
-          <p:nvPr/>
-        </p:nvSpPr>
-        <p:spPr>
-          <a:xfrm>
-            <a:off x="4641583" y="3744448"/>
-            <a:ext cx="515700" cy="512100"/>
+          <p:cNvPr id="125" name="Google Shape;125;g3f6c50b3b74_0_0"/>
+          <p:cNvSpPr/>
+          <p:nvPr/>
+        </p:nvSpPr>
+        <p:spPr>
+          <a:xfrm>
+            <a:off x="8549648" y="4841350"/>
+            <a:ext cx="475800" cy="255900"/>
           </a:xfrm>
           <a:prstGeom prst="rect">
             <a:avLst/>
@@ -10420,428 +11044,42 @@
           </a:bodyPr>
           <a:lstStyle/>
           <a:p>
-            <a:pPr indent="0" lvl="0" marL="0" marR="0" rtl="0" algn="l">
-              <a:lnSpc>
-                <a:spcPct val="120000"/>
-              </a:lnSpc>
-              <a:spcBef>
-                <a:spcPts val="0"/>
-              </a:spcBef>
-              <a:spcAft>
-                <a:spcPts val="0"/>
-              </a:spcAft>
-              <a:buClr>
-                <a:srgbClr val="FFFFFF"/>
-              </a:buClr>
-              <a:buSzPts val="950"/>
+            <a:pPr indent="0" lvl="0" marL="0" marR="0" rtl="0" algn="r">
+              <a:lnSpc>
+                <a:spcPct val="100000"/>
+              </a:lnSpc>
+              <a:spcBef>
+                <a:spcPts val="0"/>
+              </a:spcBef>
+              <a:spcAft>
+                <a:spcPts val="0"/>
+              </a:spcAft>
+              <a:buClr>
+                <a:srgbClr val="5B6478"/>
+              </a:buClr>
+              <a:buSzPts val="900"/>
               <a:buFont typeface="Malgun Gothic"/>
               <a:buNone/>
             </a:pPr>
             <a:r>
-              <a:rPr b="1" i="0" lang="en-US" sz="950" u="none" cap="none" strike="noStrike">
-                <a:solidFill>
-                  <a:srgbClr val="FFFFFF"/>
+              <a:rPr lang="en-US" sz="900">
+                <a:solidFill>
+                  <a:srgbClr val="5B6478"/>
+                </a:solidFill>
+              </a:rPr>
+              <a:t>5</a:t>
+            </a:r>
+            <a:r>
+              <a:rPr b="0" i="0" lang="en-US" sz="900" u="none" cap="none" strike="noStrike">
+                <a:solidFill>
+                  <a:srgbClr val="5B6478"/>
                 </a:solidFill>
                 <a:latin typeface="Arial"/>
                 <a:ea typeface="Arial"/>
                 <a:cs typeface="Arial"/>
                 <a:sym typeface="Arial"/>
               </a:rPr>
-              <a:t>지점</a:t>
-            </a:r>
-            <a:endParaRPr b="1" i="0" sz="950" u="none" cap="none" strike="noStrike">
-              <a:solidFill>
-                <a:srgbClr val="FFFFFF"/>
-              </a:solidFill>
-              <a:latin typeface="Arial"/>
-              <a:ea typeface="Arial"/>
-              <a:cs typeface="Arial"/>
-              <a:sym typeface="Arial"/>
-            </a:endParaRPr>
-          </a:p>
-        </p:txBody>
-      </p:sp>
-      <p:sp>
-        <p:nvSpPr>
-          <p:cNvPr id="119" name="Google Shape;119;g3f6c50b3b74_0_56"/>
-          <p:cNvSpPr/>
-          <p:nvPr/>
-        </p:nvSpPr>
-        <p:spPr>
-          <a:xfrm>
-            <a:off x="5205058" y="3744448"/>
-            <a:ext cx="3571200" cy="512100"/>
-          </a:xfrm>
-          <a:prstGeom prst="rect">
-            <a:avLst/>
-          </a:prstGeom>
-          <a:noFill/>
-          <a:ln>
-            <a:noFill/>
-          </a:ln>
-        </p:spPr>
-        <p:txBody>
-          <a:bodyPr anchorCtr="0" anchor="ctr" bIns="45700" lIns="91425" spcFirstLastPara="1" rIns="91425" wrap="square" tIns="45700">
-            <a:noAutofit/>
-          </a:bodyPr>
-          <a:lstStyle/>
-          <a:p>
-            <a:pPr indent="0" lvl="0" marL="0" marR="0" rtl="0" algn="l">
-              <a:lnSpc>
-                <a:spcPct val="120000"/>
-              </a:lnSpc>
-              <a:spcBef>
-                <a:spcPts val="0"/>
-              </a:spcBef>
-              <a:spcAft>
-                <a:spcPts val="0"/>
-              </a:spcAft>
-              <a:buClr>
-                <a:srgbClr val="FFFFFF"/>
-              </a:buClr>
-              <a:buSzPts val="1200"/>
-              <a:buFont typeface="Malgun Gothic"/>
-              <a:buNone/>
-            </a:pPr>
-            <a:r>
-              <a:rPr b="1" i="0" lang="en-US" sz="1200" u="none" cap="none" strike="noStrike">
-                <a:solidFill>
-                  <a:srgbClr val="FFFFFF"/>
-                </a:solidFill>
-                <a:latin typeface="Arial"/>
-                <a:ea typeface="Arial"/>
-                <a:cs typeface="Arial"/>
-                <a:sym typeface="Arial"/>
-              </a:rPr>
-              <a:t>설치 재방문 · 일정 재조정 · 설치 불가 취소 감소</a:t>
-            </a:r>
-            <a:endParaRPr b="1" i="0" sz="1200" u="none" cap="none" strike="noStrike">
-              <a:solidFill>
-                <a:srgbClr val="FFFFFF"/>
-              </a:solidFill>
-              <a:latin typeface="Arial"/>
-              <a:ea typeface="Arial"/>
-              <a:cs typeface="Arial"/>
-              <a:sym typeface="Arial"/>
-            </a:endParaRPr>
-          </a:p>
-        </p:txBody>
-      </p:sp>
-      <p:pic>
-        <p:nvPicPr>
-          <p:cNvPr id="120" name="Google Shape;120;g3f6c50b3b74_0_56"/>
-          <p:cNvPicPr preferRelativeResize="0"/>
-          <p:nvPr/>
-        </p:nvPicPr>
-        <p:blipFill rotWithShape="1">
-          <a:blip r:embed="rId3">
-            <a:alphaModFix/>
-          </a:blip>
-          <a:srcRect b="0" l="0" r="0" t="0"/>
-          <a:stretch/>
-        </p:blipFill>
-        <p:spPr>
-          <a:xfrm>
-            <a:off x="823652" y="1502849"/>
-            <a:ext cx="1538087" cy="2994300"/>
-          </a:xfrm>
-          <a:prstGeom prst="rect">
-            <a:avLst/>
-          </a:prstGeom>
-          <a:noFill/>
-          <a:ln cap="flat" cmpd="sng" w="9525">
-            <a:solidFill>
-              <a:srgbClr val="DDE1EC"/>
-            </a:solidFill>
-            <a:prstDash val="solid"/>
-            <a:round/>
-            <a:headEnd len="sm" w="sm" type="none"/>
-            <a:tailEnd len="sm" w="sm" type="none"/>
-          </a:ln>
-        </p:spPr>
-      </p:pic>
-      <p:pic>
-        <p:nvPicPr>
-          <p:cNvPr id="121" name="Google Shape;121;g3f6c50b3b74_0_56"/>
-          <p:cNvPicPr preferRelativeResize="0"/>
-          <p:nvPr/>
-        </p:nvPicPr>
-        <p:blipFill rotWithShape="1">
-          <a:blip r:embed="rId4">
-            <a:alphaModFix/>
-          </a:blip>
-          <a:srcRect b="0" l="0" r="0" t="0"/>
-          <a:stretch/>
-        </p:blipFill>
-        <p:spPr>
-          <a:xfrm>
-            <a:off x="2481739" y="1502849"/>
-            <a:ext cx="1538087" cy="2994300"/>
-          </a:xfrm>
-          <a:prstGeom prst="rect">
-            <a:avLst/>
-          </a:prstGeom>
-          <a:noFill/>
-          <a:ln cap="flat" cmpd="sng" w="9525">
-            <a:solidFill>
-              <a:srgbClr val="DDE1EC"/>
-            </a:solidFill>
-            <a:prstDash val="solid"/>
-            <a:round/>
-            <a:headEnd len="sm" w="sm" type="none"/>
-            <a:tailEnd len="sm" w="sm" type="none"/>
-          </a:ln>
-        </p:spPr>
-      </p:pic>
-      <p:sp>
-        <p:nvSpPr>
-          <p:cNvPr id="122" name="Google Shape;122;g3f6c50b3b74_0_56"/>
-          <p:cNvSpPr/>
-          <p:nvPr/>
-        </p:nvSpPr>
-        <p:spPr>
-          <a:xfrm>
-            <a:off x="7132150" y="310891"/>
-            <a:ext cx="2011800" cy="255900"/>
-          </a:xfrm>
-          <a:prstGeom prst="rect">
-            <a:avLst/>
-          </a:prstGeom>
-          <a:solidFill>
-            <a:srgbClr val="1428A0"/>
-          </a:solidFill>
-          <a:ln cap="flat" cmpd="sng" w="12700">
-            <a:solidFill>
-              <a:srgbClr val="1428A0"/>
-            </a:solidFill>
-            <a:prstDash val="solid"/>
-            <a:round/>
-            <a:headEnd len="sm" w="sm" type="none"/>
-            <a:tailEnd len="sm" w="sm" type="none"/>
-          </a:ln>
-        </p:spPr>
-        <p:txBody>
-          <a:bodyPr anchorCtr="0" anchor="ctr" bIns="91425" lIns="91425" spcFirstLastPara="1" rIns="91425" wrap="square" tIns="91425">
-            <a:noAutofit/>
-          </a:bodyPr>
-          <a:lstStyle/>
-          <a:p>
-            <a:pPr indent="0" lvl="0" marL="0" marR="0" rtl="0" algn="l">
-              <a:lnSpc>
-                <a:spcPct val="100000"/>
-              </a:lnSpc>
-              <a:spcBef>
-                <a:spcPts val="0"/>
-              </a:spcBef>
-              <a:spcAft>
-                <a:spcPts val="0"/>
-              </a:spcAft>
-              <a:buClr>
-                <a:srgbClr val="000000"/>
-              </a:buClr>
-              <a:buSzPts val="1400"/>
-              <a:buFont typeface="Arial"/>
-              <a:buNone/>
-            </a:pPr>
-            <a:r>
-              <a:t/>
-            </a:r>
-            <a:endParaRPr b="0" i="0" sz="1400" u="none" cap="none" strike="noStrike">
-              <a:solidFill>
-                <a:srgbClr val="000000"/>
-              </a:solidFill>
-              <a:latin typeface="Arial"/>
-              <a:ea typeface="Arial"/>
-              <a:cs typeface="Arial"/>
-              <a:sym typeface="Arial"/>
-            </a:endParaRPr>
-          </a:p>
-        </p:txBody>
-      </p:sp>
-      <p:sp>
-        <p:nvSpPr>
-          <p:cNvPr id="123" name="Google Shape;123;g3f6c50b3b74_0_56"/>
-          <p:cNvSpPr/>
-          <p:nvPr/>
-        </p:nvSpPr>
-        <p:spPr>
-          <a:xfrm>
-            <a:off x="7172700" y="317335"/>
-            <a:ext cx="1971300" cy="255900"/>
-          </a:xfrm>
-          <a:prstGeom prst="rect">
-            <a:avLst/>
-          </a:prstGeom>
-          <a:noFill/>
-          <a:ln>
-            <a:noFill/>
-          </a:ln>
-        </p:spPr>
-        <p:txBody>
-          <a:bodyPr anchorCtr="0" anchor="ctr" bIns="45700" lIns="91425" spcFirstLastPara="1" rIns="91425" wrap="square" tIns="45700">
-            <a:noAutofit/>
-          </a:bodyPr>
-          <a:lstStyle/>
-          <a:p>
-            <a:pPr indent="0" lvl="0" marL="0" marR="0" rtl="0" algn="l">
-              <a:lnSpc>
-                <a:spcPct val="100000"/>
-              </a:lnSpc>
-              <a:spcBef>
-                <a:spcPts val="0"/>
-              </a:spcBef>
-              <a:spcAft>
-                <a:spcPts val="0"/>
-              </a:spcAft>
-              <a:buClr>
-                <a:srgbClr val="FFFFFF"/>
-              </a:buClr>
-              <a:buSzPts val="900"/>
-              <a:buFont typeface="Malgun Gothic"/>
-              <a:buNone/>
-            </a:pPr>
-            <a:r>
-              <a:rPr b="0" i="0" lang="en-US" sz="900" u="none" cap="none" strike="noStrike">
-                <a:solidFill>
-                  <a:srgbClr val="FFFFFF"/>
-                </a:solidFill>
-                <a:latin typeface="Arial"/>
-                <a:ea typeface="Arial"/>
-                <a:cs typeface="Arial"/>
-                <a:sym typeface="Arial"/>
-              </a:rPr>
-              <a:t>세일즈 코파일럿</a:t>
-            </a:r>
-            <a:endParaRPr b="0" i="0" sz="900" u="none" cap="none" strike="noStrike">
-              <a:solidFill>
-                <a:schemeClr val="dk1"/>
-              </a:solidFill>
-              <a:latin typeface="Arial"/>
-              <a:ea typeface="Arial"/>
-              <a:cs typeface="Arial"/>
-              <a:sym typeface="Arial"/>
-            </a:endParaRPr>
-          </a:p>
-        </p:txBody>
-      </p:sp>
-      <p:sp>
-        <p:nvSpPr>
-          <p:cNvPr id="124" name="Google Shape;124;g3f6c50b3b74_0_56"/>
-          <p:cNvSpPr/>
-          <p:nvPr/>
-        </p:nvSpPr>
-        <p:spPr>
-          <a:xfrm>
-            <a:off x="0" y="5065775"/>
-            <a:ext cx="9144000" cy="77700"/>
-          </a:xfrm>
-          <a:prstGeom prst="rect">
-            <a:avLst/>
-          </a:prstGeom>
-          <a:solidFill>
-            <a:srgbClr val="1428A0"/>
-          </a:solidFill>
-          <a:ln cap="flat" cmpd="sng" w="12700">
-            <a:solidFill>
-              <a:srgbClr val="1428A0"/>
-            </a:solidFill>
-            <a:prstDash val="solid"/>
-            <a:round/>
-            <a:headEnd len="sm" w="sm" type="none"/>
-            <a:tailEnd len="sm" w="sm" type="none"/>
-          </a:ln>
-        </p:spPr>
-        <p:txBody>
-          <a:bodyPr anchorCtr="0" anchor="ctr" bIns="91425" lIns="91425" spcFirstLastPara="1" rIns="91425" wrap="square" tIns="91425">
-            <a:noAutofit/>
-          </a:bodyPr>
-          <a:lstStyle/>
-          <a:p>
-            <a:pPr indent="0" lvl="0" marL="0" marR="0" rtl="0" algn="l">
-              <a:lnSpc>
-                <a:spcPct val="100000"/>
-              </a:lnSpc>
-              <a:spcBef>
-                <a:spcPts val="0"/>
-              </a:spcBef>
-              <a:spcAft>
-                <a:spcPts val="0"/>
-              </a:spcAft>
-              <a:buClr>
-                <a:srgbClr val="000000"/>
-              </a:buClr>
-              <a:buSzPts val="1400"/>
-              <a:buFont typeface="Arial"/>
-              <a:buNone/>
-            </a:pPr>
-            <a:r>
-              <a:t/>
-            </a:r>
-            <a:endParaRPr b="0" i="0" sz="1400" u="none" cap="none" strike="noStrike">
-              <a:solidFill>
-                <a:srgbClr val="000000"/>
-              </a:solidFill>
-              <a:latin typeface="Arial"/>
-              <a:ea typeface="Arial"/>
-              <a:cs typeface="Arial"/>
-              <a:sym typeface="Arial"/>
-            </a:endParaRPr>
-          </a:p>
-        </p:txBody>
-      </p:sp>
-      <p:sp>
-        <p:nvSpPr>
-          <p:cNvPr id="125" name="Google Shape;125;g3f6c50b3b74_0_56"/>
-          <p:cNvSpPr/>
-          <p:nvPr/>
-        </p:nvSpPr>
-        <p:spPr>
-          <a:xfrm>
-            <a:off x="8549648" y="4841350"/>
-            <a:ext cx="475800" cy="255900"/>
-          </a:xfrm>
-          <a:prstGeom prst="rect">
-            <a:avLst/>
-          </a:prstGeom>
-          <a:noFill/>
-          <a:ln>
-            <a:noFill/>
-          </a:ln>
-        </p:spPr>
-        <p:txBody>
-          <a:bodyPr anchorCtr="0" anchor="ctr" bIns="45700" lIns="91425" spcFirstLastPara="1" rIns="91425" wrap="square" tIns="45700">
-            <a:noAutofit/>
-          </a:bodyPr>
-          <a:lstStyle/>
-          <a:p>
-            <a:pPr indent="0" lvl="0" marL="0" marR="0" rtl="0" algn="r">
-              <a:lnSpc>
-                <a:spcPct val="100000"/>
-              </a:lnSpc>
-              <a:spcBef>
-                <a:spcPts val="0"/>
-              </a:spcBef>
-              <a:spcAft>
-                <a:spcPts val="0"/>
-              </a:spcAft>
-              <a:buClr>
-                <a:srgbClr val="5B6478"/>
-              </a:buClr>
-              <a:buSzPts val="900"/>
-              <a:buFont typeface="Malgun Gothic"/>
-              <a:buNone/>
-            </a:pPr>
-            <a:r>
-              <a:rPr b="0" i="0" lang="en-US" sz="900" u="none" cap="none" strike="noStrike">
-                <a:solidFill>
-                  <a:srgbClr val="5B6478"/>
-                </a:solidFill>
-                <a:latin typeface="Arial"/>
-                <a:ea typeface="Arial"/>
-                <a:cs typeface="Arial"/>
-                <a:sym typeface="Arial"/>
-              </a:rPr>
-              <a:t>5/10</a:t>
+              <a:t>/10</a:t>
             </a:r>
             <a:endParaRPr b="0" i="0" sz="900" u="none" cap="none" strike="noStrike">
               <a:solidFill>
@@ -11129,89 +11367,53 @@
               <a:buNone/>
             </a:pPr>
             <a:r>
-              <a:rPr lang="en-US" sz="1250">
+              <a:rPr b="0" i="0" lang="en-US" sz="1250" u="none" cap="none" strike="noStrike">
                 <a:solidFill>
                   <a:srgbClr val="5B6478"/>
-                </a:solidFill>
-              </a:rPr>
-              <a:t>지점장이 일일이 확인할 수 없던 정보 편차가 사라집니다</a:t>
-            </a:r>
-            <a:endParaRPr b="0" i="0" sz="1250" u="none" cap="none" strike="noStrike">
-              <a:solidFill>
-                <a:srgbClr val="5B6478"/>
-              </a:solidFill>
-              <a:latin typeface="Arial"/>
-              <a:ea typeface="Arial"/>
-              <a:cs typeface="Arial"/>
-              <a:sym typeface="Arial"/>
-            </a:endParaRPr>
-          </a:p>
-        </p:txBody>
-      </p:sp>
-      <p:sp>
-        <p:nvSpPr>
-          <p:cNvPr id="134" name="Google Shape;134;p5"/>
-          <p:cNvSpPr/>
-          <p:nvPr/>
-        </p:nvSpPr>
-        <p:spPr>
-          <a:xfrm>
-            <a:off x="4530475" y="1476725"/>
-            <a:ext cx="4365000" cy="457200"/>
-          </a:xfrm>
-          <a:prstGeom prst="rect">
-            <a:avLst/>
-          </a:prstGeom>
-          <a:noFill/>
-          <a:ln>
-            <a:noFill/>
-          </a:ln>
-        </p:spPr>
-        <p:txBody>
-          <a:bodyPr anchorCtr="0" anchor="ctr" bIns="45700" lIns="91425" spcFirstLastPara="1" rIns="91425" wrap="square" tIns="45700">
-            <a:noAutofit/>
-          </a:bodyPr>
-          <a:lstStyle/>
-          <a:p>
-            <a:pPr indent="0" lvl="0" marL="0" marR="0" rtl="0" algn="l">
-              <a:lnSpc>
-                <a:spcPct val="120000"/>
-              </a:lnSpc>
-              <a:spcBef>
-                <a:spcPts val="0"/>
-              </a:spcBef>
-              <a:spcAft>
-                <a:spcPts val="0"/>
-              </a:spcAft>
-              <a:buClr>
-                <a:srgbClr val="0B1020"/>
-              </a:buClr>
-              <a:buSzPts val="1200"/>
-              <a:buFont typeface="Malgun Gothic"/>
-              <a:buNone/>
-            </a:pPr>
-            <a:r>
-              <a:rPr b="1" i="0" lang="en-US" sz="1200" u="none" cap="none" strike="noStrike">
-                <a:solidFill>
-                  <a:srgbClr val="0B1020"/>
                 </a:solidFill>
                 <a:latin typeface="Arial"/>
                 <a:ea typeface="Arial"/>
                 <a:cs typeface="Arial"/>
                 <a:sym typeface="Arial"/>
               </a:rPr>
-              <a:t>어느 매장에서 사용하더라도 동일한 화면</a:t>
-            </a:r>
-            <a:endParaRPr b="1" i="0" sz="1200" u="none" cap="none" strike="noStrike">
-              <a:solidFill>
-                <a:srgbClr val="0B1020"/>
-              </a:solidFill>
-              <a:latin typeface="Arial"/>
-              <a:ea typeface="Arial"/>
-              <a:cs typeface="Arial"/>
-              <a:sym typeface="Arial"/>
-            </a:endParaRPr>
-          </a:p>
+              <a:t>지점장이 일일이 확인할 수 없던 정보 편차가 사라집니다</a:t>
+            </a:r>
+            <a:endParaRPr b="0" i="0" sz="1250" u="none" cap="none" strike="noStrike">
+              <a:solidFill>
+                <a:srgbClr val="5B6478"/>
+              </a:solidFill>
+              <a:latin typeface="Arial"/>
+              <a:ea typeface="Arial"/>
+              <a:cs typeface="Arial"/>
+              <a:sym typeface="Arial"/>
+            </a:endParaRPr>
+          </a:p>
+        </p:txBody>
+      </p:sp>
+      <p:sp>
+        <p:nvSpPr>
+          <p:cNvPr id="134" name="Google Shape;134;p5"/>
+          <p:cNvSpPr/>
+          <p:nvPr/>
+        </p:nvSpPr>
+        <p:spPr>
+          <a:xfrm>
+            <a:off x="4530475" y="1588540"/>
+            <a:ext cx="4365000" cy="457200"/>
+          </a:xfrm>
+          <a:prstGeom prst="rect">
+            <a:avLst/>
+          </a:prstGeom>
+          <a:noFill/>
+          <a:ln>
+            <a:noFill/>
+          </a:ln>
+        </p:spPr>
+        <p:txBody>
+          <a:bodyPr anchorCtr="0" anchor="ctr" bIns="45700" lIns="91425" spcFirstLastPara="1" rIns="91425" wrap="square" tIns="45700">
+            <a:noAutofit/>
+          </a:bodyPr>
+          <a:lstStyle/>
           <a:p>
             <a:pPr indent="0" lvl="0" marL="0" marR="0" rtl="0" algn="l">
               <a:lnSpc>
@@ -11231,7 +11433,7 @@
               <a:buNone/>
             </a:pPr>
             <a:r>
-              <a:rPr b="0" i="0" lang="en-US" sz="1200" u="none" cap="none" strike="noStrike">
+              <a:rPr b="1" i="0" lang="en-US" sz="1200" u="none" cap="none" strike="noStrike">
                 <a:solidFill>
                   <a:srgbClr val="0B1020"/>
                 </a:solidFill>
@@ -11240,16 +11442,36 @@
                 <a:cs typeface="Arial"/>
                 <a:sym typeface="Arial"/>
               </a:rPr>
-              <a:t>(</a:t>
-            </a:r>
-            <a:r>
-              <a:rPr lang="en-US" sz="1200">
-                <a:solidFill>
-                  <a:srgbClr val="0B1020"/>
-                </a:solidFill>
-              </a:rPr>
-              <a:t>제품 상세검색</a:t>
-            </a:r>
+              <a:t>어느 매장에서 사용하더라도 동일한 화면</a:t>
+            </a:r>
+            <a:endParaRPr b="1" i="0" sz="1200" u="none" cap="none" strike="noStrike">
+              <a:solidFill>
+                <a:srgbClr val="0B1020"/>
+              </a:solidFill>
+              <a:latin typeface="Arial"/>
+              <a:ea typeface="Arial"/>
+              <a:cs typeface="Arial"/>
+              <a:sym typeface="Arial"/>
+            </a:endParaRPr>
+          </a:p>
+          <a:p>
+            <a:pPr indent="0" lvl="0" marL="0" marR="0" rtl="0" algn="l">
+              <a:lnSpc>
+                <a:spcPct val="120000"/>
+              </a:lnSpc>
+              <a:spcBef>
+                <a:spcPts val="0"/>
+              </a:spcBef>
+              <a:spcAft>
+                <a:spcPts val="0"/>
+              </a:spcAft>
+              <a:buClr>
+                <a:srgbClr val="0B1020"/>
+              </a:buClr>
+              <a:buSzPts val="1200"/>
+              <a:buFont typeface="Malgun Gothic"/>
+              <a:buNone/>
+            </a:pPr>
             <a:r>
               <a:rPr b="0" i="0" lang="en-US" sz="1200" u="none" cap="none" strike="noStrike">
                 <a:solidFill>
@@ -11260,27 +11482,7 @@
                 <a:cs typeface="Arial"/>
                 <a:sym typeface="Arial"/>
               </a:rPr>
-              <a:t> · 설치환경 · 타사비교 · AS · </a:t>
-            </a:r>
-            <a:r>
-              <a:rPr lang="en-US" sz="1200">
-                <a:solidFill>
-                  <a:srgbClr val="0B1020"/>
-                </a:solidFill>
-              </a:rPr>
-              <a:t>AI</a:t>
-            </a:r>
-            <a:r>
-              <a:rPr b="0" i="0" lang="en-US" sz="1200" u="none" cap="none" strike="noStrike">
-                <a:solidFill>
-                  <a:srgbClr val="0B1020"/>
-                </a:solidFill>
-                <a:latin typeface="Arial"/>
-                <a:ea typeface="Arial"/>
-                <a:cs typeface="Arial"/>
-                <a:sym typeface="Arial"/>
-              </a:rPr>
-              <a:t>구독 케어)</a:t>
+              <a:t>(제품 상세검색 · 설치환경 · 타사비교 · AS · AI구독 케어)</a:t>
             </a:r>
             <a:endParaRPr b="0" i="0" sz="1200" u="none" cap="none" strike="noStrike">
               <a:solidFill>
@@ -11302,7 +11504,7 @@
         </p:nvSpPr>
         <p:spPr>
           <a:xfrm>
-            <a:off x="4530475" y="2052800"/>
+            <a:off x="4530475" y="2164615"/>
             <a:ext cx="4365000" cy="1051500"/>
           </a:xfrm>
           <a:prstGeom prst="rect">
@@ -11367,7 +11569,7 @@
         </p:nvSpPr>
         <p:spPr>
           <a:xfrm>
-            <a:off x="4673328" y="2052800"/>
+            <a:off x="4673328" y="2164615"/>
             <a:ext cx="4127100" cy="1051500"/>
           </a:xfrm>
           <a:prstGeom prst="rect">
@@ -11442,6 +11644,14 @@
               <a:buNone/>
             </a:pPr>
             <a:r>
+              <a:rPr lang="en-US" sz="1150">
+                <a:solidFill>
+                  <a:srgbClr val="5B6478"/>
+                </a:solidFill>
+              </a:rPr>
+              <a:t>  </a:t>
+            </a:r>
+            <a:r>
               <a:rPr b="0" i="0" lang="en-US" sz="1150" u="none" cap="none" strike="noStrike">
                 <a:solidFill>
                   <a:srgbClr val="5B6478"/>
@@ -11473,7 +11683,7 @@
         </p:nvSpPr>
         <p:spPr>
           <a:xfrm>
-            <a:off x="4530475" y="3287245"/>
+            <a:off x="4530475" y="3382288"/>
             <a:ext cx="4365000" cy="402300"/>
           </a:xfrm>
           <a:prstGeom prst="rect">
@@ -11538,8 +11748,8 @@
         </p:nvSpPr>
         <p:spPr>
           <a:xfrm>
-            <a:off x="4641575" y="3287250"/>
-            <a:ext cx="563400" cy="402300"/>
+            <a:off x="4530475" y="3382293"/>
+            <a:ext cx="674400" cy="402300"/>
           </a:xfrm>
           <a:prstGeom prst="rect">
             <a:avLst/>
@@ -11555,7 +11765,7 @@
           </a:bodyPr>
           <a:lstStyle/>
           <a:p>
-            <a:pPr indent="0" lvl="0" marL="0" marR="0" rtl="0" algn="l">
+            <a:pPr indent="0" lvl="0" marL="0" marR="0" rtl="0" algn="ctr">
               <a:lnSpc>
                 <a:spcPct val="120000"/>
               </a:lnSpc>
@@ -11573,7 +11783,7 @@
               <a:buNone/>
             </a:pPr>
             <a:r>
-              <a:rPr b="1" i="0" lang="en-US" sz="950" u="none" cap="none" strike="noStrike">
+              <a:rPr b="1" i="0" lang="en-US" sz="1150" u="none" cap="none" strike="noStrike">
                 <a:solidFill>
                   <a:srgbClr val="5B6478"/>
                 </a:solidFill>
@@ -11584,7 +11794,7 @@
               </a:rPr>
               <a:t>매니저</a:t>
             </a:r>
-            <a:endParaRPr b="1" i="0" sz="950" u="none" cap="none" strike="noStrike">
+            <a:endParaRPr b="1" i="0" sz="1150" u="none" cap="none" strike="noStrike">
               <a:solidFill>
                 <a:srgbClr val="5B6478"/>
               </a:solidFill>
@@ -11604,7 +11814,7 @@
         </p:nvSpPr>
         <p:spPr>
           <a:xfrm>
-            <a:off x="5205058" y="3287245"/>
+            <a:off x="5205058" y="3382288"/>
             <a:ext cx="3571200" cy="402300"/>
           </a:xfrm>
           <a:prstGeom prst="rect">
@@ -11639,25 +11849,17 @@
               <a:buNone/>
             </a:pPr>
             <a:r>
-              <a:rPr b="0" i="0" lang="en-US" sz="900" u="none" cap="none" strike="noStrike">
+              <a:rPr b="1" i="0" lang="en-US" sz="1150" u="none" cap="none" strike="noStrike">
                 <a:solidFill>
                   <a:srgbClr val="0B1020"/>
                 </a:solidFill>
-                <a:latin typeface="Arial"/>
-                <a:ea typeface="Arial"/>
-                <a:cs typeface="Arial"/>
-                <a:sym typeface="Arial"/>
               </a:rPr>
               <a:t>외워서 답하지 않고, 같은 화면을 보고 응대합니다</a:t>
             </a:r>
-            <a:endParaRPr b="0" i="0" sz="900" u="none" cap="none" strike="noStrike">
+            <a:endParaRPr b="1" i="0" sz="1150" u="none" cap="none" strike="noStrike">
               <a:solidFill>
                 <a:srgbClr val="0B1020"/>
               </a:solidFill>
-              <a:latin typeface="Arial"/>
-              <a:ea typeface="Arial"/>
-              <a:cs typeface="Arial"/>
-              <a:sym typeface="Arial"/>
             </a:endParaRPr>
           </a:p>
         </p:txBody>
@@ -11670,7 +11872,7 @@
         </p:nvSpPr>
         <p:spPr>
           <a:xfrm>
-            <a:off x="4530475" y="3744448"/>
+            <a:off x="4530475" y="3856263"/>
             <a:ext cx="4365000" cy="512100"/>
           </a:xfrm>
           <a:prstGeom prst="rect">
@@ -11735,8 +11937,8 @@
         </p:nvSpPr>
         <p:spPr>
           <a:xfrm>
-            <a:off x="4641583" y="3744448"/>
-            <a:ext cx="515700" cy="512100"/>
+            <a:off x="4530475" y="3856265"/>
+            <a:ext cx="674400" cy="512100"/>
           </a:xfrm>
           <a:prstGeom prst="rect">
             <a:avLst/>
@@ -11752,7 +11954,7 @@
           </a:bodyPr>
           <a:lstStyle/>
           <a:p>
-            <a:pPr indent="0" lvl="0" marL="0" marR="0" rtl="0" algn="l">
+            <a:pPr indent="0" lvl="0" marL="0" marR="0" rtl="0" algn="ctr">
               <a:lnSpc>
                 <a:spcPct val="120000"/>
               </a:lnSpc>
@@ -11770,7 +11972,7 @@
               <a:buNone/>
             </a:pPr>
             <a:r>
-              <a:rPr b="1" i="0" lang="en-US" sz="950" u="none" cap="none" strike="noStrike">
+              <a:rPr b="1" i="0" lang="en-US" sz="1150" u="none" cap="none" strike="noStrike">
                 <a:solidFill>
                   <a:srgbClr val="FFFFFF"/>
                 </a:solidFill>
@@ -11781,7 +11983,7 @@
               </a:rPr>
               <a:t>지점</a:t>
             </a:r>
-            <a:endParaRPr b="1" i="0" sz="950" u="none" cap="none" strike="noStrike">
+            <a:endParaRPr b="1" i="0" sz="1150" u="none" cap="none" strike="noStrike">
               <a:solidFill>
                 <a:srgbClr val="FFFFFF"/>
               </a:solidFill>
@@ -11801,7 +12003,7 @@
         </p:nvSpPr>
         <p:spPr>
           <a:xfrm>
-            <a:off x="5205058" y="3744448"/>
+            <a:off x="5205058" y="3856263"/>
             <a:ext cx="3571200" cy="512100"/>
           </a:xfrm>
           <a:prstGeom prst="rect">
@@ -11836,7 +12038,7 @@
               <a:buNone/>
             </a:pPr>
             <a:r>
-              <a:rPr b="1" i="0" lang="en-US" sz="1200" u="none" cap="none" strike="noStrike">
+              <a:rPr b="1" i="0" lang="en-US" sz="1150" u="none" cap="none" strike="noStrike">
                 <a:solidFill>
                   <a:srgbClr val="FFFFFF"/>
                 </a:solidFill>
@@ -11845,49 +12047,9 @@
                 <a:cs typeface="Arial"/>
                 <a:sym typeface="Arial"/>
               </a:rPr>
-              <a:t>신입사원</a:t>
-            </a:r>
-            <a:r>
-              <a:rPr b="1" lang="en-US" sz="1200">
-                <a:solidFill>
-                  <a:srgbClr val="FFFFFF"/>
-                </a:solidFill>
-              </a:rPr>
-              <a:t>도</a:t>
-            </a:r>
-            <a:r>
-              <a:rPr b="1" i="0" lang="en-US" sz="1200" u="none" cap="none" strike="noStrike">
-                <a:solidFill>
-                  <a:srgbClr val="FFFFFF"/>
-                </a:solidFill>
-                <a:latin typeface="Arial"/>
-                <a:ea typeface="Arial"/>
-                <a:cs typeface="Arial"/>
-                <a:sym typeface="Arial"/>
-              </a:rPr>
-              <a:t> 첫날부터 </a:t>
-            </a:r>
-            <a:r>
-              <a:rPr b="1" lang="en-US" sz="1200">
-                <a:solidFill>
-                  <a:srgbClr val="FFFFFF"/>
-                </a:solidFill>
-              </a:rPr>
-              <a:t>동일한</a:t>
-            </a:r>
-            <a:r>
-              <a:rPr b="1" i="0" lang="en-US" sz="1200" u="none" cap="none" strike="noStrike">
-                <a:solidFill>
-                  <a:srgbClr val="FFFFFF"/>
-                </a:solidFill>
-                <a:latin typeface="Arial"/>
-                <a:ea typeface="Arial"/>
-                <a:cs typeface="Arial"/>
-                <a:sym typeface="Arial"/>
-              </a:rPr>
-              <a:t> 수준으로 응대</a:t>
-            </a:r>
-            <a:endParaRPr b="1" i="0" sz="1200" u="none" cap="none" strike="noStrike">
+              <a:t>신입 사원도 첫날부터 동일한 수준으로 응대</a:t>
+            </a:r>
+            <a:endParaRPr b="1" i="0" sz="1150" u="none" cap="none" strike="noStrike">
               <a:solidFill>
                 <a:srgbClr val="FFFFFF"/>
               </a:solidFill>
@@ -11914,8 +12076,8 @@
         </p:blipFill>
         <p:spPr>
           <a:xfrm>
-            <a:off x="483739" y="1788749"/>
-            <a:ext cx="3876000" cy="2422500"/>
+            <a:off x="483750" y="1640640"/>
+            <a:ext cx="3876000" cy="2727725"/>
           </a:xfrm>
           <a:prstGeom prst="rect">
             <a:avLst/>
@@ -12734,7 +12896,15 @@
               </a:rPr>
               <a:t>구매할 가전을 고르면 도면에 맞춰 배치를 추천 </a:t>
             </a:r>
-            <a:endParaRPr/>
+            <a:endParaRPr b="0" i="0" sz="1400" u="none" cap="none" strike="noStrike">
+              <a:solidFill>
+                <a:srgbClr val="000000"/>
+              </a:solidFill>
+              <a:latin typeface="Arial"/>
+              <a:ea typeface="Arial"/>
+              <a:cs typeface="Arial"/>
+              <a:sym typeface="Arial"/>
+            </a:endParaRPr>
           </a:p>
           <a:p>
             <a:pPr indent="0" lvl="0" marL="0" marR="0" rtl="0" algn="l">
@@ -12754,6 +12924,14 @@
               <a:buFont typeface="Malgun Gothic"/>
               <a:buNone/>
             </a:pPr>
+            <a:r>
+              <a:rPr lang="en-US" sz="1100">
+                <a:solidFill>
+                  <a:srgbClr val="0B1020"/>
+                </a:solidFill>
+              </a:rPr>
+              <a:t>-</a:t>
+            </a:r>
             <a:r>
               <a:rPr b="0" i="0" lang="en-US" sz="1100" u="none" cap="none" strike="noStrike">
                 <a:solidFill>
@@ -12764,7 +12942,7 @@
                 <a:cs typeface="Arial"/>
                 <a:sym typeface="Arial"/>
               </a:rPr>
-              <a:t>— 이격 거리·간섭·방 이탈까지 판정</a:t>
+              <a:t> 이격 거리·간섭·방 이탈까지 판정</a:t>
             </a:r>
             <a:endParaRPr b="0" i="0" sz="1100" u="none" cap="none" strike="noStrike">
               <a:solidFill>
@@ -12786,8 +12964,8 @@
         </p:nvSpPr>
         <p:spPr>
           <a:xfrm>
-            <a:off x="713232" y="2560000"/>
-            <a:ext cx="3475888" cy="500000"/>
+            <a:off x="713282" y="2509988"/>
+            <a:ext cx="3475800" cy="500100"/>
           </a:xfrm>
           <a:prstGeom prst="rect">
             <a:avLst/>
@@ -12830,16 +13008,32 @@
                 <a:cs typeface="Arial"/>
                 <a:sym typeface="Arial"/>
               </a:rPr>
-              <a:t>카탈로그 실측 7</a:t>
-            </a:r>
-            <a:r>
-              <a:rPr lang="en-US" sz="1050">
-                <a:solidFill>
-                  <a:srgbClr val="5B6478"/>
-                </a:solidFill>
-              </a:rPr>
-              <a:t>1</a:t>
-            </a:r>
+              <a:t>카탈로그 실측 71개 사이즈</a:t>
+            </a:r>
+            <a:endParaRPr sz="1050">
+              <a:solidFill>
+                <a:srgbClr val="5B6478"/>
+              </a:solidFill>
+            </a:endParaRPr>
+          </a:p>
+          <a:p>
+            <a:pPr indent="0" lvl="0" marL="0" marR="0" rtl="0" algn="l">
+              <a:lnSpc>
+                <a:spcPct val="120000"/>
+              </a:lnSpc>
+              <a:spcBef>
+                <a:spcPts val="0"/>
+              </a:spcBef>
+              <a:spcAft>
+                <a:spcPts val="0"/>
+              </a:spcAft>
+              <a:buClr>
+                <a:srgbClr val="5B6478"/>
+              </a:buClr>
+              <a:buSzPts val="1050"/>
+              <a:buFont typeface="Malgun Gothic"/>
+              <a:buNone/>
+            </a:pPr>
             <a:r>
               <a:rPr b="0" i="0" lang="en-US" sz="1050" u="none" cap="none" strike="noStrike">
                 <a:solidFill>
@@ -12850,16 +13044,32 @@
                 <a:cs typeface="Arial"/>
                 <a:sym typeface="Arial"/>
               </a:rPr>
-              <a:t>개 사이즈 · 아파트 도면 15</a:t>
-            </a:r>
-            <a:r>
-              <a:rPr lang="en-US" sz="1050">
-                <a:solidFill>
-                  <a:srgbClr val="5B6478"/>
-                </a:solidFill>
-              </a:rPr>
-              <a:t>8</a:t>
-            </a:r>
+              <a:t>아파트 도면 158개 단지 855장</a:t>
+            </a:r>
+            <a:endParaRPr sz="1050">
+              <a:solidFill>
+                <a:srgbClr val="5B6478"/>
+              </a:solidFill>
+            </a:endParaRPr>
+          </a:p>
+          <a:p>
+            <a:pPr indent="0" lvl="0" marL="0" marR="0" rtl="0" algn="l">
+              <a:lnSpc>
+                <a:spcPct val="120000"/>
+              </a:lnSpc>
+              <a:spcBef>
+                <a:spcPts val="0"/>
+              </a:spcBef>
+              <a:spcAft>
+                <a:spcPts val="0"/>
+              </a:spcAft>
+              <a:buClr>
+                <a:srgbClr val="5B6478"/>
+              </a:buClr>
+              <a:buSzPts val="1050"/>
+              <a:buFont typeface="Malgun Gothic"/>
+              <a:buNone/>
+            </a:pPr>
             <a:r>
               <a:rPr b="0" i="0" lang="en-US" sz="1050" u="none" cap="none" strike="noStrike">
                 <a:solidFill>
@@ -12870,27 +13080,7 @@
                 <a:cs typeface="Arial"/>
                 <a:sym typeface="Arial"/>
               </a:rPr>
-              <a:t>개 단지 </a:t>
-            </a:r>
-            <a:r>
-              <a:rPr lang="en-US" sz="1050">
-                <a:solidFill>
-                  <a:srgbClr val="5B6478"/>
-                </a:solidFill>
-              </a:rPr>
-              <a:t>855</a:t>
-            </a:r>
-            <a:r>
-              <a:rPr b="0" i="0" lang="en-US" sz="1050" u="none" cap="none" strike="noStrike">
-                <a:solidFill>
-                  <a:srgbClr val="5B6478"/>
-                </a:solidFill>
-                <a:latin typeface="Arial"/>
-                <a:ea typeface="Arial"/>
-                <a:cs typeface="Arial"/>
-                <a:sym typeface="Arial"/>
-              </a:rPr>
-              <a:t>장 · 3D 보기</a:t>
+              <a:t>3D 보기</a:t>
             </a:r>
             <a:endParaRPr b="0" i="0" sz="1050" u="none" cap="none" strike="noStrike">
               <a:solidFill>
@@ -13242,7 +13432,7 @@
         <p:spPr>
           <a:xfrm>
             <a:off x="5010912" y="1890000"/>
-            <a:ext cx="3475888" cy="620000"/>
+            <a:ext cx="3475800" cy="620100"/>
           </a:xfrm>
           <a:prstGeom prst="rect">
             <a:avLst/>
@@ -13285,7 +13475,51 @@
                 <a:cs typeface="Arial"/>
                 <a:sym typeface="Arial"/>
               </a:rPr>
-              <a:t>3사 요금제 349건 · 부가서비스 542건 · 결합 27건 · 단말 출고가 · 제휴카드 40장</a:t>
+              <a:t>3사 요금제 349건 · 부가서비스 542건 · 결합 27건</a:t>
+            </a:r>
+            <a:endParaRPr sz="1100">
+              <a:solidFill>
+                <a:srgbClr val="0B1020"/>
+              </a:solidFill>
+            </a:endParaRPr>
+          </a:p>
+          <a:p>
+            <a:pPr indent="0" lvl="0" marL="0" marR="0" rtl="0" algn="l">
+              <a:lnSpc>
+                <a:spcPct val="120000"/>
+              </a:lnSpc>
+              <a:spcBef>
+                <a:spcPts val="0"/>
+              </a:spcBef>
+              <a:spcAft>
+                <a:spcPts val="0"/>
+              </a:spcAft>
+              <a:buClr>
+                <a:srgbClr val="0B1020"/>
+              </a:buClr>
+              <a:buSzPts val="1100"/>
+              <a:buFont typeface="Malgun Gothic"/>
+              <a:buNone/>
+            </a:pPr>
+            <a:r>
+              <a:rPr lang="en-US" sz="1100">
+                <a:solidFill>
+                  <a:srgbClr val="0B1020"/>
+                </a:solidFill>
+              </a:rPr>
+              <a:t> · </a:t>
+            </a:r>
+            <a:r>
+              <a:rPr b="0" i="0" lang="en-US" sz="1100" u="none" cap="none" strike="noStrike">
+                <a:solidFill>
+                  <a:srgbClr val="0B1020"/>
+                </a:solidFill>
+                <a:latin typeface="Arial"/>
+                <a:ea typeface="Arial"/>
+                <a:cs typeface="Arial"/>
+                <a:sym typeface="Arial"/>
+              </a:rPr>
+              <a:t>단말 출고가 · 제휴카드 40장</a:t>
             </a:r>
             <a:endParaRPr b="0" i="0" sz="1100" u="none" cap="none" strike="noStrike">
               <a:solidFill>
@@ -13307,8 +13541,8 @@
         </p:nvSpPr>
         <p:spPr>
           <a:xfrm>
-            <a:off x="5010912" y="2560000"/>
-            <a:ext cx="3475888" cy="500000"/>
+            <a:off x="5010862" y="2510000"/>
+            <a:ext cx="3475800" cy="500100"/>
           </a:xfrm>
           <a:prstGeom prst="rect">
             <a:avLst/>
@@ -13613,62 +13847,16 @@
                 <a:cs typeface="Arial"/>
                 <a:sym typeface="Arial"/>
               </a:rPr>
-              <a:t>아파트 도면 확대 — 도면 추가 확보 시 배치 적중률 향상 예정 (단지 목록 3,829곳 적용 완료)</a:t>
-            </a:r>
-            <a:endParaRPr b="0" i="0" sz="1100" u="none" cap="none" strike="noStrike">
-              <a:solidFill>
-                <a:srgbClr val="0B1020"/>
-              </a:solidFill>
-              <a:latin typeface="Arial"/>
-              <a:ea typeface="Arial"/>
-              <a:cs typeface="Arial"/>
-              <a:sym typeface="Arial"/>
-            </a:endParaRPr>
-          </a:p>
-        </p:txBody>
-      </p:sp>
-      <p:sp>
-        <p:nvSpPr>
-          <p:cNvPr id="172" name="Google Shape;172;p2"/>
-          <p:cNvSpPr/>
-          <p:nvPr/>
-        </p:nvSpPr>
-        <p:spPr>
-          <a:xfrm>
-            <a:off x="713232" y="4220000"/>
-            <a:ext cx="7865008" cy="320000"/>
-          </a:xfrm>
-          <a:prstGeom prst="rect">
-            <a:avLst/>
-          </a:prstGeom>
-          <a:noFill/>
-          <a:ln>
-            <a:noFill/>
-          </a:ln>
-        </p:spPr>
-        <p:txBody>
-          <a:bodyPr anchorCtr="0" anchor="t" bIns="45700" lIns="91425" spcFirstLastPara="1" rIns="91425" wrap="square" tIns="45700">
-            <a:noAutofit/>
-          </a:bodyPr>
-          <a:lstStyle/>
-          <a:p>
-            <a:pPr indent="0" lvl="0" marL="0" marR="0" rtl="0" algn="l">
-              <a:lnSpc>
-                <a:spcPct val="120000"/>
-              </a:lnSpc>
-              <a:spcBef>
-                <a:spcPts val="0"/>
-              </a:spcBef>
-              <a:spcAft>
-                <a:spcPts val="0"/>
-              </a:spcAft>
-              <a:buClr>
-                <a:srgbClr val="0B1020"/>
-              </a:buClr>
-              <a:buSzPts val="1100"/>
-              <a:buFont typeface="Malgun Gothic"/>
-              <a:buNone/>
-            </a:pPr>
+              <a:t>아파트 도면 확대 </a:t>
+            </a:r>
+            <a:r>
+              <a:rPr lang="en-US" sz="1100">
+                <a:solidFill>
+                  <a:srgbClr val="0B1020"/>
+                </a:solidFill>
+              </a:rPr>
+              <a:t>: </a:t>
+            </a:r>
             <a:r>
               <a:rPr b="0" i="0" lang="en-US" sz="1100" u="none" cap="none" strike="noStrike">
                 <a:solidFill>
@@ -13679,7 +13867,93 @@
                 <a:cs typeface="Arial"/>
                 <a:sym typeface="Arial"/>
               </a:rPr>
-              <a:t>도면 3D 완성 후 배치 시뮬레이터 개선 — 우리 집에 설치된 모습을 직접 보여드리면 성공률이 올라갑니다</a:t>
+              <a:t>도면 추가 확보 시 배치 적중률 향상 예정 (단지 목록 3,829곳 적용 완료)</a:t>
+            </a:r>
+            <a:endParaRPr b="0" i="0" sz="1100" u="none" cap="none" strike="noStrike">
+              <a:solidFill>
+                <a:srgbClr val="0B1020"/>
+              </a:solidFill>
+              <a:latin typeface="Arial"/>
+              <a:ea typeface="Arial"/>
+              <a:cs typeface="Arial"/>
+              <a:sym typeface="Arial"/>
+            </a:endParaRPr>
+          </a:p>
+        </p:txBody>
+      </p:sp>
+      <p:sp>
+        <p:nvSpPr>
+          <p:cNvPr id="172" name="Google Shape;172;p2"/>
+          <p:cNvSpPr/>
+          <p:nvPr/>
+        </p:nvSpPr>
+        <p:spPr>
+          <a:xfrm>
+            <a:off x="713232" y="4173241"/>
+            <a:ext cx="7865100" cy="320100"/>
+          </a:xfrm>
+          <a:prstGeom prst="rect">
+            <a:avLst/>
+          </a:prstGeom>
+          <a:noFill/>
+          <a:ln>
+            <a:noFill/>
+          </a:ln>
+        </p:spPr>
+        <p:txBody>
+          <a:bodyPr anchorCtr="0" anchor="t" bIns="45700" lIns="91425" spcFirstLastPara="1" rIns="91425" wrap="square" tIns="45700">
+            <a:noAutofit/>
+          </a:bodyPr>
+          <a:lstStyle/>
+          <a:p>
+            <a:pPr indent="0" lvl="0" marL="0" marR="0" rtl="0" algn="l">
+              <a:lnSpc>
+                <a:spcPct val="120000"/>
+              </a:lnSpc>
+              <a:spcBef>
+                <a:spcPts val="0"/>
+              </a:spcBef>
+              <a:spcAft>
+                <a:spcPts val="0"/>
+              </a:spcAft>
+              <a:buClr>
+                <a:srgbClr val="0B1020"/>
+              </a:buClr>
+              <a:buSzPts val="1100"/>
+              <a:buFont typeface="Malgun Gothic"/>
+              <a:buNone/>
+            </a:pPr>
+            <a:r>
+              <a:rPr b="0" i="0" lang="en-US" sz="1100" u="none" cap="none" strike="noStrike">
+                <a:solidFill>
+                  <a:srgbClr val="0B1020"/>
+                </a:solidFill>
+                <a:latin typeface="Arial"/>
+                <a:ea typeface="Arial"/>
+                <a:cs typeface="Arial"/>
+                <a:sym typeface="Arial"/>
+              </a:rPr>
+              <a:t>도면 3D 완성 후 배치 시뮬레이터 개선 </a:t>
+            </a:r>
+            <a:r>
+              <a:rPr lang="en-US" sz="1100">
+                <a:solidFill>
+                  <a:srgbClr val="0B1020"/>
+                </a:solidFill>
+              </a:rPr>
+              <a:t>:</a:t>
+            </a:r>
+            <a:r>
+              <a:rPr b="0" i="0" lang="en-US" sz="1100" u="none" cap="none" strike="noStrike">
+                <a:solidFill>
+                  <a:srgbClr val="0B1020"/>
+                </a:solidFill>
+                <a:latin typeface="Arial"/>
+                <a:ea typeface="Arial"/>
+                <a:cs typeface="Arial"/>
+                <a:sym typeface="Arial"/>
+              </a:rPr>
+              <a:t> 우리 집에 설치된 모습을 직접 보여드리면 성공률이 올라갑니다</a:t>
             </a:r>
             <a:endParaRPr b="0" i="0" sz="1100" u="none" cap="none" strike="noStrike">
               <a:solidFill>
@@ -14098,7 +14372,27 @@
                 <a:cs typeface="Arial"/>
                 <a:sym typeface="Arial"/>
               </a:rPr>
-              <a:t>2026-07-29 ~ 08-10 · 10개 매장 · 863건 (아래는 상위 9개) — 한 기능만 쓰인 것이 아닙니다</a:t>
+              <a:t>2026-07-29 ~ 08-10 · 10개 매장 · 863건 (아래는 상위 9개) </a:t>
+            </a:r>
+            <a:r>
+              <a:rPr lang="en-US" sz="1250">
+                <a:solidFill>
+                  <a:srgbClr val="5B6478"/>
+                </a:solidFill>
+              </a:rPr>
+              <a:t>:</a:t>
+            </a:r>
+            <a:r>
+              <a:rPr b="0" i="0" lang="en-US" sz="1250" u="none" cap="none" strike="noStrike">
+                <a:solidFill>
+                  <a:srgbClr val="5B6478"/>
+                </a:solidFill>
+                <a:latin typeface="Arial"/>
+                <a:ea typeface="Arial"/>
+                <a:cs typeface="Arial"/>
+                <a:sym typeface="Arial"/>
+              </a:rPr>
+              <a:t> 한 기능만 쓰인 것이 아닙니다</a:t>
             </a:r>
             <a:endParaRPr b="0" i="0" sz="1250" u="none" cap="none" strike="noStrike">
               <a:solidFill>
@@ -16792,7 +17086,15 @@
               </a:rPr>
               <a:t>상위 세 가지 모두 상담 중 고객 앞에서 바로 쓰는 기능입니다.</a:t>
             </a:r>
-            <a:endParaRPr/>
+            <a:endParaRPr b="0" i="0" sz="1400" u="none" cap="none" strike="noStrike">
+              <a:solidFill>
+                <a:srgbClr val="000000"/>
+              </a:solidFill>
+              <a:latin typeface="Arial"/>
+              <a:ea typeface="Arial"/>
+              <a:cs typeface="Arial"/>
+              <a:sym typeface="Arial"/>
+            </a:endParaRPr>
           </a:p>
           <a:p>
             <a:pPr indent="0" lvl="0" marL="0" marR="0" rtl="0" algn="l">
@@ -17378,7 +17680,27 @@
                 <a:cs typeface="Arial"/>
                 <a:sym typeface="Arial"/>
               </a:rPr>
-              <a:t>실측값과 가정값을 구분 — 가정값은 회사 기준으로 바꿔 넣으시면 그대로 답이 나옵니다</a:t>
+              <a:t>실측값과 가정값을 구분 </a:t>
+            </a:r>
+            <a:r>
+              <a:rPr lang="en-US" sz="1250">
+                <a:solidFill>
+                  <a:srgbClr val="5B6478"/>
+                </a:solidFill>
+              </a:rPr>
+              <a:t>:</a:t>
+            </a:r>
+            <a:r>
+              <a:rPr b="0" i="0" lang="en-US" sz="1250" u="none" cap="none" strike="noStrike">
+                <a:solidFill>
+                  <a:srgbClr val="5B6478"/>
+                </a:solidFill>
+                <a:latin typeface="Arial"/>
+                <a:ea typeface="Arial"/>
+                <a:cs typeface="Arial"/>
+                <a:sym typeface="Arial"/>
+              </a:rPr>
+              <a:t> 가정값은 회사 기준으로 바꿔 넣으시면 그대로 답이 나옵니다</a:t>
             </a:r>
             <a:endParaRPr b="0" i="0" sz="1250" u="none" cap="none" strike="noStrike">
               <a:solidFill>
@@ -18306,14 +18628,6 @@
               <a:t>65개 매장 월 약 </a:t>
             </a:r>
             <a:r>
-              <a:rPr b="1" lang="en-US" sz="1150">
-                <a:solidFill>
-                  <a:srgbClr val="FF0000"/>
-                </a:solidFill>
-              </a:rPr>
-              <a:t>647</a:t>
-            </a:r>
-            <a:r>
               <a:rPr b="1" i="0" lang="en-US" sz="1150" u="none" cap="none" strike="noStrike">
                 <a:solidFill>
                   <a:srgbClr val="FF0000"/>
@@ -18323,7 +18637,7 @@
                 <a:cs typeface="Arial"/>
                 <a:sym typeface="Arial"/>
               </a:rPr>
-              <a:t>시간</a:t>
+              <a:t>647시간</a:t>
             </a:r>
             <a:r>
               <a:rPr b="1" i="0" lang="en-US" sz="1150" u="none" cap="none" strike="noStrike">
@@ -18337,7 +18651,7 @@
               </a:rPr>
               <a:t> 확보</a:t>
             </a:r>
-            <a:endParaRPr b="0" i="0" sz="1150" u="none" cap="none" strike="noStrike">
+            <a:endParaRPr b="0" i="0" sz="750" u="none" cap="none" strike="noStrike">
               <a:solidFill>
                 <a:schemeClr val="dk1"/>
               </a:solidFill>
@@ -18401,27 +18715,7 @@
                 <a:cs typeface="Arial"/>
                 <a:sym typeface="Arial"/>
               </a:rPr>
-              <a:t>6.6건 × 3분 × </a:t>
-            </a:r>
-            <a:r>
-              <a:rPr lang="en-US" sz="850">
-                <a:solidFill>
-                  <a:srgbClr val="5B6478"/>
-                </a:solidFill>
-              </a:rPr>
-              <a:t>평균30</a:t>
-            </a:r>
-            <a:r>
-              <a:rPr b="0" i="0" lang="en-US" sz="850" u="none" cap="none" strike="noStrike">
-                <a:solidFill>
-                  <a:srgbClr val="5B6478"/>
-                </a:solidFill>
-                <a:latin typeface="Arial"/>
-                <a:ea typeface="Arial"/>
-                <a:cs typeface="Arial"/>
-                <a:sym typeface="Arial"/>
-              </a:rPr>
-              <a:t>영업일 × 65매장</a:t>
+              <a:t>6.6건 × 3분 × 평균30영업일 × 65매장</a:t>
             </a:r>
             <a:endParaRPr b="0" i="0" sz="850" u="none" cap="none" strike="noStrike">
               <a:solidFill>
@@ -18620,59 +18914,19 @@
                 <a:cs typeface="Arial"/>
                 <a:sym typeface="Arial"/>
               </a:rPr>
-              <a:t>연 약 </a:t>
-            </a:r>
-            <a:r>
-              <a:rPr b="1" lang="en-US" sz="1150">
-                <a:solidFill>
-                  <a:srgbClr val="1428A0"/>
-                </a:solidFill>
-              </a:rPr>
-              <a:t>7,8</a:t>
+              <a:t>연 약 7,800시간 = 상담사 </a:t>
             </a:r>
             <a:r>
               <a:rPr b="1" i="0" lang="en-US" sz="1150" u="none" cap="none" strike="noStrike">
                 <a:solidFill>
-                  <a:srgbClr val="1428A0"/>
+                  <a:srgbClr val="FF0000"/>
                 </a:solidFill>
                 <a:latin typeface="Arial"/>
                 <a:ea typeface="Arial"/>
                 <a:cs typeface="Arial"/>
                 <a:sym typeface="Arial"/>
               </a:rPr>
-              <a:t>00시간 = 상담사 </a:t>
-            </a:r>
-            <a:r>
-              <a:rPr b="1" i="0" lang="en-US" sz="1150" u="none" cap="none" strike="noStrike">
-                <a:solidFill>
-                  <a:srgbClr val="FF0000"/>
-                </a:solidFill>
-                <a:latin typeface="Arial"/>
-                <a:ea typeface="Arial"/>
-                <a:cs typeface="Arial"/>
-                <a:sym typeface="Arial"/>
-              </a:rPr>
-              <a:t>3.</a:t>
-            </a:r>
-            <a:r>
-              <a:rPr b="1" lang="en-US" sz="1150">
-                <a:solidFill>
-                  <a:srgbClr val="FF0000"/>
-                </a:solidFill>
-              </a:rPr>
-              <a:t>7</a:t>
-            </a:r>
-            <a:r>
-              <a:rPr b="1" i="0" lang="en-US" sz="1150" u="none" cap="none" strike="noStrike">
-                <a:solidFill>
-                  <a:srgbClr val="FF0000"/>
-                </a:solidFill>
-                <a:latin typeface="Arial"/>
-                <a:ea typeface="Arial"/>
-                <a:cs typeface="Arial"/>
-                <a:sym typeface="Arial"/>
-              </a:rPr>
-              <a:t>명분 </a:t>
+              <a:t>3.7명분 </a:t>
             </a:r>
             <a:r>
               <a:rPr b="1" i="0" lang="en-US" sz="1150" u="none" cap="none" strike="noStrike">
@@ -19476,27 +19730,7 @@
                 <a:cs typeface="Arial"/>
                 <a:sym typeface="Arial"/>
               </a:rPr>
-              <a:t>기사 출동 + 일정 재조정 + 응대 (사내 기준 </a:t>
-            </a:r>
-            <a:r>
-              <a:rPr lang="en-US" sz="850">
-                <a:solidFill>
-                  <a:srgbClr val="5B6478"/>
-                </a:solidFill>
-              </a:rPr>
-              <a:t>적용</a:t>
-            </a:r>
-            <a:r>
-              <a:rPr b="0" i="0" lang="en-US" sz="850" u="none" cap="none" strike="noStrike">
-                <a:solidFill>
-                  <a:srgbClr val="5B6478"/>
-                </a:solidFill>
-                <a:latin typeface="Arial"/>
-                <a:ea typeface="Arial"/>
-                <a:cs typeface="Arial"/>
-                <a:sym typeface="Arial"/>
-              </a:rPr>
-              <a:t>)</a:t>
+              <a:t>기사 출동 + 일정 재조정 + 응대 (사내 기준 적용)</a:t>
             </a:r>
             <a:endParaRPr b="0" i="0" sz="850" u="none" cap="none" strike="noStrike">
               <a:solidFill>
@@ -20115,7 +20349,7 @@
         <p:spPr>
           <a:xfrm>
             <a:off x="365760" y="3566160"/>
-            <a:ext cx="2651760" cy="713232"/>
+            <a:ext cx="2651700" cy="713100"/>
           </a:xfrm>
           <a:prstGeom prst="rect">
             <a:avLst/>
@@ -20179,8 +20413,8 @@
         </p:nvSpPr>
         <p:spPr>
           <a:xfrm>
-            <a:off x="502920" y="3611880"/>
-            <a:ext cx="2377440" cy="219456"/>
+            <a:off x="502920" y="3639834"/>
+            <a:ext cx="2377500" cy="219600"/>
           </a:xfrm>
           <a:prstGeom prst="rect">
             <a:avLst/>
@@ -20245,8 +20479,8 @@
         </p:nvSpPr>
         <p:spPr>
           <a:xfrm>
-            <a:off x="502920" y="3813048"/>
-            <a:ext cx="1234440" cy="274320"/>
+            <a:off x="502920" y="3841002"/>
+            <a:ext cx="1234500" cy="274200"/>
           </a:xfrm>
           <a:prstGeom prst="rect">
             <a:avLst/>
@@ -20289,29 +20523,75 @@
                 <a:cs typeface="Arial"/>
                 <a:sym typeface="Arial"/>
               </a:rPr>
-              <a:t>월 </a:t>
-            </a:r>
-            <a:r>
-              <a:rPr b="1" lang="en-US" sz="1500">
-                <a:solidFill>
-                  <a:srgbClr val="0B1020"/>
-                </a:solidFill>
-              </a:rPr>
-              <a:t>432</a:t>
-            </a:r>
-            <a:r>
-              <a:rPr b="1" i="0" lang="en-US" sz="1500" u="none" cap="none" strike="noStrike">
-                <a:solidFill>
-                  <a:srgbClr val="0B1020"/>
+              <a:t>월 432시간</a:t>
+            </a:r>
+            <a:endParaRPr b="0" i="0" sz="1500" u="none" cap="none" strike="noStrike">
+              <a:solidFill>
+                <a:schemeClr val="dk1"/>
+              </a:solidFill>
+              <a:latin typeface="Arial"/>
+              <a:ea typeface="Arial"/>
+              <a:cs typeface="Arial"/>
+              <a:sym typeface="Arial"/>
+            </a:endParaRPr>
+          </a:p>
+        </p:txBody>
+      </p:sp>
+      <p:sp>
+        <p:nvSpPr>
+          <p:cNvPr id="279" name="Google Shape;279;p17"/>
+          <p:cNvSpPr/>
+          <p:nvPr/>
+        </p:nvSpPr>
+        <p:spPr>
+          <a:xfrm>
+            <a:off x="1737360" y="3868434"/>
+            <a:ext cx="1143000" cy="255900"/>
+          </a:xfrm>
+          <a:prstGeom prst="rect">
+            <a:avLst/>
+          </a:prstGeom>
+          <a:noFill/>
+          <a:ln>
+            <a:noFill/>
+          </a:ln>
+        </p:spPr>
+        <p:txBody>
+          <a:bodyPr anchorCtr="0" anchor="ctr" bIns="45700" lIns="91425" spcFirstLastPara="1" rIns="91425" wrap="square" tIns="45700">
+            <a:noAutofit/>
+          </a:bodyPr>
+          <a:lstStyle/>
+          <a:p>
+            <a:pPr indent="0" lvl="0" marL="0" marR="0" rtl="0" algn="l">
+              <a:lnSpc>
+                <a:spcPct val="100000"/>
+              </a:lnSpc>
+              <a:spcBef>
+                <a:spcPts val="0"/>
+              </a:spcBef>
+              <a:spcAft>
+                <a:spcPts val="0"/>
+              </a:spcAft>
+              <a:buClr>
+                <a:srgbClr val="5B6478"/>
+              </a:buClr>
+              <a:buSzPts val="1100"/>
+              <a:buFont typeface="Malgun Gothic"/>
+              <a:buNone/>
+            </a:pPr>
+            <a:r>
+              <a:rPr b="0" i="0" lang="en-US" sz="1100" u="none" cap="none" strike="noStrike">
+                <a:solidFill>
+                  <a:srgbClr val="5B6478"/>
                 </a:solidFill>
                 <a:latin typeface="Arial"/>
                 <a:ea typeface="Arial"/>
                 <a:cs typeface="Arial"/>
                 <a:sym typeface="Arial"/>
               </a:rPr>
-              <a:t>시간</a:t>
-            </a:r>
-            <a:endParaRPr b="0" i="0" sz="1500" u="none" cap="none" strike="noStrike">
+              <a:t>연 5,200시간</a:t>
+            </a:r>
+            <a:endParaRPr b="0" i="0" sz="1100" u="none" cap="none" strike="noStrike">
               <a:solidFill>
                 <a:schemeClr val="dk1"/>
               </a:solidFill>
@@ -20325,112 +20605,6 @@
       </p:sp>
       <p:sp>
         <p:nvSpPr>
-          <p:cNvPr id="279" name="Google Shape;279;p17"/>
-          <p:cNvSpPr/>
-          <p:nvPr/>
-        </p:nvSpPr>
-        <p:spPr>
-          <a:xfrm>
-            <a:off x="1737360" y="3840480"/>
-            <a:ext cx="1143000" cy="256032"/>
-          </a:xfrm>
-          <a:prstGeom prst="rect">
-            <a:avLst/>
-          </a:prstGeom>
-          <a:noFill/>
-          <a:ln>
-            <a:noFill/>
-          </a:ln>
-        </p:spPr>
-        <p:txBody>
-          <a:bodyPr anchorCtr="0" anchor="ctr" bIns="45700" lIns="91425" spcFirstLastPara="1" rIns="91425" wrap="square" tIns="45700">
-            <a:noAutofit/>
-          </a:bodyPr>
-          <a:lstStyle/>
-          <a:p>
-            <a:pPr indent="0" lvl="0" marL="0" marR="0" rtl="0" algn="l">
-              <a:lnSpc>
-                <a:spcPct val="100000"/>
-              </a:lnSpc>
-              <a:spcBef>
-                <a:spcPts val="0"/>
-              </a:spcBef>
-              <a:spcAft>
-                <a:spcPts val="0"/>
-              </a:spcAft>
-              <a:buClr>
-                <a:srgbClr val="5B6478"/>
-              </a:buClr>
-              <a:buSzPts val="1100"/>
-              <a:buFont typeface="Malgun Gothic"/>
-              <a:buNone/>
-            </a:pPr>
-            <a:r>
-              <a:rPr b="0" i="0" lang="en-US" sz="1100" u="none" cap="none" strike="noStrike">
-                <a:solidFill>
-                  <a:srgbClr val="5B6478"/>
-                </a:solidFill>
-                <a:latin typeface="Arial"/>
-                <a:ea typeface="Arial"/>
-                <a:cs typeface="Arial"/>
-                <a:sym typeface="Arial"/>
-              </a:rPr>
-              <a:t>연 </a:t>
-            </a:r>
-            <a:r>
-              <a:rPr lang="en-US" sz="1100">
-                <a:solidFill>
-                  <a:srgbClr val="5B6478"/>
-                </a:solidFill>
-              </a:rPr>
-              <a:t>5</a:t>
-            </a:r>
-            <a:r>
-              <a:rPr b="0" i="0" lang="en-US" sz="1100" u="none" cap="none" strike="noStrike">
-                <a:solidFill>
-                  <a:srgbClr val="5B6478"/>
-                </a:solidFill>
-                <a:latin typeface="Arial"/>
-                <a:ea typeface="Arial"/>
-                <a:cs typeface="Arial"/>
-                <a:sym typeface="Arial"/>
-              </a:rPr>
-              <a:t>,</a:t>
-            </a:r>
-            <a:r>
-              <a:rPr lang="en-US" sz="1100">
-                <a:solidFill>
-                  <a:srgbClr val="5B6478"/>
-                </a:solidFill>
-              </a:rPr>
-              <a:t>2</a:t>
-            </a:r>
-            <a:r>
-              <a:rPr b="0" i="0" lang="en-US" sz="1100" u="none" cap="none" strike="noStrike">
-                <a:solidFill>
-                  <a:srgbClr val="5B6478"/>
-                </a:solidFill>
-                <a:latin typeface="Arial"/>
-                <a:ea typeface="Arial"/>
-                <a:cs typeface="Arial"/>
-                <a:sym typeface="Arial"/>
-              </a:rPr>
-              <a:t>00시간</a:t>
-            </a:r>
-            <a:endParaRPr b="0" i="0" sz="1100" u="none" cap="none" strike="noStrike">
-              <a:solidFill>
-                <a:schemeClr val="dk1"/>
-              </a:solidFill>
-              <a:latin typeface="Arial"/>
-              <a:ea typeface="Arial"/>
-              <a:cs typeface="Arial"/>
-              <a:sym typeface="Arial"/>
-            </a:endParaRPr>
-          </a:p>
-        </p:txBody>
-      </p:sp>
-      <p:sp>
-        <p:nvSpPr>
           <p:cNvPr id="280" name="Google Shape;280;p17"/>
           <p:cNvSpPr/>
           <p:nvPr/>
@@ -20438,7 +20612,7 @@
         <p:spPr>
           <a:xfrm>
             <a:off x="3200400" y="3566160"/>
-            <a:ext cx="2651760" cy="713232"/>
+            <a:ext cx="2651700" cy="713100"/>
           </a:xfrm>
           <a:prstGeom prst="rect">
             <a:avLst/>
@@ -20502,8 +20676,8 @@
         </p:nvSpPr>
         <p:spPr>
           <a:xfrm>
-            <a:off x="3337560" y="3611880"/>
-            <a:ext cx="2377440" cy="219456"/>
+            <a:off x="3337560" y="3639834"/>
+            <a:ext cx="2377500" cy="219600"/>
           </a:xfrm>
           <a:prstGeom prst="rect">
             <a:avLst/>
@@ -20568,8 +20742,8 @@
         </p:nvSpPr>
         <p:spPr>
           <a:xfrm>
-            <a:off x="3337560" y="3813048"/>
-            <a:ext cx="1234440" cy="274320"/>
+            <a:off x="3337560" y="3841002"/>
+            <a:ext cx="1234500" cy="274200"/>
           </a:xfrm>
           <a:prstGeom prst="rect">
             <a:avLst/>
@@ -20612,29 +20786,75 @@
                 <a:cs typeface="Arial"/>
                 <a:sym typeface="Arial"/>
               </a:rPr>
-              <a:t>월 </a:t>
-            </a:r>
-            <a:r>
-              <a:rPr b="1" lang="en-US" sz="1500">
-                <a:solidFill>
-                  <a:srgbClr val="FFFFFF"/>
-                </a:solidFill>
-              </a:rPr>
-              <a:t>647</a:t>
-            </a:r>
-            <a:r>
-              <a:rPr b="1" i="0" lang="en-US" sz="1500" u="none" cap="none" strike="noStrike">
-                <a:solidFill>
-                  <a:srgbClr val="FFFFFF"/>
+              <a:t>월 647시간</a:t>
+            </a:r>
+            <a:endParaRPr b="0" i="0" sz="1500" u="none" cap="none" strike="noStrike">
+              <a:solidFill>
+                <a:schemeClr val="dk1"/>
+              </a:solidFill>
+              <a:latin typeface="Arial"/>
+              <a:ea typeface="Arial"/>
+              <a:cs typeface="Arial"/>
+              <a:sym typeface="Arial"/>
+            </a:endParaRPr>
+          </a:p>
+        </p:txBody>
+      </p:sp>
+      <p:sp>
+        <p:nvSpPr>
+          <p:cNvPr id="283" name="Google Shape;283;p17"/>
+          <p:cNvSpPr/>
+          <p:nvPr/>
+        </p:nvSpPr>
+        <p:spPr>
+          <a:xfrm>
+            <a:off x="4572000" y="3868434"/>
+            <a:ext cx="1143000" cy="255900"/>
+          </a:xfrm>
+          <a:prstGeom prst="rect">
+            <a:avLst/>
+          </a:prstGeom>
+          <a:noFill/>
+          <a:ln>
+            <a:noFill/>
+          </a:ln>
+        </p:spPr>
+        <p:txBody>
+          <a:bodyPr anchorCtr="0" anchor="ctr" bIns="45700" lIns="91425" spcFirstLastPara="1" rIns="91425" wrap="square" tIns="45700">
+            <a:noAutofit/>
+          </a:bodyPr>
+          <a:lstStyle/>
+          <a:p>
+            <a:pPr indent="0" lvl="0" marL="0" marR="0" rtl="0" algn="l">
+              <a:lnSpc>
+                <a:spcPct val="100000"/>
+              </a:lnSpc>
+              <a:spcBef>
+                <a:spcPts val="0"/>
+              </a:spcBef>
+              <a:spcAft>
+                <a:spcPts val="0"/>
+              </a:spcAft>
+              <a:buClr>
+                <a:srgbClr val="C7E7E3"/>
+              </a:buClr>
+              <a:buSzPts val="1100"/>
+              <a:buFont typeface="Malgun Gothic"/>
+              <a:buNone/>
+            </a:pPr>
+            <a:r>
+              <a:rPr b="0" i="0" lang="en-US" sz="1100" u="none" cap="none" strike="noStrike">
+                <a:solidFill>
+                  <a:srgbClr val="C7E7E3"/>
                 </a:solidFill>
                 <a:latin typeface="Arial"/>
                 <a:ea typeface="Arial"/>
                 <a:cs typeface="Arial"/>
                 <a:sym typeface="Arial"/>
               </a:rPr>
-              <a:t>시간</a:t>
-            </a:r>
-            <a:endParaRPr b="0" i="0" sz="1500" u="none" cap="none" strike="noStrike">
+              <a:t>연 7,800시간</a:t>
+            </a:r>
+            <a:endParaRPr b="0" i="0" sz="1100" u="none" cap="none" strike="noStrike">
               <a:solidFill>
                 <a:schemeClr val="dk1"/>
               </a:solidFill>
@@ -20648,92 +20868,6 @@
       </p:sp>
       <p:sp>
         <p:nvSpPr>
-          <p:cNvPr id="283" name="Google Shape;283;p17"/>
-          <p:cNvSpPr/>
-          <p:nvPr/>
-        </p:nvSpPr>
-        <p:spPr>
-          <a:xfrm>
-            <a:off x="4572000" y="3840480"/>
-            <a:ext cx="1143000" cy="256032"/>
-          </a:xfrm>
-          <a:prstGeom prst="rect">
-            <a:avLst/>
-          </a:prstGeom>
-          <a:noFill/>
-          <a:ln>
-            <a:noFill/>
-          </a:ln>
-        </p:spPr>
-        <p:txBody>
-          <a:bodyPr anchorCtr="0" anchor="ctr" bIns="45700" lIns="91425" spcFirstLastPara="1" rIns="91425" wrap="square" tIns="45700">
-            <a:noAutofit/>
-          </a:bodyPr>
-          <a:lstStyle/>
-          <a:p>
-            <a:pPr indent="0" lvl="0" marL="0" marR="0" rtl="0" algn="l">
-              <a:lnSpc>
-                <a:spcPct val="100000"/>
-              </a:lnSpc>
-              <a:spcBef>
-                <a:spcPts val="0"/>
-              </a:spcBef>
-              <a:spcAft>
-                <a:spcPts val="0"/>
-              </a:spcAft>
-              <a:buClr>
-                <a:srgbClr val="C7E7E3"/>
-              </a:buClr>
-              <a:buSzPts val="1100"/>
-              <a:buFont typeface="Malgun Gothic"/>
-              <a:buNone/>
-            </a:pPr>
-            <a:r>
-              <a:rPr b="0" i="0" lang="en-US" sz="1100" u="none" cap="none" strike="noStrike">
-                <a:solidFill>
-                  <a:srgbClr val="C7E7E3"/>
-                </a:solidFill>
-                <a:latin typeface="Arial"/>
-                <a:ea typeface="Arial"/>
-                <a:cs typeface="Arial"/>
-                <a:sym typeface="Arial"/>
-              </a:rPr>
-              <a:t>연 </a:t>
-            </a:r>
-            <a:r>
-              <a:rPr lang="en-US" sz="1100">
-                <a:solidFill>
-                  <a:srgbClr val="C7E7E3"/>
-                </a:solidFill>
-              </a:rPr>
-              <a:t>7,8</a:t>
-            </a:r>
-            <a:r>
-              <a:rPr b="0" i="0" lang="en-US" sz="1100" u="none" cap="none" strike="noStrike">
-                <a:solidFill>
-                  <a:srgbClr val="C7E7E3"/>
-                </a:solidFill>
-                <a:latin typeface="Arial"/>
-                <a:ea typeface="Arial"/>
-                <a:cs typeface="Arial"/>
-                <a:sym typeface="Arial"/>
-              </a:rPr>
-              <a:t>00시간</a:t>
-            </a:r>
-            <a:endParaRPr b="0" i="0" sz="1100" u="none" cap="none" strike="noStrike">
-              <a:solidFill>
-                <a:schemeClr val="dk1"/>
-              </a:solidFill>
-              <a:latin typeface="Arial"/>
-              <a:ea typeface="Arial"/>
-              <a:cs typeface="Arial"/>
-              <a:sym typeface="Arial"/>
-            </a:endParaRPr>
-          </a:p>
-        </p:txBody>
-      </p:sp>
-      <p:sp>
-        <p:nvSpPr>
           <p:cNvPr id="284" name="Google Shape;284;p17"/>
           <p:cNvSpPr/>
           <p:nvPr/>
@@ -20741,7 +20875,7 @@
         <p:spPr>
           <a:xfrm>
             <a:off x="6035040" y="3566160"/>
-            <a:ext cx="2651760" cy="713232"/>
+            <a:ext cx="2651700" cy="713100"/>
           </a:xfrm>
           <a:prstGeom prst="rect">
             <a:avLst/>
@@ -20805,8 +20939,8 @@
         </p:nvSpPr>
         <p:spPr>
           <a:xfrm>
-            <a:off x="6172200" y="3611880"/>
-            <a:ext cx="2377440" cy="219456"/>
+            <a:off x="6113751" y="3639834"/>
+            <a:ext cx="2377500" cy="219600"/>
           </a:xfrm>
           <a:prstGeom prst="rect">
             <a:avLst/>
@@ -20871,7 +21005,7 @@
         </p:nvSpPr>
         <p:spPr>
           <a:xfrm>
-            <a:off x="6107126" y="3813050"/>
+            <a:off x="6107126" y="3841004"/>
             <a:ext cx="1299600" cy="274200"/>
           </a:xfrm>
           <a:prstGeom prst="rect">
@@ -20915,133 +21049,73 @@
                 <a:cs typeface="Arial"/>
                 <a:sym typeface="Arial"/>
               </a:rPr>
-              <a:t>월 </a:t>
-            </a:r>
-            <a:r>
-              <a:rPr b="1" lang="en-US" sz="1500">
-                <a:solidFill>
-                  <a:srgbClr val="0B1020"/>
-                </a:solidFill>
-              </a:rPr>
-              <a:t>1,079</a:t>
-            </a:r>
-            <a:r>
-              <a:rPr b="1" i="0" lang="en-US" sz="1500" u="none" cap="none" strike="noStrike">
-                <a:solidFill>
-                  <a:srgbClr val="0B1020"/>
+              <a:t>월 1,079시간</a:t>
+            </a:r>
+            <a:endParaRPr b="0" i="0" sz="1500" u="none" cap="none" strike="noStrike">
+              <a:solidFill>
+                <a:schemeClr val="dk1"/>
+              </a:solidFill>
+              <a:latin typeface="Arial"/>
+              <a:ea typeface="Arial"/>
+              <a:cs typeface="Arial"/>
+              <a:sym typeface="Arial"/>
+            </a:endParaRPr>
+          </a:p>
+        </p:txBody>
+      </p:sp>
+      <p:sp>
+        <p:nvSpPr>
+          <p:cNvPr id="287" name="Google Shape;287;p17"/>
+          <p:cNvSpPr/>
+          <p:nvPr/>
+        </p:nvSpPr>
+        <p:spPr>
+          <a:xfrm>
+            <a:off x="7406640" y="3868434"/>
+            <a:ext cx="1143000" cy="255900"/>
+          </a:xfrm>
+          <a:prstGeom prst="rect">
+            <a:avLst/>
+          </a:prstGeom>
+          <a:noFill/>
+          <a:ln>
+            <a:noFill/>
+          </a:ln>
+        </p:spPr>
+        <p:txBody>
+          <a:bodyPr anchorCtr="0" anchor="ctr" bIns="45700" lIns="91425" spcFirstLastPara="1" rIns="91425" wrap="square" tIns="45700">
+            <a:noAutofit/>
+          </a:bodyPr>
+          <a:lstStyle/>
+          <a:p>
+            <a:pPr indent="0" lvl="0" marL="0" marR="0" rtl="0" algn="l">
+              <a:lnSpc>
+                <a:spcPct val="100000"/>
+              </a:lnSpc>
+              <a:spcBef>
+                <a:spcPts val="0"/>
+              </a:spcBef>
+              <a:spcAft>
+                <a:spcPts val="0"/>
+              </a:spcAft>
+              <a:buClr>
+                <a:srgbClr val="5B6478"/>
+              </a:buClr>
+              <a:buSzPts val="1100"/>
+              <a:buFont typeface="Malgun Gothic"/>
+              <a:buNone/>
+            </a:pPr>
+            <a:r>
+              <a:rPr b="0" i="0" lang="en-US" sz="1100" u="none" cap="none" strike="noStrike">
+                <a:solidFill>
+                  <a:srgbClr val="5B6478"/>
                 </a:solidFill>
                 <a:latin typeface="Arial"/>
                 <a:ea typeface="Arial"/>
                 <a:cs typeface="Arial"/>
                 <a:sym typeface="Arial"/>
               </a:rPr>
-              <a:t>시간</a:t>
-            </a:r>
-            <a:endParaRPr b="0" i="0" sz="1500" u="none" cap="none" strike="noStrike">
-              <a:solidFill>
-                <a:schemeClr val="dk1"/>
-              </a:solidFill>
-              <a:latin typeface="Arial"/>
-              <a:ea typeface="Arial"/>
-              <a:cs typeface="Arial"/>
-              <a:sym typeface="Arial"/>
-            </a:endParaRPr>
-          </a:p>
-        </p:txBody>
-      </p:sp>
-      <p:sp>
-        <p:nvSpPr>
-          <p:cNvPr id="287" name="Google Shape;287;p17"/>
-          <p:cNvSpPr/>
-          <p:nvPr/>
-        </p:nvSpPr>
-        <p:spPr>
-          <a:xfrm>
-            <a:off x="7406640" y="3840480"/>
-            <a:ext cx="1143000" cy="256032"/>
-          </a:xfrm>
-          <a:prstGeom prst="rect">
-            <a:avLst/>
-          </a:prstGeom>
-          <a:noFill/>
-          <a:ln>
-            <a:noFill/>
-          </a:ln>
-        </p:spPr>
-        <p:txBody>
-          <a:bodyPr anchorCtr="0" anchor="ctr" bIns="45700" lIns="91425" spcFirstLastPara="1" rIns="91425" wrap="square" tIns="45700">
-            <a:noAutofit/>
-          </a:bodyPr>
-          <a:lstStyle/>
-          <a:p>
-            <a:pPr indent="0" lvl="0" marL="0" marR="0" rtl="0" algn="l">
-              <a:lnSpc>
-                <a:spcPct val="100000"/>
-              </a:lnSpc>
-              <a:spcBef>
-                <a:spcPts val="0"/>
-              </a:spcBef>
-              <a:spcAft>
-                <a:spcPts val="0"/>
-              </a:spcAft>
-              <a:buClr>
-                <a:srgbClr val="5B6478"/>
-              </a:buClr>
-              <a:buSzPts val="1100"/>
-              <a:buFont typeface="Malgun Gothic"/>
-              <a:buNone/>
-            </a:pPr>
-            <a:r>
-              <a:rPr b="0" i="0" lang="en-US" sz="1100" u="none" cap="none" strike="noStrike">
-                <a:solidFill>
-                  <a:srgbClr val="5B6478"/>
-                </a:solidFill>
-                <a:latin typeface="Arial"/>
-                <a:ea typeface="Arial"/>
-                <a:cs typeface="Arial"/>
-                <a:sym typeface="Arial"/>
-              </a:rPr>
-              <a:t>연 1</a:t>
-            </a:r>
-            <a:r>
-              <a:rPr lang="en-US" sz="1100">
-                <a:solidFill>
-                  <a:srgbClr val="5B6478"/>
-                </a:solidFill>
-              </a:rPr>
-              <a:t>2</a:t>
-            </a:r>
-            <a:r>
-              <a:rPr b="0" i="0" lang="en-US" sz="1100" u="none" cap="none" strike="noStrike">
-                <a:solidFill>
-                  <a:srgbClr val="5B6478"/>
-                </a:solidFill>
-                <a:latin typeface="Arial"/>
-                <a:ea typeface="Arial"/>
-                <a:cs typeface="Arial"/>
-                <a:sym typeface="Arial"/>
-              </a:rPr>
-              <a:t>,</a:t>
-            </a:r>
-            <a:r>
-              <a:rPr lang="en-US" sz="1100">
-                <a:solidFill>
-                  <a:srgbClr val="5B6478"/>
-                </a:solidFill>
-              </a:rPr>
-              <a:t>9</a:t>
-            </a:r>
-            <a:r>
-              <a:rPr b="0" i="0" lang="en-US" sz="1100" u="none" cap="none" strike="noStrike">
-                <a:solidFill>
-                  <a:srgbClr val="5B6478"/>
-                </a:solidFill>
-                <a:latin typeface="Arial"/>
-                <a:ea typeface="Arial"/>
-                <a:cs typeface="Arial"/>
-                <a:sym typeface="Arial"/>
-              </a:rPr>
-              <a:t>00시간</a:t>
+              <a:t>연 12,900시간</a:t>
             </a:r>
             <a:endParaRPr b="0" i="0" sz="1100" u="none" cap="none" strike="noStrike">
               <a:solidFill>
@@ -21128,8 +21202,8 @@
         </p:nvSpPr>
         <p:spPr>
           <a:xfrm>
-            <a:off x="548640" y="4370832"/>
-            <a:ext cx="8046720" cy="457200"/>
+            <a:off x="365750" y="4370825"/>
+            <a:ext cx="8412600" cy="457200"/>
           </a:xfrm>
           <a:prstGeom prst="rect">
             <a:avLst/>
@@ -21145,7 +21219,7 @@
           </a:bodyPr>
           <a:lstStyle/>
           <a:p>
-            <a:pPr indent="0" lvl="0" marL="0" marR="0" rtl="0" algn="l">
+            <a:pPr indent="0" lvl="0" marL="0" marR="0" rtl="0" algn="ctr">
               <a:lnSpc>
                 <a:spcPct val="100000"/>
               </a:lnSpc>
@@ -21163,7 +21237,7 @@
               <a:buNone/>
             </a:pPr>
             <a:r>
-              <a:rPr b="1" i="0" lang="en-US" sz="1200" u="none" cap="none" strike="noStrike">
+              <a:rPr b="1" i="0" lang="en-US" sz="1300" u="none" cap="none" strike="noStrike">
                 <a:solidFill>
                   <a:srgbClr val="FFFFFF"/>
                 </a:solidFill>
@@ -21172,18 +21246,18 @@
                 <a:cs typeface="Arial"/>
                 <a:sym typeface="Arial"/>
               </a:rPr>
-              <a:t>가장 보수적으로 잡아도 65개 매장에서 연 </a:t>
-            </a:r>
-            <a:r>
-              <a:rPr b="1" lang="en-US" sz="1200">
+              <a:t>가장 보수적으로 잡아도 65개 매장에서 연 5,200시간입니다</a:t>
+            </a:r>
+            <a:r>
+              <a:rPr b="1" lang="en-US" sz="1300">
                 <a:solidFill>
                   <a:srgbClr val="FFFFFF"/>
                 </a:solidFill>
               </a:rPr>
-              <a:t>5</a:t>
-            </a:r>
-            <a:r>
-              <a:rPr b="1" i="0" lang="en-US" sz="1200" u="none" cap="none" strike="noStrike">
+              <a:t>!</a:t>
+            </a:r>
+            <a:r>
+              <a:rPr b="1" i="0" lang="en-US" sz="1300" u="none" cap="none" strike="noStrike">
                 <a:solidFill>
                   <a:srgbClr val="FFFFFF"/>
                 </a:solidFill>
@@ -21192,18 +21266,18 @@
                 <a:cs typeface="Arial"/>
                 <a:sym typeface="Arial"/>
               </a:rPr>
-              <a:t>,</a:t>
-            </a:r>
-            <a:r>
-              <a:rPr b="1" lang="en-US" sz="1200">
+              <a:t> </a:t>
+            </a:r>
+            <a:r>
+              <a:rPr b="1" lang="en-US" sz="1300">
                 <a:solidFill>
                   <a:srgbClr val="FFFFFF"/>
                 </a:solidFill>
               </a:rPr>
-              <a:t>2</a:t>
-            </a:r>
-            <a:r>
-              <a:rPr b="1" i="0" lang="en-US" sz="1200" u="none" cap="none" strike="noStrike">
+              <a:t>비용 투자 없이, 시간을 버는 혁신</a:t>
+            </a:r>
+            <a:r>
+              <a:rPr b="1" i="0" lang="en-US" sz="1300" u="none" cap="none" strike="noStrike">
                 <a:solidFill>
                   <a:srgbClr val="FFFFFF"/>
                 </a:solidFill>
@@ -21212,9 +21286,9 @@
                 <a:cs typeface="Arial"/>
                 <a:sym typeface="Arial"/>
               </a:rPr>
-              <a:t>00시간입니다 — 도입 비용이 0원이라 절약된 시간이 그대로 순증입니다</a:t>
-            </a:r>
-            <a:endParaRPr b="0" i="0" sz="1200" u="none" cap="none" strike="noStrike">
+              <a:t>!</a:t>
+            </a:r>
+            <a:endParaRPr b="0" i="0" sz="1300" u="none" cap="none" strike="noStrike">
               <a:solidFill>
                 <a:schemeClr val="dk1"/>
               </a:solidFill>
@@ -21479,6 +21553,208 @@
             <a:endParaRPr b="0" i="0" sz="900" u="none" cap="none" strike="noStrike">
               <a:solidFill>
                 <a:schemeClr val="dk1"/>
+              </a:solidFill>
+              <a:latin typeface="Arial"/>
+              <a:ea typeface="Arial"/>
+              <a:cs typeface="Arial"/>
+              <a:sym typeface="Arial"/>
+            </a:endParaRPr>
+          </a:p>
+        </p:txBody>
+      </p:sp>
+      <p:sp>
+        <p:nvSpPr>
+          <p:cNvPr id="294" name="Google Shape;294;p17"/>
+          <p:cNvSpPr/>
+          <p:nvPr/>
+        </p:nvSpPr>
+        <p:spPr>
+          <a:xfrm>
+            <a:off x="3345694" y="4059928"/>
+            <a:ext cx="2296800" cy="183000"/>
+          </a:xfrm>
+          <a:prstGeom prst="rect">
+            <a:avLst/>
+          </a:prstGeom>
+          <a:noFill/>
+          <a:ln>
+            <a:noFill/>
+          </a:ln>
+        </p:spPr>
+        <p:txBody>
+          <a:bodyPr anchorCtr="0" anchor="ctr" bIns="45700" lIns="91425" spcFirstLastPara="1" rIns="91425" wrap="square" tIns="45700">
+            <a:noAutofit/>
+          </a:bodyPr>
+          <a:lstStyle/>
+          <a:p>
+            <a:pPr indent="0" lvl="0" marL="0" marR="0" rtl="0" algn="l">
+              <a:lnSpc>
+                <a:spcPct val="100000"/>
+              </a:lnSpc>
+              <a:spcBef>
+                <a:spcPts val="0"/>
+              </a:spcBef>
+              <a:spcAft>
+                <a:spcPts val="0"/>
+              </a:spcAft>
+              <a:buClr>
+                <a:srgbClr val="5B6478"/>
+              </a:buClr>
+              <a:buSzPts val="850"/>
+              <a:buFont typeface="Malgun Gothic"/>
+              <a:buNone/>
+            </a:pPr>
+            <a:r>
+              <a:rPr lang="en-US" sz="850">
+                <a:solidFill>
+                  <a:schemeClr val="lt1"/>
+                </a:solidFill>
+              </a:rPr>
+              <a:t>점당 </a:t>
+            </a:r>
+            <a:r>
+              <a:rPr lang="en-US" sz="850">
+                <a:solidFill>
+                  <a:schemeClr val="lt1"/>
+                </a:solidFill>
+              </a:rPr>
+              <a:t>일</a:t>
+            </a:r>
+            <a:r>
+              <a:rPr lang="en-US" sz="850">
+                <a:solidFill>
+                  <a:schemeClr val="lt1"/>
+                </a:solidFill>
+              </a:rPr>
+              <a:t> 22분 효율</a:t>
+            </a:r>
+            <a:endParaRPr b="0" i="0" sz="850" u="none" cap="none" strike="noStrike">
+              <a:solidFill>
+                <a:schemeClr val="lt1"/>
+              </a:solidFill>
+              <a:latin typeface="Arial"/>
+              <a:ea typeface="Arial"/>
+              <a:cs typeface="Arial"/>
+              <a:sym typeface="Arial"/>
+            </a:endParaRPr>
+          </a:p>
+        </p:txBody>
+      </p:sp>
+      <p:sp>
+        <p:nvSpPr>
+          <p:cNvPr id="295" name="Google Shape;295;p17"/>
+          <p:cNvSpPr/>
+          <p:nvPr/>
+        </p:nvSpPr>
+        <p:spPr>
+          <a:xfrm>
+            <a:off x="493600" y="4066128"/>
+            <a:ext cx="2296800" cy="183000"/>
+          </a:xfrm>
+          <a:prstGeom prst="rect">
+            <a:avLst/>
+          </a:prstGeom>
+          <a:noFill/>
+          <a:ln>
+            <a:noFill/>
+          </a:ln>
+        </p:spPr>
+        <p:txBody>
+          <a:bodyPr anchorCtr="0" anchor="ctr" bIns="45700" lIns="91425" spcFirstLastPara="1" rIns="91425" wrap="square" tIns="45700">
+            <a:noAutofit/>
+          </a:bodyPr>
+          <a:lstStyle/>
+          <a:p>
+            <a:pPr indent="0" lvl="0" marL="0" marR="0" rtl="0" algn="l">
+              <a:lnSpc>
+                <a:spcPct val="100000"/>
+              </a:lnSpc>
+              <a:spcBef>
+                <a:spcPts val="0"/>
+              </a:spcBef>
+              <a:spcAft>
+                <a:spcPts val="0"/>
+              </a:spcAft>
+              <a:buClr>
+                <a:srgbClr val="5B6478"/>
+              </a:buClr>
+              <a:buSzPts val="850"/>
+              <a:buFont typeface="Malgun Gothic"/>
+              <a:buNone/>
+            </a:pPr>
+            <a:r>
+              <a:rPr lang="en-US" sz="850">
+                <a:solidFill>
+                  <a:srgbClr val="5B6478"/>
+                </a:solidFill>
+              </a:rPr>
+              <a:t>점당 일 13분 효율</a:t>
+            </a:r>
+            <a:endParaRPr b="0" i="0" sz="850" u="none" cap="none" strike="noStrike">
+              <a:solidFill>
+                <a:srgbClr val="5B6478"/>
+              </a:solidFill>
+              <a:latin typeface="Arial"/>
+              <a:ea typeface="Arial"/>
+              <a:cs typeface="Arial"/>
+              <a:sym typeface="Arial"/>
+            </a:endParaRPr>
+          </a:p>
+        </p:txBody>
+      </p:sp>
+      <p:sp>
+        <p:nvSpPr>
+          <p:cNvPr id="296" name="Google Shape;296;p17"/>
+          <p:cNvSpPr/>
+          <p:nvPr/>
+        </p:nvSpPr>
+        <p:spPr>
+          <a:xfrm>
+            <a:off x="6107844" y="4059928"/>
+            <a:ext cx="2296800" cy="183000"/>
+          </a:xfrm>
+          <a:prstGeom prst="rect">
+            <a:avLst/>
+          </a:prstGeom>
+          <a:noFill/>
+          <a:ln>
+            <a:noFill/>
+          </a:ln>
+        </p:spPr>
+        <p:txBody>
+          <a:bodyPr anchorCtr="0" anchor="ctr" bIns="45700" lIns="91425" spcFirstLastPara="1" rIns="91425" wrap="square" tIns="45700">
+            <a:noAutofit/>
+          </a:bodyPr>
+          <a:lstStyle/>
+          <a:p>
+            <a:pPr indent="0" lvl="0" marL="0" marR="0" rtl="0" algn="l">
+              <a:lnSpc>
+                <a:spcPct val="100000"/>
+              </a:lnSpc>
+              <a:spcBef>
+                <a:spcPts val="0"/>
+              </a:spcBef>
+              <a:spcAft>
+                <a:spcPts val="0"/>
+              </a:spcAft>
+              <a:buClr>
+                <a:srgbClr val="5B6478"/>
+              </a:buClr>
+              <a:buSzPts val="850"/>
+              <a:buFont typeface="Malgun Gothic"/>
+              <a:buNone/>
+            </a:pPr>
+            <a:r>
+              <a:rPr lang="en-US" sz="850">
+                <a:solidFill>
+                  <a:srgbClr val="5B6478"/>
+                </a:solidFill>
+              </a:rPr>
+              <a:t>점당 일 33분 효율</a:t>
+            </a:r>
+            <a:endParaRPr b="0" i="0" sz="850" u="none" cap="none" strike="noStrike">
+              <a:solidFill>
+                <a:srgbClr val="5B6478"/>
               </a:solidFill>
               <a:latin typeface="Arial"/>
               <a:ea typeface="Arial"/>
